--- a/modulos/03-formatos-dados/sessao-ao-vivo-formatos-dados.pptx
+++ b/modulos/03-formatos-dados/sessao-ao-vivo-formatos-dados.pptx
@@ -2,28 +2,28 @@
 <file path=ppt/presentation.xml><?xml version="1.0" encoding="utf-8"?>
 <p:presentation xmlns:p="http://schemas.openxmlformats.org/presentationml/2006/main">
   <p:sldMasterIdLst>
-    <p:sldMasterId xmlns:r="http://schemas.openxmlformats.org/officeDocument/2006/relationships" id="2147483648" r:id="R05863cdca9fa4b54"/>
+    <p:sldMasterId xmlns:r="http://schemas.openxmlformats.org/officeDocument/2006/relationships" id="2147483648" r:id="R1098c36351eb4266"/>
   </p:sldMasterIdLst>
   <p:notesMasterIdLst>
-    <p:notesMasterId xmlns:r="http://schemas.openxmlformats.org/officeDocument/2006/relationships" r:id="R4e8835764119403f"/>
+    <p:notesMasterId xmlns:r="http://schemas.openxmlformats.org/officeDocument/2006/relationships" r:id="R6d14b143d24548b8"/>
   </p:notesMasterIdLst>
   <p:sldIdLst>
-    <p:sldId xmlns:r="http://schemas.openxmlformats.org/officeDocument/2006/relationships" id="256" r:id="Rd094cba50afb424c"/>
-    <p:sldId xmlns:r="http://schemas.openxmlformats.org/officeDocument/2006/relationships" id="257" r:id="R1863cb5122554fa8"/>
-    <p:sldId xmlns:r="http://schemas.openxmlformats.org/officeDocument/2006/relationships" id="258" r:id="Rcab37af5ffdb4e38"/>
-    <p:sldId xmlns:r="http://schemas.openxmlformats.org/officeDocument/2006/relationships" id="259" r:id="Rdb28521081fc43b3"/>
-    <p:sldId xmlns:r="http://schemas.openxmlformats.org/officeDocument/2006/relationships" id="260" r:id="Re2290e63b2354d67"/>
-    <p:sldId xmlns:r="http://schemas.openxmlformats.org/officeDocument/2006/relationships" id="261" r:id="R2dccc79c82ba417c"/>
-    <p:sldId xmlns:r="http://schemas.openxmlformats.org/officeDocument/2006/relationships" id="262" r:id="R80abd1ecb6bf4cff"/>
-    <p:sldId xmlns:r="http://schemas.openxmlformats.org/officeDocument/2006/relationships" id="263" r:id="Raa340acde4b145b9"/>
-    <p:sldId xmlns:r="http://schemas.openxmlformats.org/officeDocument/2006/relationships" id="264" r:id="R2acec9e9d1bc46d7"/>
-    <p:sldId xmlns:r="http://schemas.openxmlformats.org/officeDocument/2006/relationships" id="265" r:id="R09dfd98fbd4a4672"/>
-    <p:sldId xmlns:r="http://schemas.openxmlformats.org/officeDocument/2006/relationships" id="266" r:id="Rfded864a87684294"/>
-    <p:sldId xmlns:r="http://schemas.openxmlformats.org/officeDocument/2006/relationships" id="267" r:id="Re01465928a754663"/>
-    <p:sldId xmlns:r="http://schemas.openxmlformats.org/officeDocument/2006/relationships" id="268" r:id="R9e545e7424594f6d"/>
-    <p:sldId xmlns:r="http://schemas.openxmlformats.org/officeDocument/2006/relationships" id="269" r:id="R276ddebc4aa34570"/>
-    <p:sldId xmlns:r="http://schemas.openxmlformats.org/officeDocument/2006/relationships" id="270" r:id="R3caaf52c1f3f48d8"/>
-    <p:sldId xmlns:r="http://schemas.openxmlformats.org/officeDocument/2006/relationships" id="271" r:id="Rffd7f9e24ab94972"/>
+    <p:sldId xmlns:r="http://schemas.openxmlformats.org/officeDocument/2006/relationships" id="256" r:id="R3f6f9c8a81784ecc"/>
+    <p:sldId xmlns:r="http://schemas.openxmlformats.org/officeDocument/2006/relationships" id="257" r:id="Rc3a1419332ff438a"/>
+    <p:sldId xmlns:r="http://schemas.openxmlformats.org/officeDocument/2006/relationships" id="258" r:id="Ref22383bab2746a4"/>
+    <p:sldId xmlns:r="http://schemas.openxmlformats.org/officeDocument/2006/relationships" id="259" r:id="R6085f5fe522c4a6e"/>
+    <p:sldId xmlns:r="http://schemas.openxmlformats.org/officeDocument/2006/relationships" id="260" r:id="Rc2e96efcbfd44fb8"/>
+    <p:sldId xmlns:r="http://schemas.openxmlformats.org/officeDocument/2006/relationships" id="261" r:id="R2308cd56d7b044e9"/>
+    <p:sldId xmlns:r="http://schemas.openxmlformats.org/officeDocument/2006/relationships" id="262" r:id="R9431cf46e2884a6c"/>
+    <p:sldId xmlns:r="http://schemas.openxmlformats.org/officeDocument/2006/relationships" id="263" r:id="R57e03ff31f244932"/>
+    <p:sldId xmlns:r="http://schemas.openxmlformats.org/officeDocument/2006/relationships" id="264" r:id="R5b31f52cdcac4f1d"/>
+    <p:sldId xmlns:r="http://schemas.openxmlformats.org/officeDocument/2006/relationships" id="265" r:id="R759d9f42aac44c7b"/>
+    <p:sldId xmlns:r="http://schemas.openxmlformats.org/officeDocument/2006/relationships" id="266" r:id="Re0929087906043a0"/>
+    <p:sldId xmlns:r="http://schemas.openxmlformats.org/officeDocument/2006/relationships" id="267" r:id="Rf2f5f76c7627463f"/>
+    <p:sldId xmlns:r="http://schemas.openxmlformats.org/officeDocument/2006/relationships" id="268" r:id="Rf025e013f8c441c9"/>
+    <p:sldId xmlns:r="http://schemas.openxmlformats.org/officeDocument/2006/relationships" id="269" r:id="R3b6269182541441f"/>
+    <p:sldId xmlns:r="http://schemas.openxmlformats.org/officeDocument/2006/relationships" id="270" r:id="Rc1ad1cc34a1546bf"/>
+    <p:sldId xmlns:r="http://schemas.openxmlformats.org/officeDocument/2006/relationships" id="271" r:id="Re03043fb18c14c53"/>
   </p:sldIdLst>
   <p:sldSz cx="12192000" cy="6858000"/>
   <p:notesSz cx="6858000" cy="9144000"/>
@@ -1560,7 +1560,7 @@
   </p:cSld>
   <p:clrMap bg1="lt1" tx1="dk1" bg2="lt2" tx2="dk2" accent1="accent1" accent2="accent2" accent3="accent3" accent4="accent4" accent5="accent5" accent6="accent6" hlink="hlink" folHlink="folHlink"/>
   <p:sldLayoutIdLst>
-    <p:sldLayoutId xmlns:r="http://schemas.openxmlformats.org/officeDocument/2006/relationships" id="2147483649" r:id="R28656ea597014cfd"/>
+    <p:sldLayoutId xmlns:r="http://schemas.openxmlformats.org/officeDocument/2006/relationships" id="2147483649" r:id="Rbe8037a87aed4b20"/>
   </p:sldLayoutIdLst>
   <p:txStyles>
     <p:titleStyle>
@@ -1848,7 +1848,7 @@
     <p:bg>
       <p:bgPr>
         <a:solidFill xmlns:a="http://schemas.openxmlformats.org/drawingml/2006/main">
-          <a:srgbClr val="0E1B3E"/>
+          <a:srgbClr val="070F26"/>
         </a:solidFill>
       </p:bgPr>
     </p:bg>
@@ -1866,7 +1866,7 @@
           <p:cNvPr id="1" name="">
             <a:extLst xmlns:a="http://schemas.openxmlformats.org/drawingml/2006/main">
               <a:ext uri="{FF2B5EF4-FFF2-40B4-BE49-F238E27FC236}">
-                <a16:creationId xmlns:a16="http://schemas.microsoft.com/office/drawing/2014/main" id="{CE14779C-6A19-4644-A2FE-5CBBD04D4EDD}"/>
+                <a16:creationId xmlns:a16="http://schemas.microsoft.com/office/drawing/2014/main" id="{A6311AED-3BC8-458E-B4FA-73DD5AAE7431}"/>
               </a:ext>
             </a:extLst>
           </p:cNvPr>
@@ -1884,7 +1884,7 @@
             <a:avLst/>
           </a:prstGeom>
           <a:solidFill xmlns:a="http://schemas.openxmlformats.org/drawingml/2006/main">
-            <a:srgbClr val="0E1B3E"/>
+            <a:srgbClr val="070F26"/>
           </a:solidFill>
           <a:ln xmlns:a="http://schemas.openxmlformats.org/drawingml/2006/main" w="0">
             <a:solidFill>
@@ -1905,7 +1905,7 @@
           <p:nvPr/>
         </p:nvPicPr>
         <p:blipFill>
-          <a:blip xmlns:r="http://schemas.openxmlformats.org/officeDocument/2006/relationships" xmlns:a="http://schemas.openxmlformats.org/drawingml/2006/main" r:embed="R9b89c621af2a46d5"/>
+          <a:blip xmlns:r="http://schemas.openxmlformats.org/officeDocument/2006/relationships" xmlns:a="http://schemas.openxmlformats.org/drawingml/2006/main" r:embed="Readd80dcfe95484b"/>
           <a:stretch xmlns:a="http://schemas.openxmlformats.org/drawingml/2006/main"/>
         </p:blipFill>
         <p:spPr>
@@ -1923,7 +1923,7 @@
           <p:cNvPr id="3" name="">
             <a:extLst xmlns:a="http://schemas.openxmlformats.org/drawingml/2006/main">
               <a:ext uri="{FF2B5EF4-FFF2-40B4-BE49-F238E27FC236}">
-                <a16:creationId xmlns:a16="http://schemas.microsoft.com/office/drawing/2014/main" id="{3042A8E6-8314-417D-A6C4-4CDDE844AD55}"/>
+                <a16:creationId xmlns:a16="http://schemas.microsoft.com/office/drawing/2014/main" id="{DC4D359D-9F58-45E9-BB5C-1FD8B2B0F277}"/>
               </a:ext>
             </a:extLst>
           </p:cNvPr>
@@ -1981,7 +1981,7 @@
           <p:cNvPr id="4" name="">
             <a:extLst xmlns:a="http://schemas.openxmlformats.org/drawingml/2006/main">
               <a:ext uri="{FF2B5EF4-FFF2-40B4-BE49-F238E27FC236}">
-                <a16:creationId xmlns:a16="http://schemas.microsoft.com/office/drawing/2014/main" id="{1A4A20F2-39AD-4962-A988-B946974A0B54}"/>
+                <a16:creationId xmlns:a16="http://schemas.microsoft.com/office/drawing/2014/main" id="{FF47F5DA-7EDC-410D-8E08-F70DA3DAB4D3}"/>
               </a:ext>
             </a:extLst>
           </p:cNvPr>
@@ -2039,7 +2039,7 @@
           <p:cNvPr id="5" name="">
             <a:extLst xmlns:a="http://schemas.openxmlformats.org/drawingml/2006/main">
               <a:ext uri="{FF2B5EF4-FFF2-40B4-BE49-F238E27FC236}">
-                <a16:creationId xmlns:a16="http://schemas.microsoft.com/office/drawing/2014/main" id="{81442904-386C-416F-8C4C-053DAE0217E7}"/>
+                <a16:creationId xmlns:a16="http://schemas.microsoft.com/office/drawing/2014/main" id="{35EF06D7-8C91-409F-9C4A-C31EFD7DB30E}"/>
               </a:ext>
             </a:extLst>
           </p:cNvPr>
@@ -2101,7 +2101,7 @@
           <p:nvPr/>
         </p:nvPicPr>
         <p:blipFill>
-          <a:blip xmlns:r="http://schemas.openxmlformats.org/officeDocument/2006/relationships" xmlns:a="http://schemas.openxmlformats.org/drawingml/2006/main" r:embed="R4130f9c12aab4907"/>
+          <a:blip xmlns:r="http://schemas.openxmlformats.org/officeDocument/2006/relationships" xmlns:a="http://schemas.openxmlformats.org/drawingml/2006/main" r:embed="R99f588a19af74740"/>
           <a:stretch xmlns:a="http://schemas.openxmlformats.org/drawingml/2006/main"/>
         </p:blipFill>
         <p:spPr>
@@ -2119,7 +2119,7 @@
           <p:cNvPr id="7" name="">
             <a:extLst xmlns:a="http://schemas.openxmlformats.org/drawingml/2006/main">
               <a:ext uri="{FF2B5EF4-FFF2-40B4-BE49-F238E27FC236}">
-                <a16:creationId xmlns:a16="http://schemas.microsoft.com/office/drawing/2014/main" id="{676B2A0A-A29B-470F-A021-747A63FDCF92}"/>
+                <a16:creationId xmlns:a16="http://schemas.microsoft.com/office/drawing/2014/main" id="{0868F6D2-A509-4941-9680-974AFDD0469F}"/>
               </a:ext>
             </a:extLst>
           </p:cNvPr>
@@ -2177,7 +2177,7 @@
           <p:cNvPr id="8" name="">
             <a:extLst xmlns:a="http://schemas.openxmlformats.org/drawingml/2006/main">
               <a:ext uri="{FF2B5EF4-FFF2-40B4-BE49-F238E27FC236}">
-                <a16:creationId xmlns:a16="http://schemas.microsoft.com/office/drawing/2014/main" id="{A8CD0A18-7C86-4FA2-B12F-D5183C87E6FE}"/>
+                <a16:creationId xmlns:a16="http://schemas.microsoft.com/office/drawing/2014/main" id="{4A4190C9-D9DF-4629-BC61-364F1F6B264A}"/>
               </a:ext>
             </a:extLst>
           </p:cNvPr>
@@ -2235,7 +2235,7 @@
           <p:cNvPr id="9" name="">
             <a:extLst xmlns:a="http://schemas.openxmlformats.org/drawingml/2006/main">
               <a:ext uri="{FF2B5EF4-FFF2-40B4-BE49-F238E27FC236}">
-                <a16:creationId xmlns:a16="http://schemas.microsoft.com/office/drawing/2014/main" id="{5D5F2466-4E3C-44BA-A6C3-2261B60BC06A}"/>
+                <a16:creationId xmlns:a16="http://schemas.microsoft.com/office/drawing/2014/main" id="{DB23CE7D-96B6-4BD1-AF7C-A65181FE549B}"/>
               </a:ext>
             </a:extLst>
           </p:cNvPr>
@@ -2293,7 +2293,7 @@
           <p:cNvPr id="10" name="">
             <a:extLst xmlns:a="http://schemas.openxmlformats.org/drawingml/2006/main">
               <a:ext uri="{FF2B5EF4-FFF2-40B4-BE49-F238E27FC236}">
-                <a16:creationId xmlns:a16="http://schemas.microsoft.com/office/drawing/2014/main" id="{8ADB8216-E1E1-4FD2-85F1-87198C82605E}"/>
+                <a16:creationId xmlns:a16="http://schemas.microsoft.com/office/drawing/2014/main" id="{D9A39B9E-42FA-4D84-A80E-7B69E03CAB83}"/>
               </a:ext>
             </a:extLst>
           </p:cNvPr>
@@ -2328,7 +2328,7 @@
           <p:cNvPr id="11" name="">
             <a:extLst xmlns:a="http://schemas.openxmlformats.org/drawingml/2006/main">
               <a:ext uri="{FF2B5EF4-FFF2-40B4-BE49-F238E27FC236}">
-                <a16:creationId xmlns:a16="http://schemas.microsoft.com/office/drawing/2014/main" id="{89B02155-B8C8-4E95-B8DB-1BB1BD288D7B}"/>
+                <a16:creationId xmlns:a16="http://schemas.microsoft.com/office/drawing/2014/main" id="{F457197E-31F8-42B5-B444-358CD443C49F}"/>
               </a:ext>
             </a:extLst>
           </p:cNvPr>
@@ -2384,7 +2384,7 @@
     </p:spTree>
     <p:extLst>
       <p:ext uri="{BB962C8B-B14F-4D97-AF65-F5344CB8AC3E}">
-        <p14:creationId xmlns:p14="http://schemas.microsoft.com/office/powerpoint/2010/main" val="1256942455"/>
+        <p14:creationId xmlns:p14="http://schemas.microsoft.com/office/powerpoint/2010/main" val="1371403471"/>
       </p:ext>
     </p:extLst>
   </p:cSld>
@@ -2415,7 +2415,7 @@
           <p:cNvPr id="1" name="">
             <a:extLst xmlns:a="http://schemas.openxmlformats.org/drawingml/2006/main">
               <a:ext uri="{FF2B5EF4-FFF2-40B4-BE49-F238E27FC236}">
-                <a16:creationId xmlns:a16="http://schemas.microsoft.com/office/drawing/2014/main" id="{944EBA76-C9AC-4246-996C-2E5FFBB8F4EF}"/>
+                <a16:creationId xmlns:a16="http://schemas.microsoft.com/office/drawing/2014/main" id="{35B99A92-6161-4407-BFE8-4F1F7311D5B9}"/>
               </a:ext>
             </a:extLst>
           </p:cNvPr>
@@ -2454,7 +2454,7 @@
           <p:nvPr/>
         </p:nvPicPr>
         <p:blipFill>
-          <a:blip xmlns:r="http://schemas.openxmlformats.org/officeDocument/2006/relationships" xmlns:a="http://schemas.openxmlformats.org/drawingml/2006/main" r:embed="R5268136a2da541f2"/>
+          <a:blip xmlns:r="http://schemas.openxmlformats.org/officeDocument/2006/relationships" xmlns:a="http://schemas.openxmlformats.org/drawingml/2006/main" r:embed="R3766b1aef5be4b73"/>
           <a:stretch xmlns:a="http://schemas.openxmlformats.org/drawingml/2006/main"/>
         </p:blipFill>
         <p:spPr>
@@ -2472,7 +2472,7 @@
           <p:cNvPr id="3" name="">
             <a:extLst xmlns:a="http://schemas.openxmlformats.org/drawingml/2006/main">
               <a:ext uri="{FF2B5EF4-FFF2-40B4-BE49-F238E27FC236}">
-                <a16:creationId xmlns:a16="http://schemas.microsoft.com/office/drawing/2014/main" id="{DA876A95-BAF1-41AD-B5B3-4FFE230A6B58}"/>
+                <a16:creationId xmlns:a16="http://schemas.microsoft.com/office/drawing/2014/main" id="{30AA01E5-9DDF-4386-BD54-D0F5271A86AC}"/>
               </a:ext>
             </a:extLst>
           </p:cNvPr>
@@ -2510,14 +2510,14 @@
             <a:pPr algn="r">
               <a:defRPr sz="825" b="1">
                 <a:solidFill>
-                  <a:srgbClr val="0E1B3E"/>
+                  <a:srgbClr val="070F26"/>
                 </a:solidFill>
               </a:defRPr>
             </a:pPr>
             <a:r>
               <a:rPr sz="825" b="1">
                 <a:solidFill>
-                  <a:srgbClr val="0E1B3E"/>
+                  <a:srgbClr val="070F26"/>
                 </a:solidFill>
               </a:rPr>
               <a:t>NTT DATA UNIVERSITY</a:t>
@@ -2530,7 +2530,7 @@
           <p:cNvPr id="4" name="">
             <a:extLst xmlns:a="http://schemas.openxmlformats.org/drawingml/2006/main">
               <a:ext uri="{FF2B5EF4-FFF2-40B4-BE49-F238E27FC236}">
-                <a16:creationId xmlns:a16="http://schemas.microsoft.com/office/drawing/2014/main" id="{58FD975D-FEC1-4DB0-BC5B-0DFCECD0AC12}"/>
+                <a16:creationId xmlns:a16="http://schemas.microsoft.com/office/drawing/2014/main" id="{4FCFCCF7-6067-49EA-A582-8EE404FFFA64}"/>
               </a:ext>
             </a:extLst>
           </p:cNvPr>
@@ -2588,7 +2588,7 @@
           <p:cNvPr id="5" name="">
             <a:extLst xmlns:a="http://schemas.openxmlformats.org/drawingml/2006/main">
               <a:ext uri="{FF2B5EF4-FFF2-40B4-BE49-F238E27FC236}">
-                <a16:creationId xmlns:a16="http://schemas.microsoft.com/office/drawing/2014/main" id="{8963AC2B-E670-4EDF-9E24-A28A897FEC3D}"/>
+                <a16:creationId xmlns:a16="http://schemas.microsoft.com/office/drawing/2014/main" id="{6BEC8D43-AF28-4786-9C85-D819C4CD1241}"/>
               </a:ext>
             </a:extLst>
           </p:cNvPr>
@@ -2646,7 +2646,7 @@
           <p:cNvPr id="6" name="">
             <a:extLst xmlns:a="http://schemas.openxmlformats.org/drawingml/2006/main">
               <a:ext uri="{FF2B5EF4-FFF2-40B4-BE49-F238E27FC236}">
-                <a16:creationId xmlns:a16="http://schemas.microsoft.com/office/drawing/2014/main" id="{DABA54AD-E85E-46D9-B666-E0C482289E41}"/>
+                <a16:creationId xmlns:a16="http://schemas.microsoft.com/office/drawing/2014/main" id="{A39EB0A2-0BFD-4A70-A705-A8B031651AB0}"/>
               </a:ext>
             </a:extLst>
           </p:cNvPr>
@@ -2684,14 +2684,14 @@
             <a:pPr algn="r">
               <a:defRPr sz="675" b="1">
                 <a:solidFill>
-                  <a:srgbClr val="0E1B3E"/>
+                  <a:srgbClr val="070F26"/>
                 </a:solidFill>
               </a:defRPr>
             </a:pPr>
             <a:r>
               <a:rPr sz="675" b="1">
                 <a:solidFill>
-                  <a:srgbClr val="0E1B3E"/>
+                  <a:srgbClr val="070F26"/>
                 </a:solidFill>
               </a:rPr>
               <a:t>NTT DATA UNIVERSITY</a:t>
@@ -2704,7 +2704,7 @@
           <p:cNvPr id="7" name="">
             <a:extLst xmlns:a="http://schemas.openxmlformats.org/drawingml/2006/main">
               <a:ext uri="{FF2B5EF4-FFF2-40B4-BE49-F238E27FC236}">
-                <a16:creationId xmlns:a16="http://schemas.microsoft.com/office/drawing/2014/main" id="{71523A27-9482-4A4C-BD12-DCA5B250E0C3}"/>
+                <a16:creationId xmlns:a16="http://schemas.microsoft.com/office/drawing/2014/main" id="{07E4366B-AF7A-48CE-AC9F-BDD25F48AC00}"/>
               </a:ext>
             </a:extLst>
           </p:cNvPr>
@@ -2762,7 +2762,7 @@
           <p:cNvPr id="8" name="">
             <a:extLst xmlns:a="http://schemas.openxmlformats.org/drawingml/2006/main">
               <a:ext uri="{FF2B5EF4-FFF2-40B4-BE49-F238E27FC236}">
-                <a16:creationId xmlns:a16="http://schemas.microsoft.com/office/drawing/2014/main" id="{31E516B8-36F5-45A1-B34B-887AD45BEAB1}"/>
+                <a16:creationId xmlns:a16="http://schemas.microsoft.com/office/drawing/2014/main" id="{39640A7D-6B51-4D0B-869E-383DEFD0B2DC}"/>
               </a:ext>
             </a:extLst>
           </p:cNvPr>
@@ -2800,14 +2800,14 @@
             <a:pPr algn="l">
               <a:defRPr sz="2400" b="0">
                 <a:solidFill>
-                  <a:srgbClr val="0E1B3E"/>
+                  <a:srgbClr val="070F26"/>
                 </a:solidFill>
               </a:defRPr>
             </a:pPr>
             <a:r>
               <a:rPr sz="2400" b="0">
                 <a:solidFill>
-                  <a:srgbClr val="0E1B3E"/>
+                  <a:srgbClr val="070F26"/>
                 </a:solidFill>
               </a:rPr>
               <a:t>Os principais pontos de divergência esperados</a:t>
@@ -2820,7 +2820,7 @@
           <p:cNvPr id="9" name="">
             <a:extLst xmlns:a="http://schemas.openxmlformats.org/drawingml/2006/main">
               <a:ext uri="{FF2B5EF4-FFF2-40B4-BE49-F238E27FC236}">
-                <a16:creationId xmlns:a16="http://schemas.microsoft.com/office/drawing/2014/main" id="{F3C3E563-FFFE-4CB9-9038-4206DB39BF4B}"/>
+                <a16:creationId xmlns:a16="http://schemas.microsoft.com/office/drawing/2014/main" id="{081A3A4A-75FA-4872-A834-0A08B5DB4920}"/>
               </a:ext>
             </a:extLst>
           </p:cNvPr>
@@ -2878,7 +2878,7 @@
           <p:cNvPr id="10" name="">
             <a:extLst xmlns:a="http://schemas.openxmlformats.org/drawingml/2006/main">
               <a:ext uri="{FF2B5EF4-FFF2-40B4-BE49-F238E27FC236}">
-                <a16:creationId xmlns:a16="http://schemas.microsoft.com/office/drawing/2014/main" id="{DF6AFCC3-638F-4C6B-AAD4-DB204F49148D}"/>
+                <a16:creationId xmlns:a16="http://schemas.microsoft.com/office/drawing/2014/main" id="{86097363-EA64-49C1-939B-50DBF7F1A528}"/>
               </a:ext>
             </a:extLst>
           </p:cNvPr>
@@ -2911,7 +2911,7 @@
           <p:cNvPr id="11" name="">
             <a:extLst xmlns:a="http://schemas.openxmlformats.org/drawingml/2006/main">
               <a:ext uri="{FF2B5EF4-FFF2-40B4-BE49-F238E27FC236}">
-                <a16:creationId xmlns:a16="http://schemas.microsoft.com/office/drawing/2014/main" id="{D5A5CC2C-6C64-474A-B34D-2DA21D0948AB}"/>
+                <a16:creationId xmlns:a16="http://schemas.microsoft.com/office/drawing/2014/main" id="{54EF0370-FC78-47F4-AFC8-9CEA3876EFD7}"/>
               </a:ext>
             </a:extLst>
           </p:cNvPr>
@@ -2946,7 +2946,7 @@
           <p:cNvPr id="12" name="">
             <a:extLst xmlns:a="http://schemas.openxmlformats.org/drawingml/2006/main">
               <a:ext uri="{FF2B5EF4-FFF2-40B4-BE49-F238E27FC236}">
-                <a16:creationId xmlns:a16="http://schemas.microsoft.com/office/drawing/2014/main" id="{8395410D-25CF-4CE6-ABDF-98B3ABE4F9D7}"/>
+                <a16:creationId xmlns:a16="http://schemas.microsoft.com/office/drawing/2014/main" id="{8FD08184-8CD6-415C-B665-89AE35D9C06F}"/>
               </a:ext>
             </a:extLst>
           </p:cNvPr>
@@ -3004,7 +3004,7 @@
           <p:cNvPr id="13" name="">
             <a:extLst xmlns:a="http://schemas.openxmlformats.org/drawingml/2006/main">
               <a:ext uri="{FF2B5EF4-FFF2-40B4-BE49-F238E27FC236}">
-                <a16:creationId xmlns:a16="http://schemas.microsoft.com/office/drawing/2014/main" id="{3A0D3EF0-7209-4338-BD16-21A6E867FADE}"/>
+                <a16:creationId xmlns:a16="http://schemas.microsoft.com/office/drawing/2014/main" id="{4E988A44-FC70-45E1-BD77-1389707D4982}"/>
               </a:ext>
             </a:extLst>
           </p:cNvPr>
@@ -3079,7 +3079,7 @@
           <p:cNvPr id="14" name="">
             <a:extLst xmlns:a="http://schemas.openxmlformats.org/drawingml/2006/main">
               <a:ext uri="{FF2B5EF4-FFF2-40B4-BE49-F238E27FC236}">
-                <a16:creationId xmlns:a16="http://schemas.microsoft.com/office/drawing/2014/main" id="{FEAC1509-6045-4F6B-B9A7-DEB88285BA4B}"/>
+                <a16:creationId xmlns:a16="http://schemas.microsoft.com/office/drawing/2014/main" id="{097787A2-BC56-457E-9CE8-54574CD47A1D}"/>
               </a:ext>
             </a:extLst>
           </p:cNvPr>
@@ -3112,7 +3112,7 @@
           <p:cNvPr id="15" name="">
             <a:extLst xmlns:a="http://schemas.openxmlformats.org/drawingml/2006/main">
               <a:ext uri="{FF2B5EF4-FFF2-40B4-BE49-F238E27FC236}">
-                <a16:creationId xmlns:a16="http://schemas.microsoft.com/office/drawing/2014/main" id="{2E252E5D-22F1-4EE2-A2D8-FCA11D8E196D}"/>
+                <a16:creationId xmlns:a16="http://schemas.microsoft.com/office/drawing/2014/main" id="{3863C92B-C2FB-4077-A85C-0C0B7CB9A810}"/>
               </a:ext>
             </a:extLst>
           </p:cNvPr>
@@ -3147,7 +3147,7 @@
           <p:cNvPr id="16" name="">
             <a:extLst xmlns:a="http://schemas.openxmlformats.org/drawingml/2006/main">
               <a:ext uri="{FF2B5EF4-FFF2-40B4-BE49-F238E27FC236}">
-                <a16:creationId xmlns:a16="http://schemas.microsoft.com/office/drawing/2014/main" id="{919632E8-FDC1-455F-8B87-B1D28C7F4F9A}"/>
+                <a16:creationId xmlns:a16="http://schemas.microsoft.com/office/drawing/2014/main" id="{5420691E-512F-47C2-A4E5-CEF27AF3A9CE}"/>
               </a:ext>
             </a:extLst>
           </p:cNvPr>
@@ -3205,7 +3205,7 @@
           <p:cNvPr id="17" name="">
             <a:extLst xmlns:a="http://schemas.openxmlformats.org/drawingml/2006/main">
               <a:ext uri="{FF2B5EF4-FFF2-40B4-BE49-F238E27FC236}">
-                <a16:creationId xmlns:a16="http://schemas.microsoft.com/office/drawing/2014/main" id="{CBBC8FDE-5ECB-4C48-80E5-88363D6113CD}"/>
+                <a16:creationId xmlns:a16="http://schemas.microsoft.com/office/drawing/2014/main" id="{2E0E5F7E-2C51-4A81-8379-23F07A985B51}"/>
               </a:ext>
             </a:extLst>
           </p:cNvPr>
@@ -3280,7 +3280,7 @@
           <p:cNvPr id="18" name="">
             <a:extLst xmlns:a="http://schemas.openxmlformats.org/drawingml/2006/main">
               <a:ext uri="{FF2B5EF4-FFF2-40B4-BE49-F238E27FC236}">
-                <a16:creationId xmlns:a16="http://schemas.microsoft.com/office/drawing/2014/main" id="{6F233C32-A83F-4550-8DC5-44E9969C0F94}"/>
+                <a16:creationId xmlns:a16="http://schemas.microsoft.com/office/drawing/2014/main" id="{7261EF6C-5CE8-4892-9169-16826C7C5C14}"/>
               </a:ext>
             </a:extLst>
           </p:cNvPr>
@@ -3313,7 +3313,7 @@
           <p:cNvPr id="19" name="">
             <a:extLst xmlns:a="http://schemas.openxmlformats.org/drawingml/2006/main">
               <a:ext uri="{FF2B5EF4-FFF2-40B4-BE49-F238E27FC236}">
-                <a16:creationId xmlns:a16="http://schemas.microsoft.com/office/drawing/2014/main" id="{B1D5D59D-5634-4EFB-B7E0-3DC59770AB38}"/>
+                <a16:creationId xmlns:a16="http://schemas.microsoft.com/office/drawing/2014/main" id="{C192DD5B-2667-427F-ACB8-42814295B5AC}"/>
               </a:ext>
             </a:extLst>
           </p:cNvPr>
@@ -3348,7 +3348,7 @@
           <p:cNvPr id="20" name="">
             <a:extLst xmlns:a="http://schemas.openxmlformats.org/drawingml/2006/main">
               <a:ext uri="{FF2B5EF4-FFF2-40B4-BE49-F238E27FC236}">
-                <a16:creationId xmlns:a16="http://schemas.microsoft.com/office/drawing/2014/main" id="{37C84478-844B-4874-9C06-E955BE84D9CB}"/>
+                <a16:creationId xmlns:a16="http://schemas.microsoft.com/office/drawing/2014/main" id="{7040D657-956F-4D9A-9E60-9A93510589A9}"/>
               </a:ext>
             </a:extLst>
           </p:cNvPr>
@@ -3406,7 +3406,7 @@
           <p:cNvPr id="21" name="">
             <a:extLst xmlns:a="http://schemas.openxmlformats.org/drawingml/2006/main">
               <a:ext uri="{FF2B5EF4-FFF2-40B4-BE49-F238E27FC236}">
-                <a16:creationId xmlns:a16="http://schemas.microsoft.com/office/drawing/2014/main" id="{654CBF46-034B-45B5-82C4-858D0BB2EEB3}"/>
+                <a16:creationId xmlns:a16="http://schemas.microsoft.com/office/drawing/2014/main" id="{22D3568F-5DEB-4AAD-9D9C-F155DBACDB07}"/>
               </a:ext>
             </a:extLst>
           </p:cNvPr>
@@ -3481,7 +3481,7 @@
           <p:cNvPr id="22" name="">
             <a:extLst xmlns:a="http://schemas.openxmlformats.org/drawingml/2006/main">
               <a:ext uri="{FF2B5EF4-FFF2-40B4-BE49-F238E27FC236}">
-                <a16:creationId xmlns:a16="http://schemas.microsoft.com/office/drawing/2014/main" id="{4A3A9245-EAB8-49D5-B851-4B2D5E03D34F}"/>
+                <a16:creationId xmlns:a16="http://schemas.microsoft.com/office/drawing/2014/main" id="{30D67F40-5E17-46F4-A299-2B3E7C6C22AE}"/>
               </a:ext>
             </a:extLst>
           </p:cNvPr>
@@ -3514,7 +3514,7 @@
           <p:cNvPr id="23" name="">
             <a:extLst xmlns:a="http://schemas.openxmlformats.org/drawingml/2006/main">
               <a:ext uri="{FF2B5EF4-FFF2-40B4-BE49-F238E27FC236}">
-                <a16:creationId xmlns:a16="http://schemas.microsoft.com/office/drawing/2014/main" id="{63BBC6FC-6DBC-4002-81DA-14F813FBDABF}"/>
+                <a16:creationId xmlns:a16="http://schemas.microsoft.com/office/drawing/2014/main" id="{04545B31-9685-4B2A-A050-B0921E15E38D}"/>
               </a:ext>
             </a:extLst>
           </p:cNvPr>
@@ -3549,7 +3549,7 @@
           <p:cNvPr id="24" name="">
             <a:extLst xmlns:a="http://schemas.openxmlformats.org/drawingml/2006/main">
               <a:ext uri="{FF2B5EF4-FFF2-40B4-BE49-F238E27FC236}">
-                <a16:creationId xmlns:a16="http://schemas.microsoft.com/office/drawing/2014/main" id="{08F1C989-22DC-4F98-B21B-3F498D8B50C8}"/>
+                <a16:creationId xmlns:a16="http://schemas.microsoft.com/office/drawing/2014/main" id="{3175ECD9-DF5F-4080-91A3-7B52FE3CFAA0}"/>
               </a:ext>
             </a:extLst>
           </p:cNvPr>
@@ -3607,7 +3607,7 @@
           <p:cNvPr id="25" name="">
             <a:extLst xmlns:a="http://schemas.openxmlformats.org/drawingml/2006/main">
               <a:ext uri="{FF2B5EF4-FFF2-40B4-BE49-F238E27FC236}">
-                <a16:creationId xmlns:a16="http://schemas.microsoft.com/office/drawing/2014/main" id="{F6778EBD-36B3-4F99-9CD7-E569D5C42874}"/>
+                <a16:creationId xmlns:a16="http://schemas.microsoft.com/office/drawing/2014/main" id="{28E74592-CA49-4C19-81ED-D595E4F81908}"/>
               </a:ext>
             </a:extLst>
           </p:cNvPr>
@@ -3680,7 +3680,7 @@
     </p:spTree>
     <p:extLst>
       <p:ext uri="{BB962C8B-B14F-4D97-AF65-F5344CB8AC3E}">
-        <p14:creationId xmlns:p14="http://schemas.microsoft.com/office/powerpoint/2010/main" val="370276985"/>
+        <p14:creationId xmlns:p14="http://schemas.microsoft.com/office/powerpoint/2010/main" val="646864058"/>
       </p:ext>
     </p:extLst>
   </p:cSld>
@@ -3711,7 +3711,7 @@
           <p:cNvPr id="1" name="">
             <a:extLst xmlns:a="http://schemas.openxmlformats.org/drawingml/2006/main">
               <a:ext uri="{FF2B5EF4-FFF2-40B4-BE49-F238E27FC236}">
-                <a16:creationId xmlns:a16="http://schemas.microsoft.com/office/drawing/2014/main" id="{FC2B2AA4-2501-4F33-B2CC-916AEF3A1524}"/>
+                <a16:creationId xmlns:a16="http://schemas.microsoft.com/office/drawing/2014/main" id="{A181AC03-4BB5-425B-859B-0D74D309F7E3}"/>
               </a:ext>
             </a:extLst>
           </p:cNvPr>
@@ -3750,7 +3750,7 @@
           <p:nvPr/>
         </p:nvPicPr>
         <p:blipFill>
-          <a:blip xmlns:r="http://schemas.openxmlformats.org/officeDocument/2006/relationships" xmlns:a="http://schemas.openxmlformats.org/drawingml/2006/main" r:embed="R5cdb3638162f4382"/>
+          <a:blip xmlns:r="http://schemas.openxmlformats.org/officeDocument/2006/relationships" xmlns:a="http://schemas.openxmlformats.org/drawingml/2006/main" r:embed="R54045f1b112a4f54"/>
           <a:stretch xmlns:a="http://schemas.openxmlformats.org/drawingml/2006/main"/>
         </p:blipFill>
         <p:spPr>
@@ -3768,7 +3768,7 @@
           <p:cNvPr id="3" name="">
             <a:extLst xmlns:a="http://schemas.openxmlformats.org/drawingml/2006/main">
               <a:ext uri="{FF2B5EF4-FFF2-40B4-BE49-F238E27FC236}">
-                <a16:creationId xmlns:a16="http://schemas.microsoft.com/office/drawing/2014/main" id="{BBC674DE-BA0E-49A6-95B7-B321E1628C93}"/>
+                <a16:creationId xmlns:a16="http://schemas.microsoft.com/office/drawing/2014/main" id="{2C2A0038-B669-4DEF-B19D-66177225F72F}"/>
               </a:ext>
             </a:extLst>
           </p:cNvPr>
@@ -3806,14 +3806,14 @@
             <a:pPr algn="r">
               <a:defRPr sz="825" b="1">
                 <a:solidFill>
-                  <a:srgbClr val="0E1B3E"/>
+                  <a:srgbClr val="070F26"/>
                 </a:solidFill>
               </a:defRPr>
             </a:pPr>
             <a:r>
               <a:rPr sz="825" b="1">
                 <a:solidFill>
-                  <a:srgbClr val="0E1B3E"/>
+                  <a:srgbClr val="070F26"/>
                 </a:solidFill>
               </a:rPr>
               <a:t>NTT DATA UNIVERSITY</a:t>
@@ -3826,7 +3826,7 @@
           <p:cNvPr id="4" name="">
             <a:extLst xmlns:a="http://schemas.openxmlformats.org/drawingml/2006/main">
               <a:ext uri="{FF2B5EF4-FFF2-40B4-BE49-F238E27FC236}">
-                <a16:creationId xmlns:a16="http://schemas.microsoft.com/office/drawing/2014/main" id="{3B920A54-C7F5-4D7A-91B8-90B8B33A772F}"/>
+                <a16:creationId xmlns:a16="http://schemas.microsoft.com/office/drawing/2014/main" id="{65FA8C97-4A86-485C-910E-9F4B00D92AB7}"/>
               </a:ext>
             </a:extLst>
           </p:cNvPr>
@@ -3884,7 +3884,7 @@
           <p:cNvPr id="5" name="">
             <a:extLst xmlns:a="http://schemas.openxmlformats.org/drawingml/2006/main">
               <a:ext uri="{FF2B5EF4-FFF2-40B4-BE49-F238E27FC236}">
-                <a16:creationId xmlns:a16="http://schemas.microsoft.com/office/drawing/2014/main" id="{73ABDDAA-D37D-46D9-92D6-8A3CB86BBA40}"/>
+                <a16:creationId xmlns:a16="http://schemas.microsoft.com/office/drawing/2014/main" id="{E4803086-6D18-4467-8B75-C6138A777E37}"/>
               </a:ext>
             </a:extLst>
           </p:cNvPr>
@@ -3942,7 +3942,7 @@
           <p:cNvPr id="6" name="">
             <a:extLst xmlns:a="http://schemas.openxmlformats.org/drawingml/2006/main">
               <a:ext uri="{FF2B5EF4-FFF2-40B4-BE49-F238E27FC236}">
-                <a16:creationId xmlns:a16="http://schemas.microsoft.com/office/drawing/2014/main" id="{2486D368-B9C5-4C15-BA64-6BF06ED2194C}"/>
+                <a16:creationId xmlns:a16="http://schemas.microsoft.com/office/drawing/2014/main" id="{1CEB986E-F8D5-4281-B64B-F088FC8D2C52}"/>
               </a:ext>
             </a:extLst>
           </p:cNvPr>
@@ -3980,14 +3980,14 @@
             <a:pPr algn="r">
               <a:defRPr sz="675" b="1">
                 <a:solidFill>
-                  <a:srgbClr val="0E1B3E"/>
+                  <a:srgbClr val="070F26"/>
                 </a:solidFill>
               </a:defRPr>
             </a:pPr>
             <a:r>
               <a:rPr sz="675" b="1">
                 <a:solidFill>
-                  <a:srgbClr val="0E1B3E"/>
+                  <a:srgbClr val="070F26"/>
                 </a:solidFill>
               </a:rPr>
               <a:t>NTT DATA UNIVERSITY</a:t>
@@ -4000,7 +4000,7 @@
           <p:cNvPr id="7" name="">
             <a:extLst xmlns:a="http://schemas.openxmlformats.org/drawingml/2006/main">
               <a:ext uri="{FF2B5EF4-FFF2-40B4-BE49-F238E27FC236}">
-                <a16:creationId xmlns:a16="http://schemas.microsoft.com/office/drawing/2014/main" id="{1F53B44E-8DAB-4384-8027-FD85262711DA}"/>
+                <a16:creationId xmlns:a16="http://schemas.microsoft.com/office/drawing/2014/main" id="{C4EF9922-A4D1-44B8-A51C-08C602468498}"/>
               </a:ext>
             </a:extLst>
           </p:cNvPr>
@@ -4058,7 +4058,7 @@
           <p:cNvPr id="8" name="">
             <a:extLst xmlns:a="http://schemas.openxmlformats.org/drawingml/2006/main">
               <a:ext uri="{FF2B5EF4-FFF2-40B4-BE49-F238E27FC236}">
-                <a16:creationId xmlns:a16="http://schemas.microsoft.com/office/drawing/2014/main" id="{C4BBD032-5F46-41E0-A8DD-07B79EA1344A}"/>
+                <a16:creationId xmlns:a16="http://schemas.microsoft.com/office/drawing/2014/main" id="{E8E7DAD8-6824-46AA-B832-0832923896E9}"/>
               </a:ext>
             </a:extLst>
           </p:cNvPr>
@@ -4096,14 +4096,14 @@
             <a:pPr algn="l">
               <a:defRPr sz="2400" b="0">
                 <a:solidFill>
-                  <a:srgbClr val="0E1B3E"/>
+                  <a:srgbClr val="070F26"/>
                 </a:solidFill>
               </a:defRPr>
             </a:pPr>
             <a:r>
               <a:rPr sz="2400" b="0">
                 <a:solidFill>
-                  <a:srgbClr val="0E1B3E"/>
+                  <a:srgbClr val="070F26"/>
                 </a:solidFill>
               </a:rPr>
               <a:t>Critérios de decisão que o facilitador deve garantir</a:t>
@@ -4116,7 +4116,7 @@
           <p:cNvPr id="9" name="">
             <a:extLst xmlns:a="http://schemas.openxmlformats.org/drawingml/2006/main">
               <a:ext uri="{FF2B5EF4-FFF2-40B4-BE49-F238E27FC236}">
-                <a16:creationId xmlns:a16="http://schemas.microsoft.com/office/drawing/2014/main" id="{CDAF965A-B9B3-4558-91F2-BBE4900CB8AA}"/>
+                <a16:creationId xmlns:a16="http://schemas.microsoft.com/office/drawing/2014/main" id="{B04F59D6-B8F2-4EAA-9C8E-7104FF3BF933}"/>
               </a:ext>
             </a:extLst>
           </p:cNvPr>
@@ -4174,7 +4174,7 @@
           <p:cNvPr id="10" name="">
             <a:extLst xmlns:a="http://schemas.openxmlformats.org/drawingml/2006/main">
               <a:ext uri="{FF2B5EF4-FFF2-40B4-BE49-F238E27FC236}">
-                <a16:creationId xmlns:a16="http://schemas.microsoft.com/office/drawing/2014/main" id="{35E27334-0F53-4799-86BD-1F521B9C21CC}"/>
+                <a16:creationId xmlns:a16="http://schemas.microsoft.com/office/drawing/2014/main" id="{7095A277-E91C-4B86-A191-09DC62068B56}"/>
               </a:ext>
             </a:extLst>
           </p:cNvPr>
@@ -4207,7 +4207,7 @@
           <p:cNvPr id="11" name="">
             <a:extLst xmlns:a="http://schemas.openxmlformats.org/drawingml/2006/main">
               <a:ext uri="{FF2B5EF4-FFF2-40B4-BE49-F238E27FC236}">
-                <a16:creationId xmlns:a16="http://schemas.microsoft.com/office/drawing/2014/main" id="{7ED40F83-8EF5-4B82-A93C-0B3D72C120B6}"/>
+                <a16:creationId xmlns:a16="http://schemas.microsoft.com/office/drawing/2014/main" id="{92B7B39B-17E3-479F-BF68-BE9AECF2E819}"/>
               </a:ext>
             </a:extLst>
           </p:cNvPr>
@@ -4242,7 +4242,7 @@
           <p:cNvPr id="12" name="">
             <a:extLst xmlns:a="http://schemas.openxmlformats.org/drawingml/2006/main">
               <a:ext uri="{FF2B5EF4-FFF2-40B4-BE49-F238E27FC236}">
-                <a16:creationId xmlns:a16="http://schemas.microsoft.com/office/drawing/2014/main" id="{4983FB8B-6BCF-4EEE-9EB5-0BC4B453019A}"/>
+                <a16:creationId xmlns:a16="http://schemas.microsoft.com/office/drawing/2014/main" id="{D9F4B77B-0B96-4E82-8834-9103D63A977F}"/>
               </a:ext>
             </a:extLst>
           </p:cNvPr>
@@ -4300,7 +4300,7 @@
           <p:cNvPr id="13" name="">
             <a:extLst xmlns:a="http://schemas.openxmlformats.org/drawingml/2006/main">
               <a:ext uri="{FF2B5EF4-FFF2-40B4-BE49-F238E27FC236}">
-                <a16:creationId xmlns:a16="http://schemas.microsoft.com/office/drawing/2014/main" id="{F8AB05C6-860D-480E-8EC4-D0869268B369}"/>
+                <a16:creationId xmlns:a16="http://schemas.microsoft.com/office/drawing/2014/main" id="{6E0F4AD8-F970-4379-A2F4-078BF4FE24DE}"/>
               </a:ext>
             </a:extLst>
           </p:cNvPr>
@@ -4392,7 +4392,7 @@
           <p:cNvPr id="14" name="">
             <a:extLst xmlns:a="http://schemas.openxmlformats.org/drawingml/2006/main">
               <a:ext uri="{FF2B5EF4-FFF2-40B4-BE49-F238E27FC236}">
-                <a16:creationId xmlns:a16="http://schemas.microsoft.com/office/drawing/2014/main" id="{D0D95FA2-05EB-4BE1-A90E-9B3996895F34}"/>
+                <a16:creationId xmlns:a16="http://schemas.microsoft.com/office/drawing/2014/main" id="{D6872A7B-AB30-42D0-B702-E59544F58E85}"/>
               </a:ext>
             </a:extLst>
           </p:cNvPr>
@@ -4425,7 +4425,7 @@
           <p:cNvPr id="15" name="">
             <a:extLst xmlns:a="http://schemas.openxmlformats.org/drawingml/2006/main">
               <a:ext uri="{FF2B5EF4-FFF2-40B4-BE49-F238E27FC236}">
-                <a16:creationId xmlns:a16="http://schemas.microsoft.com/office/drawing/2014/main" id="{C80395A4-A244-47A0-B8AA-9F29D9780F4E}"/>
+                <a16:creationId xmlns:a16="http://schemas.microsoft.com/office/drawing/2014/main" id="{E8DE05D5-88F6-4381-A5FA-89522BF5DC21}"/>
               </a:ext>
             </a:extLst>
           </p:cNvPr>
@@ -4460,7 +4460,7 @@
           <p:cNvPr id="16" name="">
             <a:extLst xmlns:a="http://schemas.openxmlformats.org/drawingml/2006/main">
               <a:ext uri="{FF2B5EF4-FFF2-40B4-BE49-F238E27FC236}">
-                <a16:creationId xmlns:a16="http://schemas.microsoft.com/office/drawing/2014/main" id="{DB088BFC-A04E-4BE4-9581-1A0854883E09}"/>
+                <a16:creationId xmlns:a16="http://schemas.microsoft.com/office/drawing/2014/main" id="{B99F627D-37C3-4213-B6AD-09B0B1C346C8}"/>
               </a:ext>
             </a:extLst>
           </p:cNvPr>
@@ -4518,7 +4518,7 @@
           <p:cNvPr id="17" name="">
             <a:extLst xmlns:a="http://schemas.openxmlformats.org/drawingml/2006/main">
               <a:ext uri="{FF2B5EF4-FFF2-40B4-BE49-F238E27FC236}">
-                <a16:creationId xmlns:a16="http://schemas.microsoft.com/office/drawing/2014/main" id="{C9765622-1837-4ABE-84F9-253221096D05}"/>
+                <a16:creationId xmlns:a16="http://schemas.microsoft.com/office/drawing/2014/main" id="{3CDC2C33-0877-436D-AEA6-9998E7DEC74A}"/>
               </a:ext>
             </a:extLst>
           </p:cNvPr>
@@ -4610,7 +4610,7 @@
           <p:cNvPr id="18" name="">
             <a:extLst xmlns:a="http://schemas.openxmlformats.org/drawingml/2006/main">
               <a:ext uri="{FF2B5EF4-FFF2-40B4-BE49-F238E27FC236}">
-                <a16:creationId xmlns:a16="http://schemas.microsoft.com/office/drawing/2014/main" id="{629ECCD6-B70D-4B51-AF35-958CD981D2BC}"/>
+                <a16:creationId xmlns:a16="http://schemas.microsoft.com/office/drawing/2014/main" id="{76357767-2B65-4D35-946C-98E4CBD19A06}"/>
               </a:ext>
             </a:extLst>
           </p:cNvPr>
@@ -4643,7 +4643,7 @@
           <p:cNvPr id="19" name="">
             <a:extLst xmlns:a="http://schemas.openxmlformats.org/drawingml/2006/main">
               <a:ext uri="{FF2B5EF4-FFF2-40B4-BE49-F238E27FC236}">
-                <a16:creationId xmlns:a16="http://schemas.microsoft.com/office/drawing/2014/main" id="{72B55395-246D-43FE-8A73-1606440EFFB6}"/>
+                <a16:creationId xmlns:a16="http://schemas.microsoft.com/office/drawing/2014/main" id="{6FAA3636-BDC6-4676-9DC8-40BC5D721E31}"/>
               </a:ext>
             </a:extLst>
           </p:cNvPr>
@@ -4678,7 +4678,7 @@
           <p:cNvPr id="20" name="">
             <a:extLst xmlns:a="http://schemas.openxmlformats.org/drawingml/2006/main">
               <a:ext uri="{FF2B5EF4-FFF2-40B4-BE49-F238E27FC236}">
-                <a16:creationId xmlns:a16="http://schemas.microsoft.com/office/drawing/2014/main" id="{11E23F19-2B92-468C-8FB4-FE325A5E404C}"/>
+                <a16:creationId xmlns:a16="http://schemas.microsoft.com/office/drawing/2014/main" id="{F731ED33-86DB-4BA3-B972-3B585D82024B}"/>
               </a:ext>
             </a:extLst>
           </p:cNvPr>
@@ -4736,7 +4736,7 @@
           <p:cNvPr id="21" name="">
             <a:extLst xmlns:a="http://schemas.openxmlformats.org/drawingml/2006/main">
               <a:ext uri="{FF2B5EF4-FFF2-40B4-BE49-F238E27FC236}">
-                <a16:creationId xmlns:a16="http://schemas.microsoft.com/office/drawing/2014/main" id="{3BA6E2E7-954D-4411-B58E-37B27600F40D}"/>
+                <a16:creationId xmlns:a16="http://schemas.microsoft.com/office/drawing/2014/main" id="{E58049C9-7190-4496-BF1B-532A8273F80D}"/>
               </a:ext>
             </a:extLst>
           </p:cNvPr>
@@ -4826,7 +4826,7 @@
     </p:spTree>
     <p:extLst>
       <p:ext uri="{BB962C8B-B14F-4D97-AF65-F5344CB8AC3E}">
-        <p14:creationId xmlns:p14="http://schemas.microsoft.com/office/powerpoint/2010/main" val="130897029"/>
+        <p14:creationId xmlns:p14="http://schemas.microsoft.com/office/powerpoint/2010/main" val="95872688"/>
       </p:ext>
     </p:extLst>
   </p:cSld>
@@ -4839,7 +4839,7 @@
     <p:bg>
       <p:bgPr>
         <a:solidFill xmlns:a="http://schemas.openxmlformats.org/drawingml/2006/main">
-          <a:srgbClr val="0E1B3E"/>
+          <a:srgbClr val="070F26"/>
         </a:solidFill>
       </p:bgPr>
     </p:bg>
@@ -4857,7 +4857,7 @@
           <p:cNvPr id="1" name="">
             <a:extLst xmlns:a="http://schemas.openxmlformats.org/drawingml/2006/main">
               <a:ext uri="{FF2B5EF4-FFF2-40B4-BE49-F238E27FC236}">
-                <a16:creationId xmlns:a16="http://schemas.microsoft.com/office/drawing/2014/main" id="{3D62652A-D065-405D-8E73-11F8157FAD21}"/>
+                <a16:creationId xmlns:a16="http://schemas.microsoft.com/office/drawing/2014/main" id="{37A79C67-2206-4BBB-BCF4-E00C40C03220}"/>
               </a:ext>
             </a:extLst>
           </p:cNvPr>
@@ -4875,7 +4875,7 @@
             <a:avLst/>
           </a:prstGeom>
           <a:solidFill xmlns:a="http://schemas.openxmlformats.org/drawingml/2006/main">
-            <a:srgbClr val="0E1B3E"/>
+            <a:srgbClr val="070F26"/>
           </a:solidFill>
           <a:ln xmlns:a="http://schemas.openxmlformats.org/drawingml/2006/main" w="0">
             <a:solidFill>
@@ -4896,7 +4896,7 @@
           <p:nvPr/>
         </p:nvPicPr>
         <p:blipFill>
-          <a:blip xmlns:r="http://schemas.openxmlformats.org/officeDocument/2006/relationships" xmlns:a="http://schemas.openxmlformats.org/drawingml/2006/main" r:embed="R263f3e8f99174838"/>
+          <a:blip xmlns:r="http://schemas.openxmlformats.org/officeDocument/2006/relationships" xmlns:a="http://schemas.openxmlformats.org/drawingml/2006/main" r:embed="R443adcfe8eee4db7"/>
           <a:stretch xmlns:a="http://schemas.openxmlformats.org/drawingml/2006/main"/>
         </p:blipFill>
         <p:spPr>
@@ -4914,7 +4914,7 @@
           <p:cNvPr id="3" name="">
             <a:extLst xmlns:a="http://schemas.openxmlformats.org/drawingml/2006/main">
               <a:ext uri="{FF2B5EF4-FFF2-40B4-BE49-F238E27FC236}">
-                <a16:creationId xmlns:a16="http://schemas.microsoft.com/office/drawing/2014/main" id="{CB9B0C53-C0D8-4748-8E99-B42600A084A9}"/>
+                <a16:creationId xmlns:a16="http://schemas.microsoft.com/office/drawing/2014/main" id="{8D46DC8C-98E1-42F7-A8F4-4348EA799904}"/>
               </a:ext>
             </a:extLst>
           </p:cNvPr>
@@ -4972,7 +4972,7 @@
           <p:cNvPr id="4" name="">
             <a:extLst xmlns:a="http://schemas.openxmlformats.org/drawingml/2006/main">
               <a:ext uri="{FF2B5EF4-FFF2-40B4-BE49-F238E27FC236}">
-                <a16:creationId xmlns:a16="http://schemas.microsoft.com/office/drawing/2014/main" id="{17942B5A-F4E7-4541-93DE-8110DF425B8E}"/>
+                <a16:creationId xmlns:a16="http://schemas.microsoft.com/office/drawing/2014/main" id="{F50C28FB-69CE-4435-948C-12FAA90C654F}"/>
               </a:ext>
             </a:extLst>
           </p:cNvPr>
@@ -5030,7 +5030,7 @@
           <p:cNvPr id="5" name="">
             <a:extLst xmlns:a="http://schemas.openxmlformats.org/drawingml/2006/main">
               <a:ext uri="{FF2B5EF4-FFF2-40B4-BE49-F238E27FC236}">
-                <a16:creationId xmlns:a16="http://schemas.microsoft.com/office/drawing/2014/main" id="{14BB271B-9736-467F-80A7-2DE0417E653E}"/>
+                <a16:creationId xmlns:a16="http://schemas.microsoft.com/office/drawing/2014/main" id="{C6F601C4-D5DE-4229-A975-C0ED0F233CC1}"/>
               </a:ext>
             </a:extLst>
           </p:cNvPr>
@@ -5088,7 +5088,7 @@
           <p:cNvPr id="6" name="">
             <a:extLst xmlns:a="http://schemas.openxmlformats.org/drawingml/2006/main">
               <a:ext uri="{FF2B5EF4-FFF2-40B4-BE49-F238E27FC236}">
-                <a16:creationId xmlns:a16="http://schemas.microsoft.com/office/drawing/2014/main" id="{66167D22-70BE-453B-A406-84FE6080F557}"/>
+                <a16:creationId xmlns:a16="http://schemas.microsoft.com/office/drawing/2014/main" id="{264ECBD0-7008-41F0-99B6-0146C14B6451}"/>
               </a:ext>
             </a:extLst>
           </p:cNvPr>
@@ -5150,13 +5150,13 @@
           <p:nvPr/>
         </p:nvPicPr>
         <p:blipFill>
-          <a:blip xmlns:r="http://schemas.openxmlformats.org/officeDocument/2006/relationships" xmlns:a="http://schemas.openxmlformats.org/drawingml/2006/main" r:embed="R12426b52d1274e84"/>
+          <a:blip xmlns:r="http://schemas.openxmlformats.org/officeDocument/2006/relationships" xmlns:a="http://schemas.openxmlformats.org/drawingml/2006/main" r:embed="R4981fae5bef7426a"/>
           <a:stretch xmlns:a="http://schemas.openxmlformats.org/drawingml/2006/main"/>
         </p:blipFill>
         <p:spPr>
           <a:xfrm xmlns:a="http://schemas.openxmlformats.org/drawingml/2006/main">
-            <a:off x="476250" y="1257300"/>
-            <a:ext cx="2667000" cy="4533900"/>
+            <a:off x="0" y="1746250"/>
+            <a:ext cx="2667000" cy="3556000"/>
           </a:xfrm>
           <a:prstGeom xmlns:a="http://schemas.openxmlformats.org/drawingml/2006/main" prst="rect">
             <a:avLst/>
@@ -5168,7 +5168,7 @@
           <p:cNvPr id="8" name="">
             <a:extLst xmlns:a="http://schemas.openxmlformats.org/drawingml/2006/main">
               <a:ext uri="{FF2B5EF4-FFF2-40B4-BE49-F238E27FC236}">
-                <a16:creationId xmlns:a16="http://schemas.microsoft.com/office/drawing/2014/main" id="{B07CB898-E1CD-4036-83EA-EA82712198F3}"/>
+                <a16:creationId xmlns:a16="http://schemas.microsoft.com/office/drawing/2014/main" id="{FF9B58A6-B99C-4794-8EFC-EBC1ACE0C730}"/>
               </a:ext>
             </a:extLst>
           </p:cNvPr>
@@ -5226,7 +5226,7 @@
           <p:cNvPr id="9" name="">
             <a:extLst xmlns:a="http://schemas.openxmlformats.org/drawingml/2006/main">
               <a:ext uri="{FF2B5EF4-FFF2-40B4-BE49-F238E27FC236}">
-                <a16:creationId xmlns:a16="http://schemas.microsoft.com/office/drawing/2014/main" id="{08DD524D-383A-406A-A679-BB44FCB562B5}"/>
+                <a16:creationId xmlns:a16="http://schemas.microsoft.com/office/drawing/2014/main" id="{1ED3217E-4EC2-464C-BF56-ACC2BFFEC000}"/>
               </a:ext>
             </a:extLst>
           </p:cNvPr>
@@ -5284,7 +5284,7 @@
           <p:cNvPr id="10" name="">
             <a:extLst xmlns:a="http://schemas.openxmlformats.org/drawingml/2006/main">
               <a:ext uri="{FF2B5EF4-FFF2-40B4-BE49-F238E27FC236}">
-                <a16:creationId xmlns:a16="http://schemas.microsoft.com/office/drawing/2014/main" id="{25D694DD-CBE2-4A91-B5DC-8EC97B0587E4}"/>
+                <a16:creationId xmlns:a16="http://schemas.microsoft.com/office/drawing/2014/main" id="{A46E4D6B-790E-4F93-B375-EAE942F40813}"/>
               </a:ext>
             </a:extLst>
           </p:cNvPr>
@@ -5340,7 +5340,7 @@
     </p:spTree>
     <p:extLst>
       <p:ext uri="{BB962C8B-B14F-4D97-AF65-F5344CB8AC3E}">
-        <p14:creationId xmlns:p14="http://schemas.microsoft.com/office/powerpoint/2010/main" val="376011535"/>
+        <p14:creationId xmlns:p14="http://schemas.microsoft.com/office/powerpoint/2010/main" val="773277210"/>
       </p:ext>
     </p:extLst>
   </p:cSld>
@@ -5371,7 +5371,7 @@
           <p:cNvPr id="1" name="">
             <a:extLst xmlns:a="http://schemas.openxmlformats.org/drawingml/2006/main">
               <a:ext uri="{FF2B5EF4-FFF2-40B4-BE49-F238E27FC236}">
-                <a16:creationId xmlns:a16="http://schemas.microsoft.com/office/drawing/2014/main" id="{E2148E29-E429-4DF5-A741-6E714E07E3F4}"/>
+                <a16:creationId xmlns:a16="http://schemas.microsoft.com/office/drawing/2014/main" id="{B78023F5-ABB2-4404-8D09-4CDBC42DDCDC}"/>
               </a:ext>
             </a:extLst>
           </p:cNvPr>
@@ -5410,7 +5410,7 @@
           <p:nvPr/>
         </p:nvPicPr>
         <p:blipFill>
-          <a:blip xmlns:r="http://schemas.openxmlformats.org/officeDocument/2006/relationships" xmlns:a="http://schemas.openxmlformats.org/drawingml/2006/main" r:embed="R5f070f26114645ff"/>
+          <a:blip xmlns:r="http://schemas.openxmlformats.org/officeDocument/2006/relationships" xmlns:a="http://schemas.openxmlformats.org/drawingml/2006/main" r:embed="R3591dffbd714452d"/>
           <a:stretch xmlns:a="http://schemas.openxmlformats.org/drawingml/2006/main"/>
         </p:blipFill>
         <p:spPr>
@@ -5428,7 +5428,7 @@
           <p:cNvPr id="3" name="">
             <a:extLst xmlns:a="http://schemas.openxmlformats.org/drawingml/2006/main">
               <a:ext uri="{FF2B5EF4-FFF2-40B4-BE49-F238E27FC236}">
-                <a16:creationId xmlns:a16="http://schemas.microsoft.com/office/drawing/2014/main" id="{60F28DC1-D2F9-4B25-AD40-48C2B2286C12}"/>
+                <a16:creationId xmlns:a16="http://schemas.microsoft.com/office/drawing/2014/main" id="{6C49369F-1F6D-4D91-BEA5-E2E8C9DDAD78}"/>
               </a:ext>
             </a:extLst>
           </p:cNvPr>
@@ -5466,14 +5466,14 @@
             <a:pPr algn="r">
               <a:defRPr sz="825" b="1">
                 <a:solidFill>
-                  <a:srgbClr val="0E1B3E"/>
+                  <a:srgbClr val="070F26"/>
                 </a:solidFill>
               </a:defRPr>
             </a:pPr>
             <a:r>
               <a:rPr sz="825" b="1">
                 <a:solidFill>
-                  <a:srgbClr val="0E1B3E"/>
+                  <a:srgbClr val="070F26"/>
                 </a:solidFill>
               </a:rPr>
               <a:t>NTT DATA UNIVERSITY</a:t>
@@ -5486,7 +5486,7 @@
           <p:cNvPr id="4" name="">
             <a:extLst xmlns:a="http://schemas.openxmlformats.org/drawingml/2006/main">
               <a:ext uri="{FF2B5EF4-FFF2-40B4-BE49-F238E27FC236}">
-                <a16:creationId xmlns:a16="http://schemas.microsoft.com/office/drawing/2014/main" id="{A487CBB0-217A-4BCB-B8E5-86F12B92C795}"/>
+                <a16:creationId xmlns:a16="http://schemas.microsoft.com/office/drawing/2014/main" id="{1EDAA023-182E-4DA3-BCD8-0458E0C3BD52}"/>
               </a:ext>
             </a:extLst>
           </p:cNvPr>
@@ -5544,7 +5544,7 @@
           <p:cNvPr id="5" name="">
             <a:extLst xmlns:a="http://schemas.openxmlformats.org/drawingml/2006/main">
               <a:ext uri="{FF2B5EF4-FFF2-40B4-BE49-F238E27FC236}">
-                <a16:creationId xmlns:a16="http://schemas.microsoft.com/office/drawing/2014/main" id="{DAFF72D9-1AA1-4FD7-8850-E9377E202084}"/>
+                <a16:creationId xmlns:a16="http://schemas.microsoft.com/office/drawing/2014/main" id="{1CB6D03F-B6E0-49FE-8092-A00FAD37399D}"/>
               </a:ext>
             </a:extLst>
           </p:cNvPr>
@@ -5602,7 +5602,7 @@
           <p:cNvPr id="6" name="">
             <a:extLst xmlns:a="http://schemas.openxmlformats.org/drawingml/2006/main">
               <a:ext uri="{FF2B5EF4-FFF2-40B4-BE49-F238E27FC236}">
-                <a16:creationId xmlns:a16="http://schemas.microsoft.com/office/drawing/2014/main" id="{C2339C08-BC00-406B-9D73-98A3A5FBC1D1}"/>
+                <a16:creationId xmlns:a16="http://schemas.microsoft.com/office/drawing/2014/main" id="{3A7292B2-F8E2-45FA-B4D3-1ECFD80E48BF}"/>
               </a:ext>
             </a:extLst>
           </p:cNvPr>
@@ -5640,14 +5640,14 @@
             <a:pPr algn="r">
               <a:defRPr sz="675" b="1">
                 <a:solidFill>
-                  <a:srgbClr val="0E1B3E"/>
+                  <a:srgbClr val="070F26"/>
                 </a:solidFill>
               </a:defRPr>
             </a:pPr>
             <a:r>
               <a:rPr sz="675" b="1">
                 <a:solidFill>
-                  <a:srgbClr val="0E1B3E"/>
+                  <a:srgbClr val="070F26"/>
                 </a:solidFill>
               </a:rPr>
               <a:t>NTT DATA UNIVERSITY</a:t>
@@ -5660,7 +5660,7 @@
           <p:cNvPr id="7" name="">
             <a:extLst xmlns:a="http://schemas.openxmlformats.org/drawingml/2006/main">
               <a:ext uri="{FF2B5EF4-FFF2-40B4-BE49-F238E27FC236}">
-                <a16:creationId xmlns:a16="http://schemas.microsoft.com/office/drawing/2014/main" id="{36F969A8-F079-4C13-AA4D-A1EDA0DC3439}"/>
+                <a16:creationId xmlns:a16="http://schemas.microsoft.com/office/drawing/2014/main" id="{3F89D420-18D1-49F8-951A-0311EA5F005C}"/>
               </a:ext>
             </a:extLst>
           </p:cNvPr>
@@ -5718,7 +5718,7 @@
           <p:cNvPr id="8" name="">
             <a:extLst xmlns:a="http://schemas.openxmlformats.org/drawingml/2006/main">
               <a:ext uri="{FF2B5EF4-FFF2-40B4-BE49-F238E27FC236}">
-                <a16:creationId xmlns:a16="http://schemas.microsoft.com/office/drawing/2014/main" id="{046C6761-5BC8-4BE0-A1EB-B171EECADD1B}"/>
+                <a16:creationId xmlns:a16="http://schemas.microsoft.com/office/drawing/2014/main" id="{A71FFC92-3BD4-4B9F-B6E1-00C57CB3B37B}"/>
               </a:ext>
             </a:extLst>
           </p:cNvPr>
@@ -5756,14 +5756,14 @@
             <a:pPr algn="l">
               <a:defRPr sz="2400" b="0">
                 <a:solidFill>
-                  <a:srgbClr val="0E1B3E"/>
+                  <a:srgbClr val="070F26"/>
                 </a:solidFill>
               </a:defRPr>
             </a:pPr>
             <a:r>
               <a:rPr sz="2400" b="0">
                 <a:solidFill>
-                  <a:srgbClr val="0E1B3E"/>
+                  <a:srgbClr val="070F26"/>
                 </a:solidFill>
               </a:rPr>
               <a:t>O que cobrimos hoje</a:t>
@@ -5776,7 +5776,7 @@
           <p:cNvPr id="9" name="">
             <a:extLst xmlns:a="http://schemas.openxmlformats.org/drawingml/2006/main">
               <a:ext uri="{FF2B5EF4-FFF2-40B4-BE49-F238E27FC236}">
-                <a16:creationId xmlns:a16="http://schemas.microsoft.com/office/drawing/2014/main" id="{D5A2867C-1C5D-454E-BE00-42FC121961C6}"/>
+                <a16:creationId xmlns:a16="http://schemas.microsoft.com/office/drawing/2014/main" id="{8A5A73A4-AEA9-4504-AB2A-A330C357C47E}"/>
               </a:ext>
             </a:extLst>
           </p:cNvPr>
@@ -5834,7 +5834,7 @@
           <p:cNvPr id="10" name="">
             <a:extLst xmlns:a="http://schemas.openxmlformats.org/drawingml/2006/main">
               <a:ext uri="{FF2B5EF4-FFF2-40B4-BE49-F238E27FC236}">
-                <a16:creationId xmlns:a16="http://schemas.microsoft.com/office/drawing/2014/main" id="{C9FDBE28-8460-47A6-9B06-3BF06EB789DC}"/>
+                <a16:creationId xmlns:a16="http://schemas.microsoft.com/office/drawing/2014/main" id="{1D1885C6-79E7-46DD-91D6-AAC9795C0097}"/>
               </a:ext>
             </a:extLst>
           </p:cNvPr>
@@ -5867,7 +5867,7 @@
           <p:cNvPr id="11" name="">
             <a:extLst xmlns:a="http://schemas.openxmlformats.org/drawingml/2006/main">
               <a:ext uri="{FF2B5EF4-FFF2-40B4-BE49-F238E27FC236}">
-                <a16:creationId xmlns:a16="http://schemas.microsoft.com/office/drawing/2014/main" id="{2DBDEF25-98E2-412A-98CD-4A8A29121375}"/>
+                <a16:creationId xmlns:a16="http://schemas.microsoft.com/office/drawing/2014/main" id="{0BBD0327-F71E-4CDF-8D4F-87DF48534D31}"/>
               </a:ext>
             </a:extLst>
           </p:cNvPr>
@@ -5902,7 +5902,7 @@
           <p:cNvPr id="12" name="">
             <a:extLst xmlns:a="http://schemas.openxmlformats.org/drawingml/2006/main">
               <a:ext uri="{FF2B5EF4-FFF2-40B4-BE49-F238E27FC236}">
-                <a16:creationId xmlns:a16="http://schemas.microsoft.com/office/drawing/2014/main" id="{9F08909A-5445-400B-B4C0-C67CF233DE71}"/>
+                <a16:creationId xmlns:a16="http://schemas.microsoft.com/office/drawing/2014/main" id="{E77AE71B-834B-4FB0-95E4-422659C8134D}"/>
               </a:ext>
             </a:extLst>
           </p:cNvPr>
@@ -5960,7 +5960,7 @@
           <p:cNvPr id="13" name="">
             <a:extLst xmlns:a="http://schemas.openxmlformats.org/drawingml/2006/main">
               <a:ext uri="{FF2B5EF4-FFF2-40B4-BE49-F238E27FC236}">
-                <a16:creationId xmlns:a16="http://schemas.microsoft.com/office/drawing/2014/main" id="{1BFC7766-27CC-44EB-B933-1152C2915EE7}"/>
+                <a16:creationId xmlns:a16="http://schemas.microsoft.com/office/drawing/2014/main" id="{111BA99F-EDAB-448B-96FF-F9DC832FFD8F}"/>
               </a:ext>
             </a:extLst>
           </p:cNvPr>
@@ -6035,7 +6035,7 @@
           <p:cNvPr id="14" name="">
             <a:extLst xmlns:a="http://schemas.openxmlformats.org/drawingml/2006/main">
               <a:ext uri="{FF2B5EF4-FFF2-40B4-BE49-F238E27FC236}">
-                <a16:creationId xmlns:a16="http://schemas.microsoft.com/office/drawing/2014/main" id="{7C7B4CF3-02C9-4CD3-A787-4984B5BA3406}"/>
+                <a16:creationId xmlns:a16="http://schemas.microsoft.com/office/drawing/2014/main" id="{D0F4F86A-04E7-41AE-87B7-14A2CA45ACC9}"/>
               </a:ext>
             </a:extLst>
           </p:cNvPr>
@@ -6068,7 +6068,7 @@
           <p:cNvPr id="15" name="">
             <a:extLst xmlns:a="http://schemas.openxmlformats.org/drawingml/2006/main">
               <a:ext uri="{FF2B5EF4-FFF2-40B4-BE49-F238E27FC236}">
-                <a16:creationId xmlns:a16="http://schemas.microsoft.com/office/drawing/2014/main" id="{A856FC77-9212-45C6-92ED-931213F8BC99}"/>
+                <a16:creationId xmlns:a16="http://schemas.microsoft.com/office/drawing/2014/main" id="{F0340CF3-51DB-44AE-BDD8-A14CD2233935}"/>
               </a:ext>
             </a:extLst>
           </p:cNvPr>
@@ -6103,7 +6103,7 @@
           <p:cNvPr id="16" name="">
             <a:extLst xmlns:a="http://schemas.openxmlformats.org/drawingml/2006/main">
               <a:ext uri="{FF2B5EF4-FFF2-40B4-BE49-F238E27FC236}">
-                <a16:creationId xmlns:a16="http://schemas.microsoft.com/office/drawing/2014/main" id="{7F3F26ED-04B1-41FC-A713-0D87D048634F}"/>
+                <a16:creationId xmlns:a16="http://schemas.microsoft.com/office/drawing/2014/main" id="{C672B9F8-00B2-4B07-9144-F168EE67C075}"/>
               </a:ext>
             </a:extLst>
           </p:cNvPr>
@@ -6161,7 +6161,7 @@
           <p:cNvPr id="17" name="">
             <a:extLst xmlns:a="http://schemas.openxmlformats.org/drawingml/2006/main">
               <a:ext uri="{FF2B5EF4-FFF2-40B4-BE49-F238E27FC236}">
-                <a16:creationId xmlns:a16="http://schemas.microsoft.com/office/drawing/2014/main" id="{C0B5FD42-1B20-436E-ABDB-1F73BB1CE278}"/>
+                <a16:creationId xmlns:a16="http://schemas.microsoft.com/office/drawing/2014/main" id="{2E1593CD-E40D-46B7-810D-A8BC2E3A5C58}"/>
               </a:ext>
             </a:extLst>
           </p:cNvPr>
@@ -6219,7 +6219,7 @@
           <p:cNvPr id="18" name="">
             <a:extLst xmlns:a="http://schemas.openxmlformats.org/drawingml/2006/main">
               <a:ext uri="{FF2B5EF4-FFF2-40B4-BE49-F238E27FC236}">
-                <a16:creationId xmlns:a16="http://schemas.microsoft.com/office/drawing/2014/main" id="{AC53E5FF-8E0E-4BCB-BB51-B732A4D1E60A}"/>
+                <a16:creationId xmlns:a16="http://schemas.microsoft.com/office/drawing/2014/main" id="{979DAE30-3CE1-402E-A1EA-4E66BBE00503}"/>
               </a:ext>
             </a:extLst>
           </p:cNvPr>
@@ -6252,7 +6252,7 @@
           <p:cNvPr id="19" name="">
             <a:extLst xmlns:a="http://schemas.openxmlformats.org/drawingml/2006/main">
               <a:ext uri="{FF2B5EF4-FFF2-40B4-BE49-F238E27FC236}">
-                <a16:creationId xmlns:a16="http://schemas.microsoft.com/office/drawing/2014/main" id="{106EC1FA-7A7F-4295-A7C2-0F2734F3B84A}"/>
+                <a16:creationId xmlns:a16="http://schemas.microsoft.com/office/drawing/2014/main" id="{77D0AFD8-24ED-4360-BBB0-C943FA0CC33A}"/>
               </a:ext>
             </a:extLst>
           </p:cNvPr>
@@ -6287,7 +6287,7 @@
           <p:cNvPr id="20" name="">
             <a:extLst xmlns:a="http://schemas.openxmlformats.org/drawingml/2006/main">
               <a:ext uri="{FF2B5EF4-FFF2-40B4-BE49-F238E27FC236}">
-                <a16:creationId xmlns:a16="http://schemas.microsoft.com/office/drawing/2014/main" id="{7711F35A-1166-4D8F-8B1D-22F6E3511A1D}"/>
+                <a16:creationId xmlns:a16="http://schemas.microsoft.com/office/drawing/2014/main" id="{054B7AF4-3183-419C-A233-2D48B45ACAA8}"/>
               </a:ext>
             </a:extLst>
           </p:cNvPr>
@@ -6345,7 +6345,7 @@
           <p:cNvPr id="21" name="">
             <a:extLst xmlns:a="http://schemas.openxmlformats.org/drawingml/2006/main">
               <a:ext uri="{FF2B5EF4-FFF2-40B4-BE49-F238E27FC236}">
-                <a16:creationId xmlns:a16="http://schemas.microsoft.com/office/drawing/2014/main" id="{A201C3BF-3408-4264-8AEF-EF35B8C2B5B4}"/>
+                <a16:creationId xmlns:a16="http://schemas.microsoft.com/office/drawing/2014/main" id="{B7E1FAF9-9A0D-4385-8874-EF3533E10E5B}"/>
               </a:ext>
             </a:extLst>
           </p:cNvPr>
@@ -6403,7 +6403,7 @@
           <p:cNvPr id="22" name="">
             <a:extLst xmlns:a="http://schemas.openxmlformats.org/drawingml/2006/main">
               <a:ext uri="{FF2B5EF4-FFF2-40B4-BE49-F238E27FC236}">
-                <a16:creationId xmlns:a16="http://schemas.microsoft.com/office/drawing/2014/main" id="{C239DCC8-5244-4BC6-9550-1725CDF23F66}"/>
+                <a16:creationId xmlns:a16="http://schemas.microsoft.com/office/drawing/2014/main" id="{79871B43-6F43-4D1C-BE99-781A4A84C7CB}"/>
               </a:ext>
             </a:extLst>
           </p:cNvPr>
@@ -6436,7 +6436,7 @@
           <p:cNvPr id="23" name="">
             <a:extLst xmlns:a="http://schemas.openxmlformats.org/drawingml/2006/main">
               <a:ext uri="{FF2B5EF4-FFF2-40B4-BE49-F238E27FC236}">
-                <a16:creationId xmlns:a16="http://schemas.microsoft.com/office/drawing/2014/main" id="{8943D244-7F6B-4A79-A0E8-01803382783E}"/>
+                <a16:creationId xmlns:a16="http://schemas.microsoft.com/office/drawing/2014/main" id="{C7CF581F-E6D2-4F06-A74B-9A57DEB2AA59}"/>
               </a:ext>
             </a:extLst>
           </p:cNvPr>
@@ -6471,7 +6471,7 @@
           <p:cNvPr id="24" name="">
             <a:extLst xmlns:a="http://schemas.openxmlformats.org/drawingml/2006/main">
               <a:ext uri="{FF2B5EF4-FFF2-40B4-BE49-F238E27FC236}">
-                <a16:creationId xmlns:a16="http://schemas.microsoft.com/office/drawing/2014/main" id="{4CF509BC-D783-4301-9347-7C9A7E38B897}"/>
+                <a16:creationId xmlns:a16="http://schemas.microsoft.com/office/drawing/2014/main" id="{C376E11C-07F7-436E-A3A1-117F0B8D847B}"/>
               </a:ext>
             </a:extLst>
           </p:cNvPr>
@@ -6529,7 +6529,7 @@
           <p:cNvPr id="25" name="">
             <a:extLst xmlns:a="http://schemas.openxmlformats.org/drawingml/2006/main">
               <a:ext uri="{FF2B5EF4-FFF2-40B4-BE49-F238E27FC236}">
-                <a16:creationId xmlns:a16="http://schemas.microsoft.com/office/drawing/2014/main" id="{6DBB52FB-55F4-4D54-A626-92F89CC1DDDE}"/>
+                <a16:creationId xmlns:a16="http://schemas.microsoft.com/office/drawing/2014/main" id="{5E9FB1C5-ED98-4D88-AA93-37DA08568989}"/>
               </a:ext>
             </a:extLst>
           </p:cNvPr>
@@ -6585,7 +6585,7 @@
     </p:spTree>
     <p:extLst>
       <p:ext uri="{BB962C8B-B14F-4D97-AF65-F5344CB8AC3E}">
-        <p14:creationId xmlns:p14="http://schemas.microsoft.com/office/powerpoint/2010/main" val="908478286"/>
+        <p14:creationId xmlns:p14="http://schemas.microsoft.com/office/powerpoint/2010/main" val="1448120571"/>
       </p:ext>
     </p:extLst>
   </p:cSld>
@@ -6616,7 +6616,7 @@
           <p:cNvPr id="1" name="">
             <a:extLst xmlns:a="http://schemas.openxmlformats.org/drawingml/2006/main">
               <a:ext uri="{FF2B5EF4-FFF2-40B4-BE49-F238E27FC236}">
-                <a16:creationId xmlns:a16="http://schemas.microsoft.com/office/drawing/2014/main" id="{8E0DA2DF-0F37-4312-B19C-AD954780AFF7}"/>
+                <a16:creationId xmlns:a16="http://schemas.microsoft.com/office/drawing/2014/main" id="{71EE5787-1305-4C47-AFB0-514130D9BF2D}"/>
               </a:ext>
             </a:extLst>
           </p:cNvPr>
@@ -6655,7 +6655,7 @@
           <p:nvPr/>
         </p:nvPicPr>
         <p:blipFill>
-          <a:blip xmlns:r="http://schemas.openxmlformats.org/officeDocument/2006/relationships" xmlns:a="http://schemas.openxmlformats.org/drawingml/2006/main" r:embed="Rf8e6a966a75946d2"/>
+          <a:blip xmlns:r="http://schemas.openxmlformats.org/officeDocument/2006/relationships" xmlns:a="http://schemas.openxmlformats.org/drawingml/2006/main" r:embed="Rcf22b50481744d75"/>
           <a:stretch xmlns:a="http://schemas.openxmlformats.org/drawingml/2006/main"/>
         </p:blipFill>
         <p:spPr>
@@ -6673,7 +6673,7 @@
           <p:cNvPr id="3" name="">
             <a:extLst xmlns:a="http://schemas.openxmlformats.org/drawingml/2006/main">
               <a:ext uri="{FF2B5EF4-FFF2-40B4-BE49-F238E27FC236}">
-                <a16:creationId xmlns:a16="http://schemas.microsoft.com/office/drawing/2014/main" id="{D60E1B30-22F9-4FEB-AA9B-FF4D66B42FD4}"/>
+                <a16:creationId xmlns:a16="http://schemas.microsoft.com/office/drawing/2014/main" id="{1F78D6C4-684D-4C8C-BF64-84D681FC0058}"/>
               </a:ext>
             </a:extLst>
           </p:cNvPr>
@@ -6711,14 +6711,14 @@
             <a:pPr algn="r">
               <a:defRPr sz="825" b="1">
                 <a:solidFill>
-                  <a:srgbClr val="0E1B3E"/>
+                  <a:srgbClr val="070F26"/>
                 </a:solidFill>
               </a:defRPr>
             </a:pPr>
             <a:r>
               <a:rPr sz="825" b="1">
                 <a:solidFill>
-                  <a:srgbClr val="0E1B3E"/>
+                  <a:srgbClr val="070F26"/>
                 </a:solidFill>
               </a:rPr>
               <a:t>NTT DATA UNIVERSITY</a:t>
@@ -6731,7 +6731,7 @@
           <p:cNvPr id="4" name="">
             <a:extLst xmlns:a="http://schemas.openxmlformats.org/drawingml/2006/main">
               <a:ext uri="{FF2B5EF4-FFF2-40B4-BE49-F238E27FC236}">
-                <a16:creationId xmlns:a16="http://schemas.microsoft.com/office/drawing/2014/main" id="{081A714D-9B46-46D6-8008-E4A8D9698EE0}"/>
+                <a16:creationId xmlns:a16="http://schemas.microsoft.com/office/drawing/2014/main" id="{1A83EBC8-6B5B-4771-9BDF-30F6377FC315}"/>
               </a:ext>
             </a:extLst>
           </p:cNvPr>
@@ -6789,7 +6789,7 @@
           <p:cNvPr id="5" name="">
             <a:extLst xmlns:a="http://schemas.openxmlformats.org/drawingml/2006/main">
               <a:ext uri="{FF2B5EF4-FFF2-40B4-BE49-F238E27FC236}">
-                <a16:creationId xmlns:a16="http://schemas.microsoft.com/office/drawing/2014/main" id="{61CCA64E-E379-49C8-B4CE-25E53A3B6BFA}"/>
+                <a16:creationId xmlns:a16="http://schemas.microsoft.com/office/drawing/2014/main" id="{5BFCCF67-69AD-4558-82C1-273AFCC1FF92}"/>
               </a:ext>
             </a:extLst>
           </p:cNvPr>
@@ -6847,7 +6847,7 @@
           <p:cNvPr id="6" name="">
             <a:extLst xmlns:a="http://schemas.openxmlformats.org/drawingml/2006/main">
               <a:ext uri="{FF2B5EF4-FFF2-40B4-BE49-F238E27FC236}">
-                <a16:creationId xmlns:a16="http://schemas.microsoft.com/office/drawing/2014/main" id="{A985D8AD-AC62-433D-940A-C31944C39569}"/>
+                <a16:creationId xmlns:a16="http://schemas.microsoft.com/office/drawing/2014/main" id="{F3AEC875-3CBB-4CEE-A19B-3891833CD21B}"/>
               </a:ext>
             </a:extLst>
           </p:cNvPr>
@@ -6885,14 +6885,14 @@
             <a:pPr algn="r">
               <a:defRPr sz="675" b="1">
                 <a:solidFill>
-                  <a:srgbClr val="0E1B3E"/>
+                  <a:srgbClr val="070F26"/>
                 </a:solidFill>
               </a:defRPr>
             </a:pPr>
             <a:r>
               <a:rPr sz="675" b="1">
                 <a:solidFill>
-                  <a:srgbClr val="0E1B3E"/>
+                  <a:srgbClr val="070F26"/>
                 </a:solidFill>
               </a:rPr>
               <a:t>NTT DATA UNIVERSITY</a:t>
@@ -6905,7 +6905,7 @@
           <p:cNvPr id="7" name="">
             <a:extLst xmlns:a="http://schemas.openxmlformats.org/drawingml/2006/main">
               <a:ext uri="{FF2B5EF4-FFF2-40B4-BE49-F238E27FC236}">
-                <a16:creationId xmlns:a16="http://schemas.microsoft.com/office/drawing/2014/main" id="{93E4B126-973F-4770-BF9C-8386F9FC6C37}"/>
+                <a16:creationId xmlns:a16="http://schemas.microsoft.com/office/drawing/2014/main" id="{2F44D3D0-6D70-4A22-AACF-9C1BD46B48FD}"/>
               </a:ext>
             </a:extLst>
           </p:cNvPr>
@@ -6963,7 +6963,7 @@
           <p:cNvPr id="8" name="">
             <a:extLst xmlns:a="http://schemas.openxmlformats.org/drawingml/2006/main">
               <a:ext uri="{FF2B5EF4-FFF2-40B4-BE49-F238E27FC236}">
-                <a16:creationId xmlns:a16="http://schemas.microsoft.com/office/drawing/2014/main" id="{684A77F9-7D42-4F06-B204-EAD988F428B9}"/>
+                <a16:creationId xmlns:a16="http://schemas.microsoft.com/office/drawing/2014/main" id="{C0FFF725-89A8-4217-A71D-9CDF848F9240}"/>
               </a:ext>
             </a:extLst>
           </p:cNvPr>
@@ -7001,14 +7001,14 @@
             <a:pPr algn="l">
               <a:defRPr sz="2400" b="0">
                 <a:solidFill>
-                  <a:srgbClr val="0E1B3E"/>
+                  <a:srgbClr val="070F26"/>
                 </a:solidFill>
               </a:defRPr>
             </a:pPr>
             <a:r>
               <a:rPr sz="2400" b="0">
                 <a:solidFill>
-                  <a:srgbClr val="0E1B3E"/>
+                  <a:srgbClr val="070F26"/>
                 </a:solidFill>
               </a:rPr>
               <a:t>Se sobrar tempo: time travel em ~10 minutos</a:t>
@@ -7021,7 +7021,7 @@
           <p:cNvPr id="9" name="">
             <a:extLst xmlns:a="http://schemas.openxmlformats.org/drawingml/2006/main">
               <a:ext uri="{FF2B5EF4-FFF2-40B4-BE49-F238E27FC236}">
-                <a16:creationId xmlns:a16="http://schemas.microsoft.com/office/drawing/2014/main" id="{27121CED-7C00-4B38-B8F6-ACFA1AA04998}"/>
+                <a16:creationId xmlns:a16="http://schemas.microsoft.com/office/drawing/2014/main" id="{9B17F303-4F3A-4BF0-86A1-43D831B7712C}"/>
               </a:ext>
             </a:extLst>
           </p:cNvPr>
@@ -7079,7 +7079,7 @@
           <p:cNvPr id="10" name="">
             <a:extLst xmlns:a="http://schemas.openxmlformats.org/drawingml/2006/main">
               <a:ext uri="{FF2B5EF4-FFF2-40B4-BE49-F238E27FC236}">
-                <a16:creationId xmlns:a16="http://schemas.microsoft.com/office/drawing/2014/main" id="{F02439D3-6AEF-4EBB-96B3-CC3EF975E877}"/>
+                <a16:creationId xmlns:a16="http://schemas.microsoft.com/office/drawing/2014/main" id="{C28EF993-C9C2-47D9-904F-236E71B6E1DB}"/>
               </a:ext>
             </a:extLst>
           </p:cNvPr>
@@ -7112,7 +7112,7 @@
           <p:cNvPr id="11" name="">
             <a:extLst xmlns:a="http://schemas.openxmlformats.org/drawingml/2006/main">
               <a:ext uri="{FF2B5EF4-FFF2-40B4-BE49-F238E27FC236}">
-                <a16:creationId xmlns:a16="http://schemas.microsoft.com/office/drawing/2014/main" id="{49C87751-7E50-4761-8F99-D85278783C0E}"/>
+                <a16:creationId xmlns:a16="http://schemas.microsoft.com/office/drawing/2014/main" id="{EA3FDCB5-F589-4760-AA14-714A38E90115}"/>
               </a:ext>
             </a:extLst>
           </p:cNvPr>
@@ -7147,7 +7147,7 @@
           <p:cNvPr id="12" name="">
             <a:extLst xmlns:a="http://schemas.openxmlformats.org/drawingml/2006/main">
               <a:ext uri="{FF2B5EF4-FFF2-40B4-BE49-F238E27FC236}">
-                <a16:creationId xmlns:a16="http://schemas.microsoft.com/office/drawing/2014/main" id="{A034A5B0-64B7-4208-8BE0-F60CB72F9407}"/>
+                <a16:creationId xmlns:a16="http://schemas.microsoft.com/office/drawing/2014/main" id="{6877EBD4-C6B7-4567-82F7-7F65BF997F17}"/>
               </a:ext>
             </a:extLst>
           </p:cNvPr>
@@ -7205,7 +7205,7 @@
           <p:cNvPr id="13" name="">
             <a:extLst xmlns:a="http://schemas.openxmlformats.org/drawingml/2006/main">
               <a:ext uri="{FF2B5EF4-FFF2-40B4-BE49-F238E27FC236}">
-                <a16:creationId xmlns:a16="http://schemas.microsoft.com/office/drawing/2014/main" id="{23B069B0-05A4-4135-8328-DC8D4CF83088}"/>
+                <a16:creationId xmlns:a16="http://schemas.microsoft.com/office/drawing/2014/main" id="{28897FB1-FDC5-4C38-ABF5-C12AA2FE947D}"/>
               </a:ext>
             </a:extLst>
           </p:cNvPr>
@@ -7297,7 +7297,7 @@
           <p:cNvPr id="14" name="">
             <a:extLst xmlns:a="http://schemas.openxmlformats.org/drawingml/2006/main">
               <a:ext uri="{FF2B5EF4-FFF2-40B4-BE49-F238E27FC236}">
-                <a16:creationId xmlns:a16="http://schemas.microsoft.com/office/drawing/2014/main" id="{85786F03-3CD5-46DE-9300-3839A179CEAC}"/>
+                <a16:creationId xmlns:a16="http://schemas.microsoft.com/office/drawing/2014/main" id="{ACD383EC-5ACE-4452-B793-FE4213750A7B}"/>
               </a:ext>
             </a:extLst>
           </p:cNvPr>
@@ -7330,7 +7330,7 @@
           <p:cNvPr id="15" name="">
             <a:extLst xmlns:a="http://schemas.openxmlformats.org/drawingml/2006/main">
               <a:ext uri="{FF2B5EF4-FFF2-40B4-BE49-F238E27FC236}">
-                <a16:creationId xmlns:a16="http://schemas.microsoft.com/office/drawing/2014/main" id="{3F7E1C28-0AB3-41FD-AA5D-243328B6B585}"/>
+                <a16:creationId xmlns:a16="http://schemas.microsoft.com/office/drawing/2014/main" id="{E29E353D-D66E-433F-983B-E57BA1766EF3}"/>
               </a:ext>
             </a:extLst>
           </p:cNvPr>
@@ -7365,7 +7365,7 @@
           <p:cNvPr id="16" name="">
             <a:extLst xmlns:a="http://schemas.openxmlformats.org/drawingml/2006/main">
               <a:ext uri="{FF2B5EF4-FFF2-40B4-BE49-F238E27FC236}">
-                <a16:creationId xmlns:a16="http://schemas.microsoft.com/office/drawing/2014/main" id="{AAA3AC7F-3849-408C-8252-FC76F61BEEC5}"/>
+                <a16:creationId xmlns:a16="http://schemas.microsoft.com/office/drawing/2014/main" id="{63B91590-54D7-4CCF-B475-4827693112B7}"/>
               </a:ext>
             </a:extLst>
           </p:cNvPr>
@@ -7423,7 +7423,7 @@
           <p:cNvPr id="17" name="">
             <a:extLst xmlns:a="http://schemas.openxmlformats.org/drawingml/2006/main">
               <a:ext uri="{FF2B5EF4-FFF2-40B4-BE49-F238E27FC236}">
-                <a16:creationId xmlns:a16="http://schemas.microsoft.com/office/drawing/2014/main" id="{D2AD4C33-E32A-45BE-87AD-55F17D7F89E1}"/>
+                <a16:creationId xmlns:a16="http://schemas.microsoft.com/office/drawing/2014/main" id="{AF44D063-FF11-482A-A162-DA93F2932332}"/>
               </a:ext>
             </a:extLst>
           </p:cNvPr>
@@ -7515,7 +7515,7 @@
           <p:cNvPr id="18" name="">
             <a:extLst xmlns:a="http://schemas.openxmlformats.org/drawingml/2006/main">
               <a:ext uri="{FF2B5EF4-FFF2-40B4-BE49-F238E27FC236}">
-                <a16:creationId xmlns:a16="http://schemas.microsoft.com/office/drawing/2014/main" id="{90881B3C-9D17-4114-95F2-E8435DC40B1A}"/>
+                <a16:creationId xmlns:a16="http://schemas.microsoft.com/office/drawing/2014/main" id="{1A44F194-07FE-4B7D-BB59-42E41C7E70F0}"/>
               </a:ext>
             </a:extLst>
           </p:cNvPr>
@@ -7548,7 +7548,7 @@
           <p:cNvPr id="19" name="">
             <a:extLst xmlns:a="http://schemas.openxmlformats.org/drawingml/2006/main">
               <a:ext uri="{FF2B5EF4-FFF2-40B4-BE49-F238E27FC236}">
-                <a16:creationId xmlns:a16="http://schemas.microsoft.com/office/drawing/2014/main" id="{99D48B09-4C15-4FAD-B6C4-9031D8D5F238}"/>
+                <a16:creationId xmlns:a16="http://schemas.microsoft.com/office/drawing/2014/main" id="{8C86782C-3BDB-437F-8C62-86F1B738BBD4}"/>
               </a:ext>
             </a:extLst>
           </p:cNvPr>
@@ -7583,7 +7583,7 @@
           <p:cNvPr id="20" name="">
             <a:extLst xmlns:a="http://schemas.openxmlformats.org/drawingml/2006/main">
               <a:ext uri="{FF2B5EF4-FFF2-40B4-BE49-F238E27FC236}">
-                <a16:creationId xmlns:a16="http://schemas.microsoft.com/office/drawing/2014/main" id="{6C252A64-D90C-4846-90F7-70967D1C08F7}"/>
+                <a16:creationId xmlns:a16="http://schemas.microsoft.com/office/drawing/2014/main" id="{147E206E-6CDC-46C6-851F-4411FDE52E98}"/>
               </a:ext>
             </a:extLst>
           </p:cNvPr>
@@ -7641,7 +7641,7 @@
           <p:cNvPr id="21" name="">
             <a:extLst xmlns:a="http://schemas.openxmlformats.org/drawingml/2006/main">
               <a:ext uri="{FF2B5EF4-FFF2-40B4-BE49-F238E27FC236}">
-                <a16:creationId xmlns:a16="http://schemas.microsoft.com/office/drawing/2014/main" id="{48685362-B8E6-403F-9A2D-A491E2102719}"/>
+                <a16:creationId xmlns:a16="http://schemas.microsoft.com/office/drawing/2014/main" id="{C809804C-11E2-44DA-995B-9498BC3293AA}"/>
               </a:ext>
             </a:extLst>
           </p:cNvPr>
@@ -7731,7 +7731,7 @@
     </p:spTree>
     <p:extLst>
       <p:ext uri="{BB962C8B-B14F-4D97-AF65-F5344CB8AC3E}">
-        <p14:creationId xmlns:p14="http://schemas.microsoft.com/office/powerpoint/2010/main" val="680772369"/>
+        <p14:creationId xmlns:p14="http://schemas.microsoft.com/office/powerpoint/2010/main" val="1685554487"/>
       </p:ext>
     </p:extLst>
   </p:cSld>
@@ -7762,7 +7762,7 @@
           <p:cNvPr id="1" name="">
             <a:extLst xmlns:a="http://schemas.openxmlformats.org/drawingml/2006/main">
               <a:ext uri="{FF2B5EF4-FFF2-40B4-BE49-F238E27FC236}">
-                <a16:creationId xmlns:a16="http://schemas.microsoft.com/office/drawing/2014/main" id="{EFEA1E70-FBB1-48A5-93E6-567521B5D361}"/>
+                <a16:creationId xmlns:a16="http://schemas.microsoft.com/office/drawing/2014/main" id="{A9AB85AB-5927-46F9-ACBA-CD765D2C8C6D}"/>
               </a:ext>
             </a:extLst>
           </p:cNvPr>
@@ -7801,7 +7801,7 @@
           <p:nvPr/>
         </p:nvPicPr>
         <p:blipFill>
-          <a:blip xmlns:r="http://schemas.openxmlformats.org/officeDocument/2006/relationships" xmlns:a="http://schemas.openxmlformats.org/drawingml/2006/main" r:embed="Rb26ea6f1509f48a4"/>
+          <a:blip xmlns:r="http://schemas.openxmlformats.org/officeDocument/2006/relationships" xmlns:a="http://schemas.openxmlformats.org/drawingml/2006/main" r:embed="R16afd03f79c64106"/>
           <a:stretch xmlns:a="http://schemas.openxmlformats.org/drawingml/2006/main"/>
         </p:blipFill>
         <p:spPr>
@@ -7819,7 +7819,7 @@
           <p:cNvPr id="3" name="">
             <a:extLst xmlns:a="http://schemas.openxmlformats.org/drawingml/2006/main">
               <a:ext uri="{FF2B5EF4-FFF2-40B4-BE49-F238E27FC236}">
-                <a16:creationId xmlns:a16="http://schemas.microsoft.com/office/drawing/2014/main" id="{A622EACB-593F-444F-BBFC-40DE5DD3800F}"/>
+                <a16:creationId xmlns:a16="http://schemas.microsoft.com/office/drawing/2014/main" id="{797B5276-C4E1-4674-B7A1-3686CFE73C8F}"/>
               </a:ext>
             </a:extLst>
           </p:cNvPr>
@@ -7857,14 +7857,14 @@
             <a:pPr algn="r">
               <a:defRPr sz="825" b="1">
                 <a:solidFill>
-                  <a:srgbClr val="0E1B3E"/>
+                  <a:srgbClr val="070F26"/>
                 </a:solidFill>
               </a:defRPr>
             </a:pPr>
             <a:r>
               <a:rPr sz="825" b="1">
                 <a:solidFill>
-                  <a:srgbClr val="0E1B3E"/>
+                  <a:srgbClr val="070F26"/>
                 </a:solidFill>
               </a:rPr>
               <a:t>NTT DATA UNIVERSITY</a:t>
@@ -7877,7 +7877,7 @@
           <p:cNvPr id="4" name="">
             <a:extLst xmlns:a="http://schemas.openxmlformats.org/drawingml/2006/main">
               <a:ext uri="{FF2B5EF4-FFF2-40B4-BE49-F238E27FC236}">
-                <a16:creationId xmlns:a16="http://schemas.microsoft.com/office/drawing/2014/main" id="{1A4BBAC1-0740-43FD-B92F-AD78DA3CDB5F}"/>
+                <a16:creationId xmlns:a16="http://schemas.microsoft.com/office/drawing/2014/main" id="{67BD6A38-BDF6-4678-B00B-7217FAD8F4F9}"/>
               </a:ext>
             </a:extLst>
           </p:cNvPr>
@@ -7935,7 +7935,7 @@
           <p:cNvPr id="5" name="">
             <a:extLst xmlns:a="http://schemas.openxmlformats.org/drawingml/2006/main">
               <a:ext uri="{FF2B5EF4-FFF2-40B4-BE49-F238E27FC236}">
-                <a16:creationId xmlns:a16="http://schemas.microsoft.com/office/drawing/2014/main" id="{C5968D8F-31D3-4E06-B3B3-E7DC1807AF8F}"/>
+                <a16:creationId xmlns:a16="http://schemas.microsoft.com/office/drawing/2014/main" id="{6D85D88B-A298-4920-89C2-ECCA496ED571}"/>
               </a:ext>
             </a:extLst>
           </p:cNvPr>
@@ -7993,7 +7993,7 @@
           <p:cNvPr id="6" name="">
             <a:extLst xmlns:a="http://schemas.openxmlformats.org/drawingml/2006/main">
               <a:ext uri="{FF2B5EF4-FFF2-40B4-BE49-F238E27FC236}">
-                <a16:creationId xmlns:a16="http://schemas.microsoft.com/office/drawing/2014/main" id="{403A14FE-9C1F-48EE-A97B-492A6F84EF80}"/>
+                <a16:creationId xmlns:a16="http://schemas.microsoft.com/office/drawing/2014/main" id="{72798BB0-79AF-4303-AF7F-104F915729A6}"/>
               </a:ext>
             </a:extLst>
           </p:cNvPr>
@@ -8031,14 +8031,14 @@
             <a:pPr algn="r">
               <a:defRPr sz="675" b="1">
                 <a:solidFill>
-                  <a:srgbClr val="0E1B3E"/>
+                  <a:srgbClr val="070F26"/>
                 </a:solidFill>
               </a:defRPr>
             </a:pPr>
             <a:r>
               <a:rPr sz="675" b="1">
                 <a:solidFill>
-                  <a:srgbClr val="0E1B3E"/>
+                  <a:srgbClr val="070F26"/>
                 </a:solidFill>
               </a:rPr>
               <a:t>NTT DATA UNIVERSITY</a:t>
@@ -8051,7 +8051,7 @@
           <p:cNvPr id="7" name="">
             <a:extLst xmlns:a="http://schemas.openxmlformats.org/drawingml/2006/main">
               <a:ext uri="{FF2B5EF4-FFF2-40B4-BE49-F238E27FC236}">
-                <a16:creationId xmlns:a16="http://schemas.microsoft.com/office/drawing/2014/main" id="{7CF7F283-B95D-4F74-B4D6-9C9EBF1FEB00}"/>
+                <a16:creationId xmlns:a16="http://schemas.microsoft.com/office/drawing/2014/main" id="{D8B97505-C0AA-4F10-BBFB-5CF53444C36B}"/>
               </a:ext>
             </a:extLst>
           </p:cNvPr>
@@ -8109,7 +8109,7 @@
           <p:cNvPr id="8" name="">
             <a:extLst xmlns:a="http://schemas.openxmlformats.org/drawingml/2006/main">
               <a:ext uri="{FF2B5EF4-FFF2-40B4-BE49-F238E27FC236}">
-                <a16:creationId xmlns:a16="http://schemas.microsoft.com/office/drawing/2014/main" id="{4863389D-5B8F-42C7-AE81-6F4A2E838C16}"/>
+                <a16:creationId xmlns:a16="http://schemas.microsoft.com/office/drawing/2014/main" id="{6DC04556-1C4A-4B92-99FC-95728FF8B043}"/>
               </a:ext>
             </a:extLst>
           </p:cNvPr>
@@ -8147,14 +8147,14 @@
             <a:pPr algn="l">
               <a:defRPr sz="2400" b="0">
                 <a:solidFill>
-                  <a:srgbClr val="0E1B3E"/>
+                  <a:srgbClr val="070F26"/>
                 </a:solidFill>
               </a:defRPr>
             </a:pPr>
             <a:r>
               <a:rPr sz="2400" b="0">
                 <a:solidFill>
-                  <a:srgbClr val="0E1B3E"/>
+                  <a:srgbClr val="070F26"/>
                 </a:solidFill>
               </a:rPr>
               <a:t>Módulo 4 — Python para Dados</a:t>
@@ -8167,7 +8167,7 @@
           <p:cNvPr id="9" name="">
             <a:extLst xmlns:a="http://schemas.openxmlformats.org/drawingml/2006/main">
               <a:ext uri="{FF2B5EF4-FFF2-40B4-BE49-F238E27FC236}">
-                <a16:creationId xmlns:a16="http://schemas.microsoft.com/office/drawing/2014/main" id="{B09FB300-D642-4A07-85AB-31C7B9255AB9}"/>
+                <a16:creationId xmlns:a16="http://schemas.microsoft.com/office/drawing/2014/main" id="{9793DD5A-B93B-44BA-9520-B413C919C57B}"/>
               </a:ext>
             </a:extLst>
           </p:cNvPr>
@@ -8225,7 +8225,7 @@
           <p:cNvPr id="10" name="">
             <a:extLst xmlns:a="http://schemas.openxmlformats.org/drawingml/2006/main">
               <a:ext uri="{FF2B5EF4-FFF2-40B4-BE49-F238E27FC236}">
-                <a16:creationId xmlns:a16="http://schemas.microsoft.com/office/drawing/2014/main" id="{25E19CBE-458D-4D1D-A9B4-AD35CDD3A65A}"/>
+                <a16:creationId xmlns:a16="http://schemas.microsoft.com/office/drawing/2014/main" id="{A73E50D0-2CD5-4FDE-84EC-758DE284BAD7}"/>
               </a:ext>
             </a:extLst>
           </p:cNvPr>
@@ -8258,7 +8258,7 @@
           <p:cNvPr id="11" name="">
             <a:extLst xmlns:a="http://schemas.openxmlformats.org/drawingml/2006/main">
               <a:ext uri="{FF2B5EF4-FFF2-40B4-BE49-F238E27FC236}">
-                <a16:creationId xmlns:a16="http://schemas.microsoft.com/office/drawing/2014/main" id="{AF3CFE2D-6C2F-4866-9EB2-F94735B82145}"/>
+                <a16:creationId xmlns:a16="http://schemas.microsoft.com/office/drawing/2014/main" id="{C9D663F0-C5BF-4BC8-8CAF-6DF013F57AC9}"/>
               </a:ext>
             </a:extLst>
           </p:cNvPr>
@@ -8293,7 +8293,7 @@
           <p:cNvPr id="12" name="">
             <a:extLst xmlns:a="http://schemas.openxmlformats.org/drawingml/2006/main">
               <a:ext uri="{FF2B5EF4-FFF2-40B4-BE49-F238E27FC236}">
-                <a16:creationId xmlns:a16="http://schemas.microsoft.com/office/drawing/2014/main" id="{C7A0A3A0-FA61-4B51-BF97-BF129D944723}"/>
+                <a16:creationId xmlns:a16="http://schemas.microsoft.com/office/drawing/2014/main" id="{2BE609DA-E0C2-49DA-963E-DA0DBE436FDC}"/>
               </a:ext>
             </a:extLst>
           </p:cNvPr>
@@ -8351,7 +8351,7 @@
           <p:cNvPr id="13" name="">
             <a:extLst xmlns:a="http://schemas.openxmlformats.org/drawingml/2006/main">
               <a:ext uri="{FF2B5EF4-FFF2-40B4-BE49-F238E27FC236}">
-                <a16:creationId xmlns:a16="http://schemas.microsoft.com/office/drawing/2014/main" id="{05AE2750-2140-411E-89CF-12B54F65D7F8}"/>
+                <a16:creationId xmlns:a16="http://schemas.microsoft.com/office/drawing/2014/main" id="{45868DE4-CFD7-459B-AEAA-06EF942B0195}"/>
               </a:ext>
             </a:extLst>
           </p:cNvPr>
@@ -8443,7 +8443,7 @@
           <p:cNvPr id="14" name="">
             <a:extLst xmlns:a="http://schemas.openxmlformats.org/drawingml/2006/main">
               <a:ext uri="{FF2B5EF4-FFF2-40B4-BE49-F238E27FC236}">
-                <a16:creationId xmlns:a16="http://schemas.microsoft.com/office/drawing/2014/main" id="{50E97EF0-C4C5-46D7-A910-EB91468554EC}"/>
+                <a16:creationId xmlns:a16="http://schemas.microsoft.com/office/drawing/2014/main" id="{4FE1A4C1-6D96-4235-A6D6-33AC3E4179B3}"/>
               </a:ext>
             </a:extLst>
           </p:cNvPr>
@@ -8476,7 +8476,7 @@
           <p:cNvPr id="15" name="">
             <a:extLst xmlns:a="http://schemas.openxmlformats.org/drawingml/2006/main">
               <a:ext uri="{FF2B5EF4-FFF2-40B4-BE49-F238E27FC236}">
-                <a16:creationId xmlns:a16="http://schemas.microsoft.com/office/drawing/2014/main" id="{72BCD375-E5B9-4E7F-A7F0-BC794BB848B1}"/>
+                <a16:creationId xmlns:a16="http://schemas.microsoft.com/office/drawing/2014/main" id="{C40C08F7-DF40-4BB5-A651-75E534271701}"/>
               </a:ext>
             </a:extLst>
           </p:cNvPr>
@@ -8511,7 +8511,7 @@
           <p:cNvPr id="16" name="">
             <a:extLst xmlns:a="http://schemas.openxmlformats.org/drawingml/2006/main">
               <a:ext uri="{FF2B5EF4-FFF2-40B4-BE49-F238E27FC236}">
-                <a16:creationId xmlns:a16="http://schemas.microsoft.com/office/drawing/2014/main" id="{5E220D48-ED6D-4F5B-85A0-36EF74C5A9CF}"/>
+                <a16:creationId xmlns:a16="http://schemas.microsoft.com/office/drawing/2014/main" id="{D9DD1177-7FAB-495C-8274-C86A4B0C13BD}"/>
               </a:ext>
             </a:extLst>
           </p:cNvPr>
@@ -8569,7 +8569,7 @@
           <p:cNvPr id="17" name="">
             <a:extLst xmlns:a="http://schemas.openxmlformats.org/drawingml/2006/main">
               <a:ext uri="{FF2B5EF4-FFF2-40B4-BE49-F238E27FC236}">
-                <a16:creationId xmlns:a16="http://schemas.microsoft.com/office/drawing/2014/main" id="{8D162976-B2BB-44B6-B8C0-0B3DEE18707B}"/>
+                <a16:creationId xmlns:a16="http://schemas.microsoft.com/office/drawing/2014/main" id="{7718ED12-0FAD-438C-AFCA-638DEF084E7D}"/>
               </a:ext>
             </a:extLst>
           </p:cNvPr>
@@ -8661,7 +8661,7 @@
           <p:cNvPr id="18" name="">
             <a:extLst xmlns:a="http://schemas.openxmlformats.org/drawingml/2006/main">
               <a:ext uri="{FF2B5EF4-FFF2-40B4-BE49-F238E27FC236}">
-                <a16:creationId xmlns:a16="http://schemas.microsoft.com/office/drawing/2014/main" id="{AAB588B3-4DD2-4BF2-A4F1-63354D454439}"/>
+                <a16:creationId xmlns:a16="http://schemas.microsoft.com/office/drawing/2014/main" id="{922D9994-C4FE-4C1F-8B7A-761238B1468C}"/>
               </a:ext>
             </a:extLst>
           </p:cNvPr>
@@ -8694,7 +8694,7 @@
           <p:cNvPr id="19" name="">
             <a:extLst xmlns:a="http://schemas.openxmlformats.org/drawingml/2006/main">
               <a:ext uri="{FF2B5EF4-FFF2-40B4-BE49-F238E27FC236}">
-                <a16:creationId xmlns:a16="http://schemas.microsoft.com/office/drawing/2014/main" id="{84ADD5B4-6DEE-439D-9750-673DE6F4C81B}"/>
+                <a16:creationId xmlns:a16="http://schemas.microsoft.com/office/drawing/2014/main" id="{BD462CCE-AEE2-478F-B6A9-A12DD0BFC23E}"/>
               </a:ext>
             </a:extLst>
           </p:cNvPr>
@@ -8729,7 +8729,7 @@
           <p:cNvPr id="20" name="">
             <a:extLst xmlns:a="http://schemas.openxmlformats.org/drawingml/2006/main">
               <a:ext uri="{FF2B5EF4-FFF2-40B4-BE49-F238E27FC236}">
-                <a16:creationId xmlns:a16="http://schemas.microsoft.com/office/drawing/2014/main" id="{4B7890EA-C062-451C-B9BB-D5F9F7679A4E}"/>
+                <a16:creationId xmlns:a16="http://schemas.microsoft.com/office/drawing/2014/main" id="{8719E4CB-E17C-477A-B124-4CB7D51D3BC8}"/>
               </a:ext>
             </a:extLst>
           </p:cNvPr>
@@ -8787,7 +8787,7 @@
           <p:cNvPr id="21" name="">
             <a:extLst xmlns:a="http://schemas.openxmlformats.org/drawingml/2006/main">
               <a:ext uri="{FF2B5EF4-FFF2-40B4-BE49-F238E27FC236}">
-                <a16:creationId xmlns:a16="http://schemas.microsoft.com/office/drawing/2014/main" id="{35406BE5-0C86-4D8A-BCDC-45E733886754}"/>
+                <a16:creationId xmlns:a16="http://schemas.microsoft.com/office/drawing/2014/main" id="{DEB547F4-80B5-4646-830C-994C92C5DA30}"/>
               </a:ext>
             </a:extLst>
           </p:cNvPr>
@@ -8860,7 +8860,7 @@
     </p:spTree>
     <p:extLst>
       <p:ext uri="{BB962C8B-B14F-4D97-AF65-F5344CB8AC3E}">
-        <p14:creationId xmlns:p14="http://schemas.microsoft.com/office/powerpoint/2010/main" val="1471963025"/>
+        <p14:creationId xmlns:p14="http://schemas.microsoft.com/office/powerpoint/2010/main" val="350651469"/>
       </p:ext>
     </p:extLst>
   </p:cSld>
@@ -8873,7 +8873,7 @@
     <p:bg>
       <p:bgPr>
         <a:solidFill xmlns:a="http://schemas.openxmlformats.org/drawingml/2006/main">
-          <a:srgbClr val="0E1B3E"/>
+          <a:srgbClr val="070F26"/>
         </a:solidFill>
       </p:bgPr>
     </p:bg>
@@ -8891,7 +8891,7 @@
           <p:cNvPr id="1" name="">
             <a:extLst xmlns:a="http://schemas.openxmlformats.org/drawingml/2006/main">
               <a:ext uri="{FF2B5EF4-FFF2-40B4-BE49-F238E27FC236}">
-                <a16:creationId xmlns:a16="http://schemas.microsoft.com/office/drawing/2014/main" id="{99F206AE-125E-4434-9DB3-DF954294ED9F}"/>
+                <a16:creationId xmlns:a16="http://schemas.microsoft.com/office/drawing/2014/main" id="{A77EEFAF-FD14-48CD-8BCD-381512C7306C}"/>
               </a:ext>
             </a:extLst>
           </p:cNvPr>
@@ -8909,7 +8909,7 @@
             <a:avLst/>
           </a:prstGeom>
           <a:solidFill xmlns:a="http://schemas.openxmlformats.org/drawingml/2006/main">
-            <a:srgbClr val="0E1B3E"/>
+            <a:srgbClr val="070F26"/>
           </a:solidFill>
           <a:ln xmlns:a="http://schemas.openxmlformats.org/drawingml/2006/main" w="0">
             <a:solidFill>
@@ -8930,7 +8930,7 @@
           <p:nvPr/>
         </p:nvPicPr>
         <p:blipFill>
-          <a:blip xmlns:r="http://schemas.openxmlformats.org/officeDocument/2006/relationships" xmlns:a="http://schemas.openxmlformats.org/drawingml/2006/main" r:embed="Raaa2882edf4c4c1d"/>
+          <a:blip xmlns:r="http://schemas.openxmlformats.org/officeDocument/2006/relationships" xmlns:a="http://schemas.openxmlformats.org/drawingml/2006/main" r:embed="R1ecd06c32ce248fe"/>
           <a:stretch xmlns:a="http://schemas.openxmlformats.org/drawingml/2006/main"/>
         </p:blipFill>
         <p:spPr>
@@ -8948,7 +8948,7 @@
           <p:cNvPr id="3" name="">
             <a:extLst xmlns:a="http://schemas.openxmlformats.org/drawingml/2006/main">
               <a:ext uri="{FF2B5EF4-FFF2-40B4-BE49-F238E27FC236}">
-                <a16:creationId xmlns:a16="http://schemas.microsoft.com/office/drawing/2014/main" id="{B41A7A8B-8395-4C06-B96D-0D88FD296F02}"/>
+                <a16:creationId xmlns:a16="http://schemas.microsoft.com/office/drawing/2014/main" id="{B82C3E1E-681D-4BB8-93BB-868576759881}"/>
               </a:ext>
             </a:extLst>
           </p:cNvPr>
@@ -9006,7 +9006,7 @@
           <p:cNvPr id="4" name="">
             <a:extLst xmlns:a="http://schemas.openxmlformats.org/drawingml/2006/main">
               <a:ext uri="{FF2B5EF4-FFF2-40B4-BE49-F238E27FC236}">
-                <a16:creationId xmlns:a16="http://schemas.microsoft.com/office/drawing/2014/main" id="{F70A6F9D-DFA8-4584-9FF0-1CA4574EC28C}"/>
+                <a16:creationId xmlns:a16="http://schemas.microsoft.com/office/drawing/2014/main" id="{4C35C9DC-FDA1-42AD-8E09-38302F586516}"/>
               </a:ext>
             </a:extLst>
           </p:cNvPr>
@@ -9064,7 +9064,7 @@
           <p:cNvPr id="5" name="">
             <a:extLst xmlns:a="http://schemas.openxmlformats.org/drawingml/2006/main">
               <a:ext uri="{FF2B5EF4-FFF2-40B4-BE49-F238E27FC236}">
-                <a16:creationId xmlns:a16="http://schemas.microsoft.com/office/drawing/2014/main" id="{9270BC56-1310-4A5B-A15A-438DB7719055}"/>
+                <a16:creationId xmlns:a16="http://schemas.microsoft.com/office/drawing/2014/main" id="{0386EC86-4D9F-4587-BB73-C5B5C1637E71}"/>
               </a:ext>
             </a:extLst>
           </p:cNvPr>
@@ -9126,7 +9126,7 @@
           <p:nvPr/>
         </p:nvPicPr>
         <p:blipFill>
-          <a:blip xmlns:r="http://schemas.openxmlformats.org/officeDocument/2006/relationships" xmlns:a="http://schemas.openxmlformats.org/drawingml/2006/main" r:embed="Rfb4bdced3fcc4f14"/>
+          <a:blip xmlns:r="http://schemas.openxmlformats.org/officeDocument/2006/relationships" xmlns:a="http://schemas.openxmlformats.org/drawingml/2006/main" r:embed="R630601776c3a4a65"/>
           <a:stretch xmlns:a="http://schemas.openxmlformats.org/drawingml/2006/main"/>
         </p:blipFill>
         <p:spPr>
@@ -9144,7 +9144,7 @@
           <p:cNvPr id="7" name="">
             <a:extLst xmlns:a="http://schemas.openxmlformats.org/drawingml/2006/main">
               <a:ext uri="{FF2B5EF4-FFF2-40B4-BE49-F238E27FC236}">
-                <a16:creationId xmlns:a16="http://schemas.microsoft.com/office/drawing/2014/main" id="{887F10CF-067C-4B87-A692-931EF39F7E58}"/>
+                <a16:creationId xmlns:a16="http://schemas.microsoft.com/office/drawing/2014/main" id="{431A2DEC-3C8C-455C-9363-B079542FA3CB}"/>
               </a:ext>
             </a:extLst>
           </p:cNvPr>
@@ -9202,7 +9202,7 @@
           <p:cNvPr id="8" name="">
             <a:extLst xmlns:a="http://schemas.openxmlformats.org/drawingml/2006/main">
               <a:ext uri="{FF2B5EF4-FFF2-40B4-BE49-F238E27FC236}">
-                <a16:creationId xmlns:a16="http://schemas.microsoft.com/office/drawing/2014/main" id="{022D4CD7-8921-4B9A-961E-3625ADF71E0D}"/>
+                <a16:creationId xmlns:a16="http://schemas.microsoft.com/office/drawing/2014/main" id="{928E814F-FD25-4740-8935-5F97DF5E21D1}"/>
               </a:ext>
             </a:extLst>
           </p:cNvPr>
@@ -9258,7 +9258,7 @@
     </p:spTree>
     <p:extLst>
       <p:ext uri="{BB962C8B-B14F-4D97-AF65-F5344CB8AC3E}">
-        <p14:creationId xmlns:p14="http://schemas.microsoft.com/office/powerpoint/2010/main" val="2093380804"/>
+        <p14:creationId xmlns:p14="http://schemas.microsoft.com/office/powerpoint/2010/main" val="272651157"/>
       </p:ext>
     </p:extLst>
   </p:cSld>
@@ -9289,7 +9289,7 @@
           <p:cNvPr id="1" name="">
             <a:extLst xmlns:a="http://schemas.openxmlformats.org/drawingml/2006/main">
               <a:ext uri="{FF2B5EF4-FFF2-40B4-BE49-F238E27FC236}">
-                <a16:creationId xmlns:a16="http://schemas.microsoft.com/office/drawing/2014/main" id="{7C6B98C9-EA5E-4643-9039-9249F99002F1}"/>
+                <a16:creationId xmlns:a16="http://schemas.microsoft.com/office/drawing/2014/main" id="{21007547-6130-4FAC-86AE-6FC6A5C12095}"/>
               </a:ext>
             </a:extLst>
           </p:cNvPr>
@@ -9328,7 +9328,7 @@
           <p:nvPr/>
         </p:nvPicPr>
         <p:blipFill>
-          <a:blip xmlns:r="http://schemas.openxmlformats.org/officeDocument/2006/relationships" xmlns:a="http://schemas.openxmlformats.org/drawingml/2006/main" r:embed="Raaa5b0e1ca31404f"/>
+          <a:blip xmlns:r="http://schemas.openxmlformats.org/officeDocument/2006/relationships" xmlns:a="http://schemas.openxmlformats.org/drawingml/2006/main" r:embed="Rbc651d3849d94277"/>
           <a:stretch xmlns:a="http://schemas.openxmlformats.org/drawingml/2006/main"/>
         </p:blipFill>
         <p:spPr>
@@ -9346,7 +9346,7 @@
           <p:cNvPr id="3" name="">
             <a:extLst xmlns:a="http://schemas.openxmlformats.org/drawingml/2006/main">
               <a:ext uri="{FF2B5EF4-FFF2-40B4-BE49-F238E27FC236}">
-                <a16:creationId xmlns:a16="http://schemas.microsoft.com/office/drawing/2014/main" id="{F3EA4644-44D3-45CF-981E-8A00450AD8E5}"/>
+                <a16:creationId xmlns:a16="http://schemas.microsoft.com/office/drawing/2014/main" id="{8F5891D3-9881-40B7-B785-ACC788F278A9}"/>
               </a:ext>
             </a:extLst>
           </p:cNvPr>
@@ -9384,14 +9384,14 @@
             <a:pPr algn="r">
               <a:defRPr sz="825" b="1">
                 <a:solidFill>
-                  <a:srgbClr val="0E1B3E"/>
+                  <a:srgbClr val="070F26"/>
                 </a:solidFill>
               </a:defRPr>
             </a:pPr>
             <a:r>
               <a:rPr sz="825" b="1">
                 <a:solidFill>
-                  <a:srgbClr val="0E1B3E"/>
+                  <a:srgbClr val="070F26"/>
                 </a:solidFill>
               </a:rPr>
               <a:t>NTT DATA UNIVERSITY</a:t>
@@ -9404,7 +9404,7 @@
           <p:cNvPr id="4" name="">
             <a:extLst xmlns:a="http://schemas.openxmlformats.org/drawingml/2006/main">
               <a:ext uri="{FF2B5EF4-FFF2-40B4-BE49-F238E27FC236}">
-                <a16:creationId xmlns:a16="http://schemas.microsoft.com/office/drawing/2014/main" id="{41CB0EC1-72A6-432A-94D6-33C233CFF526}"/>
+                <a16:creationId xmlns:a16="http://schemas.microsoft.com/office/drawing/2014/main" id="{86395DD3-37BD-48B1-844C-DC63A978ADCB}"/>
               </a:ext>
             </a:extLst>
           </p:cNvPr>
@@ -9462,7 +9462,7 @@
           <p:cNvPr id="5" name="">
             <a:extLst xmlns:a="http://schemas.openxmlformats.org/drawingml/2006/main">
               <a:ext uri="{FF2B5EF4-FFF2-40B4-BE49-F238E27FC236}">
-                <a16:creationId xmlns:a16="http://schemas.microsoft.com/office/drawing/2014/main" id="{27686920-2497-4558-9B63-2CC4EA48B65A}"/>
+                <a16:creationId xmlns:a16="http://schemas.microsoft.com/office/drawing/2014/main" id="{F933A728-CA23-4449-854F-372A9CCF64BA}"/>
               </a:ext>
             </a:extLst>
           </p:cNvPr>
@@ -9520,7 +9520,7 @@
           <p:cNvPr id="6" name="">
             <a:extLst xmlns:a="http://schemas.openxmlformats.org/drawingml/2006/main">
               <a:ext uri="{FF2B5EF4-FFF2-40B4-BE49-F238E27FC236}">
-                <a16:creationId xmlns:a16="http://schemas.microsoft.com/office/drawing/2014/main" id="{8C3BD8D1-C4DF-4462-B500-B168C23F3ECD}"/>
+                <a16:creationId xmlns:a16="http://schemas.microsoft.com/office/drawing/2014/main" id="{48A6ADB0-2008-4AC0-A126-181C4C842715}"/>
               </a:ext>
             </a:extLst>
           </p:cNvPr>
@@ -9558,14 +9558,14 @@
             <a:pPr algn="r">
               <a:defRPr sz="675" b="1">
                 <a:solidFill>
-                  <a:srgbClr val="0E1B3E"/>
+                  <a:srgbClr val="070F26"/>
                 </a:solidFill>
               </a:defRPr>
             </a:pPr>
             <a:r>
               <a:rPr sz="675" b="1">
                 <a:solidFill>
-                  <a:srgbClr val="0E1B3E"/>
+                  <a:srgbClr val="070F26"/>
                 </a:solidFill>
               </a:rPr>
               <a:t>NTT DATA UNIVERSITY</a:t>
@@ -9578,7 +9578,7 @@
           <p:cNvPr id="7" name="">
             <a:extLst xmlns:a="http://schemas.openxmlformats.org/drawingml/2006/main">
               <a:ext uri="{FF2B5EF4-FFF2-40B4-BE49-F238E27FC236}">
-                <a16:creationId xmlns:a16="http://schemas.microsoft.com/office/drawing/2014/main" id="{CD765F66-2015-417D-A700-9E82084EB6D5}"/>
+                <a16:creationId xmlns:a16="http://schemas.microsoft.com/office/drawing/2014/main" id="{2BC36F9A-7452-4DE2-8B21-631AC806A4AB}"/>
               </a:ext>
             </a:extLst>
           </p:cNvPr>
@@ -9636,7 +9636,7 @@
           <p:cNvPr id="8" name="">
             <a:extLst xmlns:a="http://schemas.openxmlformats.org/drawingml/2006/main">
               <a:ext uri="{FF2B5EF4-FFF2-40B4-BE49-F238E27FC236}">
-                <a16:creationId xmlns:a16="http://schemas.microsoft.com/office/drawing/2014/main" id="{4C6BECB8-9A29-4733-A235-FFC3557232A1}"/>
+                <a16:creationId xmlns:a16="http://schemas.microsoft.com/office/drawing/2014/main" id="{90E9F4F9-7140-45A0-9725-39A351CC6BCE}"/>
               </a:ext>
             </a:extLst>
           </p:cNvPr>
@@ -9674,14 +9674,14 @@
             <a:pPr algn="l">
               <a:defRPr sz="2400" b="0">
                 <a:solidFill>
-                  <a:srgbClr val="0E1B3E"/>
+                  <a:srgbClr val="070F26"/>
                 </a:solidFill>
               </a:defRPr>
             </a:pPr>
             <a:r>
               <a:rPr sz="2400" b="0">
                 <a:solidFill>
-                  <a:srgbClr val="0E1B3E"/>
+                  <a:srgbClr val="070F26"/>
                 </a:solidFill>
               </a:rPr>
               <a:t>Hoje vamos debater decisões — não sintaxe</a:t>
@@ -9694,7 +9694,7 @@
           <p:cNvPr id="9" name="">
             <a:extLst xmlns:a="http://schemas.openxmlformats.org/drawingml/2006/main">
               <a:ext uri="{FF2B5EF4-FFF2-40B4-BE49-F238E27FC236}">
-                <a16:creationId xmlns:a16="http://schemas.microsoft.com/office/drawing/2014/main" id="{F8230FF2-7440-4668-8C25-0AB199E4BB9F}"/>
+                <a16:creationId xmlns:a16="http://schemas.microsoft.com/office/drawing/2014/main" id="{4F414EDE-536A-4869-9018-E828E95CB929}"/>
               </a:ext>
             </a:extLst>
           </p:cNvPr>
@@ -9752,7 +9752,7 @@
           <p:cNvPr id="10" name="">
             <a:extLst xmlns:a="http://schemas.openxmlformats.org/drawingml/2006/main">
               <a:ext uri="{FF2B5EF4-FFF2-40B4-BE49-F238E27FC236}">
-                <a16:creationId xmlns:a16="http://schemas.microsoft.com/office/drawing/2014/main" id="{75CA1F13-0ADC-4B75-A013-09FB68A393F3}"/>
+                <a16:creationId xmlns:a16="http://schemas.microsoft.com/office/drawing/2014/main" id="{DA34FFA1-4AEA-4BD7-97DD-E66C740DEF54}"/>
               </a:ext>
             </a:extLst>
           </p:cNvPr>
@@ -9785,7 +9785,7 @@
           <p:cNvPr id="11" name="">
             <a:extLst xmlns:a="http://schemas.openxmlformats.org/drawingml/2006/main">
               <a:ext uri="{FF2B5EF4-FFF2-40B4-BE49-F238E27FC236}">
-                <a16:creationId xmlns:a16="http://schemas.microsoft.com/office/drawing/2014/main" id="{AB21C630-9453-4225-978D-4EB848693B2E}"/>
+                <a16:creationId xmlns:a16="http://schemas.microsoft.com/office/drawing/2014/main" id="{D8FFF8A8-22F6-446D-8F10-6A6264A1762F}"/>
               </a:ext>
             </a:extLst>
           </p:cNvPr>
@@ -9820,7 +9820,7 @@
           <p:cNvPr id="12" name="">
             <a:extLst xmlns:a="http://schemas.openxmlformats.org/drawingml/2006/main">
               <a:ext uri="{FF2B5EF4-FFF2-40B4-BE49-F238E27FC236}">
-                <a16:creationId xmlns:a16="http://schemas.microsoft.com/office/drawing/2014/main" id="{3A3FD44C-CB17-4824-AF83-4FB6888AE5C9}"/>
+                <a16:creationId xmlns:a16="http://schemas.microsoft.com/office/drawing/2014/main" id="{511E97CE-AA36-4D27-A35F-EAD84F2D51B8}"/>
               </a:ext>
             </a:extLst>
           </p:cNvPr>
@@ -9878,7 +9878,7 @@
           <p:cNvPr id="13" name="">
             <a:extLst xmlns:a="http://schemas.openxmlformats.org/drawingml/2006/main">
               <a:ext uri="{FF2B5EF4-FFF2-40B4-BE49-F238E27FC236}">
-                <a16:creationId xmlns:a16="http://schemas.microsoft.com/office/drawing/2014/main" id="{B1C56FDA-9D68-4EA6-8259-DA7CFE0338CD}"/>
+                <a16:creationId xmlns:a16="http://schemas.microsoft.com/office/drawing/2014/main" id="{E4CD2A63-46D4-4907-896B-8AF06F2C4AF0}"/>
               </a:ext>
             </a:extLst>
           </p:cNvPr>
@@ -9953,7 +9953,7 @@
           <p:cNvPr id="14" name="">
             <a:extLst xmlns:a="http://schemas.openxmlformats.org/drawingml/2006/main">
               <a:ext uri="{FF2B5EF4-FFF2-40B4-BE49-F238E27FC236}">
-                <a16:creationId xmlns:a16="http://schemas.microsoft.com/office/drawing/2014/main" id="{39E27441-8FE2-458F-A481-F70C45851E0A}"/>
+                <a16:creationId xmlns:a16="http://schemas.microsoft.com/office/drawing/2014/main" id="{CF68DE90-C47A-4B76-BFFF-8A62B45F1BCD}"/>
               </a:ext>
             </a:extLst>
           </p:cNvPr>
@@ -9986,7 +9986,7 @@
           <p:cNvPr id="15" name="">
             <a:extLst xmlns:a="http://schemas.openxmlformats.org/drawingml/2006/main">
               <a:ext uri="{FF2B5EF4-FFF2-40B4-BE49-F238E27FC236}">
-                <a16:creationId xmlns:a16="http://schemas.microsoft.com/office/drawing/2014/main" id="{54C0059D-1B80-49C4-A0E2-255666F87FA8}"/>
+                <a16:creationId xmlns:a16="http://schemas.microsoft.com/office/drawing/2014/main" id="{EA899C0A-0DDA-4E51-97CD-7F7C3561F7CC}"/>
               </a:ext>
             </a:extLst>
           </p:cNvPr>
@@ -10021,7 +10021,7 @@
           <p:cNvPr id="16" name="">
             <a:extLst xmlns:a="http://schemas.openxmlformats.org/drawingml/2006/main">
               <a:ext uri="{FF2B5EF4-FFF2-40B4-BE49-F238E27FC236}">
-                <a16:creationId xmlns:a16="http://schemas.microsoft.com/office/drawing/2014/main" id="{5AADFFB5-8CAC-4594-B231-0665E8DEA832}"/>
+                <a16:creationId xmlns:a16="http://schemas.microsoft.com/office/drawing/2014/main" id="{8B59B9F3-59F5-46F1-989D-78E69BBFEFBA}"/>
               </a:ext>
             </a:extLst>
           </p:cNvPr>
@@ -10079,7 +10079,7 @@
           <p:cNvPr id="17" name="">
             <a:extLst xmlns:a="http://schemas.openxmlformats.org/drawingml/2006/main">
               <a:ext uri="{FF2B5EF4-FFF2-40B4-BE49-F238E27FC236}">
-                <a16:creationId xmlns:a16="http://schemas.microsoft.com/office/drawing/2014/main" id="{E62A17F6-4FBB-4EF5-AD47-F814E4C68AF8}"/>
+                <a16:creationId xmlns:a16="http://schemas.microsoft.com/office/drawing/2014/main" id="{0A0FA43D-C8C4-46E2-B6A8-C589AE26F305}"/>
               </a:ext>
             </a:extLst>
           </p:cNvPr>
@@ -10171,7 +10171,7 @@
           <p:cNvPr id="18" name="">
             <a:extLst xmlns:a="http://schemas.openxmlformats.org/drawingml/2006/main">
               <a:ext uri="{FF2B5EF4-FFF2-40B4-BE49-F238E27FC236}">
-                <a16:creationId xmlns:a16="http://schemas.microsoft.com/office/drawing/2014/main" id="{61FB585D-832C-462B-A1C0-B20E3B2D6E5E}"/>
+                <a16:creationId xmlns:a16="http://schemas.microsoft.com/office/drawing/2014/main" id="{AFDCE3B2-ECAF-4683-AA14-1D44A448CEF0}"/>
               </a:ext>
             </a:extLst>
           </p:cNvPr>
@@ -10204,7 +10204,7 @@
           <p:cNvPr id="19" name="">
             <a:extLst xmlns:a="http://schemas.openxmlformats.org/drawingml/2006/main">
               <a:ext uri="{FF2B5EF4-FFF2-40B4-BE49-F238E27FC236}">
-                <a16:creationId xmlns:a16="http://schemas.microsoft.com/office/drawing/2014/main" id="{E839530A-D559-4222-B7EF-A2A5C662C577}"/>
+                <a16:creationId xmlns:a16="http://schemas.microsoft.com/office/drawing/2014/main" id="{D3A08003-FBE3-4EF5-9E85-DF64469F26A0}"/>
               </a:ext>
             </a:extLst>
           </p:cNvPr>
@@ -10239,7 +10239,7 @@
           <p:cNvPr id="20" name="">
             <a:extLst xmlns:a="http://schemas.openxmlformats.org/drawingml/2006/main">
               <a:ext uri="{FF2B5EF4-FFF2-40B4-BE49-F238E27FC236}">
-                <a16:creationId xmlns:a16="http://schemas.microsoft.com/office/drawing/2014/main" id="{A2AD398F-2AAF-4B87-8691-C57114386521}"/>
+                <a16:creationId xmlns:a16="http://schemas.microsoft.com/office/drawing/2014/main" id="{C17C24EF-791D-4987-B7BD-CCC2C88B926C}"/>
               </a:ext>
             </a:extLst>
           </p:cNvPr>
@@ -10297,7 +10297,7 @@
           <p:cNvPr id="21" name="">
             <a:extLst xmlns:a="http://schemas.openxmlformats.org/drawingml/2006/main">
               <a:ext uri="{FF2B5EF4-FFF2-40B4-BE49-F238E27FC236}">
-                <a16:creationId xmlns:a16="http://schemas.microsoft.com/office/drawing/2014/main" id="{5D9490AA-4B74-4D63-AD8F-AD765281A2E6}"/>
+                <a16:creationId xmlns:a16="http://schemas.microsoft.com/office/drawing/2014/main" id="{92DD6157-00CD-422E-B47F-D95C8F7A2125}"/>
               </a:ext>
             </a:extLst>
           </p:cNvPr>
@@ -10387,7 +10387,7 @@
     </p:spTree>
     <p:extLst>
       <p:ext uri="{BB962C8B-B14F-4D97-AF65-F5344CB8AC3E}">
-        <p14:creationId xmlns:p14="http://schemas.microsoft.com/office/powerpoint/2010/main" val="1856918809"/>
+        <p14:creationId xmlns:p14="http://schemas.microsoft.com/office/powerpoint/2010/main" val="744458467"/>
       </p:ext>
     </p:extLst>
   </p:cSld>
@@ -10400,7 +10400,7 @@
     <p:bg>
       <p:bgPr>
         <a:solidFill xmlns:a="http://schemas.openxmlformats.org/drawingml/2006/main">
-          <a:srgbClr val="0E1B3E"/>
+          <a:srgbClr val="070F26"/>
         </a:solidFill>
       </p:bgPr>
     </p:bg>
@@ -10418,7 +10418,7 @@
           <p:cNvPr id="1" name="">
             <a:extLst xmlns:a="http://schemas.openxmlformats.org/drawingml/2006/main">
               <a:ext uri="{FF2B5EF4-FFF2-40B4-BE49-F238E27FC236}">
-                <a16:creationId xmlns:a16="http://schemas.microsoft.com/office/drawing/2014/main" id="{73D2AC7E-FB32-416C-9821-69226076257E}"/>
+                <a16:creationId xmlns:a16="http://schemas.microsoft.com/office/drawing/2014/main" id="{CFE77C36-3F0F-425C-99F0-6C960491D43A}"/>
               </a:ext>
             </a:extLst>
           </p:cNvPr>
@@ -10436,7 +10436,7 @@
             <a:avLst/>
           </a:prstGeom>
           <a:solidFill xmlns:a="http://schemas.openxmlformats.org/drawingml/2006/main">
-            <a:srgbClr val="0E1B3E"/>
+            <a:srgbClr val="070F26"/>
           </a:solidFill>
           <a:ln xmlns:a="http://schemas.openxmlformats.org/drawingml/2006/main" w="0">
             <a:solidFill>
@@ -10457,7 +10457,7 @@
           <p:nvPr/>
         </p:nvPicPr>
         <p:blipFill>
-          <a:blip xmlns:r="http://schemas.openxmlformats.org/officeDocument/2006/relationships" xmlns:a="http://schemas.openxmlformats.org/drawingml/2006/main" r:embed="R0e59aa3c7b15427c"/>
+          <a:blip xmlns:r="http://schemas.openxmlformats.org/officeDocument/2006/relationships" xmlns:a="http://schemas.openxmlformats.org/drawingml/2006/main" r:embed="Raf23eedef6764b37"/>
           <a:stretch xmlns:a="http://schemas.openxmlformats.org/drawingml/2006/main"/>
         </p:blipFill>
         <p:spPr>
@@ -10475,7 +10475,7 @@
           <p:cNvPr id="3" name="">
             <a:extLst xmlns:a="http://schemas.openxmlformats.org/drawingml/2006/main">
               <a:ext uri="{FF2B5EF4-FFF2-40B4-BE49-F238E27FC236}">
-                <a16:creationId xmlns:a16="http://schemas.microsoft.com/office/drawing/2014/main" id="{87DB48BD-F2CF-4982-BB23-754241D2AF87}"/>
+                <a16:creationId xmlns:a16="http://schemas.microsoft.com/office/drawing/2014/main" id="{B0DEACAA-6690-43ED-8F5B-FFF35C113CB9}"/>
               </a:ext>
             </a:extLst>
           </p:cNvPr>
@@ -10533,7 +10533,7 @@
           <p:cNvPr id="4" name="">
             <a:extLst xmlns:a="http://schemas.openxmlformats.org/drawingml/2006/main">
               <a:ext uri="{FF2B5EF4-FFF2-40B4-BE49-F238E27FC236}">
-                <a16:creationId xmlns:a16="http://schemas.microsoft.com/office/drawing/2014/main" id="{F599B2EF-0A6F-4645-BAC1-0744CE642B2D}"/>
+                <a16:creationId xmlns:a16="http://schemas.microsoft.com/office/drawing/2014/main" id="{40CEBE0D-E85B-44A0-B00F-0BA0BB88F620}"/>
               </a:ext>
             </a:extLst>
           </p:cNvPr>
@@ -10591,7 +10591,7 @@
           <p:cNvPr id="5" name="">
             <a:extLst xmlns:a="http://schemas.openxmlformats.org/drawingml/2006/main">
               <a:ext uri="{FF2B5EF4-FFF2-40B4-BE49-F238E27FC236}">
-                <a16:creationId xmlns:a16="http://schemas.microsoft.com/office/drawing/2014/main" id="{5CDE8357-8D36-4B7B-AAD5-FF56046D9EB7}"/>
+                <a16:creationId xmlns:a16="http://schemas.microsoft.com/office/drawing/2014/main" id="{87F9D2CC-E29B-4BE2-8234-3F7C1BBEF3A1}"/>
               </a:ext>
             </a:extLst>
           </p:cNvPr>
@@ -10649,7 +10649,7 @@
           <p:cNvPr id="6" name="">
             <a:extLst xmlns:a="http://schemas.openxmlformats.org/drawingml/2006/main">
               <a:ext uri="{FF2B5EF4-FFF2-40B4-BE49-F238E27FC236}">
-                <a16:creationId xmlns:a16="http://schemas.microsoft.com/office/drawing/2014/main" id="{29883F3A-7CB9-497C-915D-F472BF6844E2}"/>
+                <a16:creationId xmlns:a16="http://schemas.microsoft.com/office/drawing/2014/main" id="{A0DC979E-9376-438A-AA2D-F3178C820B75}"/>
               </a:ext>
             </a:extLst>
           </p:cNvPr>
@@ -10711,13 +10711,13 @@
           <p:nvPr/>
         </p:nvPicPr>
         <p:blipFill>
-          <a:blip xmlns:r="http://schemas.openxmlformats.org/officeDocument/2006/relationships" xmlns:a="http://schemas.openxmlformats.org/drawingml/2006/main" r:embed="R34adb8013ae04ea6"/>
+          <a:blip xmlns:r="http://schemas.openxmlformats.org/officeDocument/2006/relationships" xmlns:a="http://schemas.openxmlformats.org/drawingml/2006/main" r:embed="R000f059ee88a4d7c"/>
           <a:stretch xmlns:a="http://schemas.openxmlformats.org/drawingml/2006/main"/>
         </p:blipFill>
         <p:spPr>
           <a:xfrm xmlns:a="http://schemas.openxmlformats.org/drawingml/2006/main">
-            <a:off x="476250" y="1257300"/>
-            <a:ext cx="2667000" cy="4533900"/>
+            <a:off x="0" y="1746250"/>
+            <a:ext cx="2667000" cy="3556000"/>
           </a:xfrm>
           <a:prstGeom xmlns:a="http://schemas.openxmlformats.org/drawingml/2006/main" prst="rect">
             <a:avLst/>
@@ -10729,7 +10729,7 @@
           <p:cNvPr id="8" name="">
             <a:extLst xmlns:a="http://schemas.openxmlformats.org/drawingml/2006/main">
               <a:ext uri="{FF2B5EF4-FFF2-40B4-BE49-F238E27FC236}">
-                <a16:creationId xmlns:a16="http://schemas.microsoft.com/office/drawing/2014/main" id="{0BFD2796-18EA-4A82-92DE-15BD91BAEE9B}"/>
+                <a16:creationId xmlns:a16="http://schemas.microsoft.com/office/drawing/2014/main" id="{47F58A50-3AC0-46E5-95BE-4254757EF81C}"/>
               </a:ext>
             </a:extLst>
           </p:cNvPr>
@@ -10787,7 +10787,7 @@
           <p:cNvPr id="9" name="">
             <a:extLst xmlns:a="http://schemas.openxmlformats.org/drawingml/2006/main">
               <a:ext uri="{FF2B5EF4-FFF2-40B4-BE49-F238E27FC236}">
-                <a16:creationId xmlns:a16="http://schemas.microsoft.com/office/drawing/2014/main" id="{384A9EC0-20C6-4531-B96A-F16CC328658E}"/>
+                <a16:creationId xmlns:a16="http://schemas.microsoft.com/office/drawing/2014/main" id="{0E52BDCB-DCB4-482F-A712-D44965C3BBF4}"/>
               </a:ext>
             </a:extLst>
           </p:cNvPr>
@@ -10845,7 +10845,7 @@
           <p:cNvPr id="10" name="">
             <a:extLst xmlns:a="http://schemas.openxmlformats.org/drawingml/2006/main">
               <a:ext uri="{FF2B5EF4-FFF2-40B4-BE49-F238E27FC236}">
-                <a16:creationId xmlns:a16="http://schemas.microsoft.com/office/drawing/2014/main" id="{3BFB77C3-6ABC-4D80-9263-75E198E5CBD9}"/>
+                <a16:creationId xmlns:a16="http://schemas.microsoft.com/office/drawing/2014/main" id="{A7C4884F-3AEB-41A9-B655-8A9E9EF514F3}"/>
               </a:ext>
             </a:extLst>
           </p:cNvPr>
@@ -10901,7 +10901,7 @@
     </p:spTree>
     <p:extLst>
       <p:ext uri="{BB962C8B-B14F-4D97-AF65-F5344CB8AC3E}">
-        <p14:creationId xmlns:p14="http://schemas.microsoft.com/office/powerpoint/2010/main" val="1209653976"/>
+        <p14:creationId xmlns:p14="http://schemas.microsoft.com/office/powerpoint/2010/main" val="240843751"/>
       </p:ext>
     </p:extLst>
   </p:cSld>
@@ -10932,7 +10932,7 @@
           <p:cNvPr id="1" name="">
             <a:extLst xmlns:a="http://schemas.openxmlformats.org/drawingml/2006/main">
               <a:ext uri="{FF2B5EF4-FFF2-40B4-BE49-F238E27FC236}">
-                <a16:creationId xmlns:a16="http://schemas.microsoft.com/office/drawing/2014/main" id="{73F2E170-B1EA-4046-B9F7-3DFA8B20FA99}"/>
+                <a16:creationId xmlns:a16="http://schemas.microsoft.com/office/drawing/2014/main" id="{22751C88-D138-4908-838B-539FE9E80D32}"/>
               </a:ext>
             </a:extLst>
           </p:cNvPr>
@@ -10971,7 +10971,7 @@
           <p:nvPr/>
         </p:nvPicPr>
         <p:blipFill>
-          <a:blip xmlns:r="http://schemas.openxmlformats.org/officeDocument/2006/relationships" xmlns:a="http://schemas.openxmlformats.org/drawingml/2006/main" r:embed="R207dad0fc5514329"/>
+          <a:blip xmlns:r="http://schemas.openxmlformats.org/officeDocument/2006/relationships" xmlns:a="http://schemas.openxmlformats.org/drawingml/2006/main" r:embed="R2ade65ae47f64e20"/>
           <a:stretch xmlns:a="http://schemas.openxmlformats.org/drawingml/2006/main"/>
         </p:blipFill>
         <p:spPr>
@@ -10989,7 +10989,7 @@
           <p:cNvPr id="3" name="">
             <a:extLst xmlns:a="http://schemas.openxmlformats.org/drawingml/2006/main">
               <a:ext uri="{FF2B5EF4-FFF2-40B4-BE49-F238E27FC236}">
-                <a16:creationId xmlns:a16="http://schemas.microsoft.com/office/drawing/2014/main" id="{C9E80901-0F27-4333-9490-B0F3D7C4391E}"/>
+                <a16:creationId xmlns:a16="http://schemas.microsoft.com/office/drawing/2014/main" id="{817EAA58-6BB2-4EF6-8401-B0D87042AD16}"/>
               </a:ext>
             </a:extLst>
           </p:cNvPr>
@@ -11027,14 +11027,14 @@
             <a:pPr algn="r">
               <a:defRPr sz="825" b="1">
                 <a:solidFill>
-                  <a:srgbClr val="0E1B3E"/>
+                  <a:srgbClr val="070F26"/>
                 </a:solidFill>
               </a:defRPr>
             </a:pPr>
             <a:r>
               <a:rPr sz="825" b="1">
                 <a:solidFill>
-                  <a:srgbClr val="0E1B3E"/>
+                  <a:srgbClr val="070F26"/>
                 </a:solidFill>
               </a:rPr>
               <a:t>NTT DATA UNIVERSITY</a:t>
@@ -11047,7 +11047,7 @@
           <p:cNvPr id="4" name="">
             <a:extLst xmlns:a="http://schemas.openxmlformats.org/drawingml/2006/main">
               <a:ext uri="{FF2B5EF4-FFF2-40B4-BE49-F238E27FC236}">
-                <a16:creationId xmlns:a16="http://schemas.microsoft.com/office/drawing/2014/main" id="{792D8372-D5C3-4D85-A346-5831C0C2537C}"/>
+                <a16:creationId xmlns:a16="http://schemas.microsoft.com/office/drawing/2014/main" id="{9C25F4BE-CE2B-4541-BAB2-26CF81C788DA}"/>
               </a:ext>
             </a:extLst>
           </p:cNvPr>
@@ -11105,7 +11105,7 @@
           <p:cNvPr id="5" name="">
             <a:extLst xmlns:a="http://schemas.openxmlformats.org/drawingml/2006/main">
               <a:ext uri="{FF2B5EF4-FFF2-40B4-BE49-F238E27FC236}">
-                <a16:creationId xmlns:a16="http://schemas.microsoft.com/office/drawing/2014/main" id="{FC5F80D5-4491-4946-AA96-02BE158A458D}"/>
+                <a16:creationId xmlns:a16="http://schemas.microsoft.com/office/drawing/2014/main" id="{9953840E-8EAE-45D9-AA18-12C51300C213}"/>
               </a:ext>
             </a:extLst>
           </p:cNvPr>
@@ -11163,7 +11163,7 @@
           <p:cNvPr id="6" name="">
             <a:extLst xmlns:a="http://schemas.openxmlformats.org/drawingml/2006/main">
               <a:ext uri="{FF2B5EF4-FFF2-40B4-BE49-F238E27FC236}">
-                <a16:creationId xmlns:a16="http://schemas.microsoft.com/office/drawing/2014/main" id="{05780BF9-5FE3-4067-B57A-6DCA4C49D1D8}"/>
+                <a16:creationId xmlns:a16="http://schemas.microsoft.com/office/drawing/2014/main" id="{E528CDF4-56BC-41A8-A4A0-52AD8FD03557}"/>
               </a:ext>
             </a:extLst>
           </p:cNvPr>
@@ -11201,14 +11201,14 @@
             <a:pPr algn="r">
               <a:defRPr sz="675" b="1">
                 <a:solidFill>
-                  <a:srgbClr val="0E1B3E"/>
+                  <a:srgbClr val="070F26"/>
                 </a:solidFill>
               </a:defRPr>
             </a:pPr>
             <a:r>
               <a:rPr sz="675" b="1">
                 <a:solidFill>
-                  <a:srgbClr val="0E1B3E"/>
+                  <a:srgbClr val="070F26"/>
                 </a:solidFill>
               </a:rPr>
               <a:t>NTT DATA UNIVERSITY</a:t>
@@ -11221,7 +11221,7 @@
           <p:cNvPr id="7" name="">
             <a:extLst xmlns:a="http://schemas.openxmlformats.org/drawingml/2006/main">
               <a:ext uri="{FF2B5EF4-FFF2-40B4-BE49-F238E27FC236}">
-                <a16:creationId xmlns:a16="http://schemas.microsoft.com/office/drawing/2014/main" id="{B4D2712F-E9E2-47A9-9407-504FD2EB1223}"/>
+                <a16:creationId xmlns:a16="http://schemas.microsoft.com/office/drawing/2014/main" id="{54ECCA61-18A2-4674-AAAD-B02B2CA8E441}"/>
               </a:ext>
             </a:extLst>
           </p:cNvPr>
@@ -11279,7 +11279,7 @@
           <p:cNvPr id="8" name="">
             <a:extLst xmlns:a="http://schemas.openxmlformats.org/drawingml/2006/main">
               <a:ext uri="{FF2B5EF4-FFF2-40B4-BE49-F238E27FC236}">
-                <a16:creationId xmlns:a16="http://schemas.microsoft.com/office/drawing/2014/main" id="{33258F3B-4A32-44CC-B40B-E298C4A6292D}"/>
+                <a16:creationId xmlns:a16="http://schemas.microsoft.com/office/drawing/2014/main" id="{CF0F6EDB-94B5-4080-B592-BDADED7D91FA}"/>
               </a:ext>
             </a:extLst>
           </p:cNvPr>
@@ -11317,14 +11317,14 @@
             <a:pPr algn="l">
               <a:defRPr sz="2400" b="0">
                 <a:solidFill>
-                  <a:srgbClr val="0E1B3E"/>
+                  <a:srgbClr val="070F26"/>
                 </a:solidFill>
               </a:defRPr>
             </a:pPr>
             <a:r>
               <a:rPr sz="2400" b="0">
                 <a:solidFill>
-                  <a:srgbClr val="0E1B3E"/>
+                  <a:srgbClr val="070F26"/>
                 </a:solidFill>
               </a:rPr>
               <a:t>Rode o snippet abaixo. Deve carregar 3000 linhas.</a:t>
@@ -11337,7 +11337,7 @@
           <p:cNvPr id="9" name="">
             <a:extLst xmlns:a="http://schemas.openxmlformats.org/drawingml/2006/main">
               <a:ext uri="{FF2B5EF4-FFF2-40B4-BE49-F238E27FC236}">
-                <a16:creationId xmlns:a16="http://schemas.microsoft.com/office/drawing/2014/main" id="{FBBB8168-6604-4B15-A7A0-D34952021F31}"/>
+                <a16:creationId xmlns:a16="http://schemas.microsoft.com/office/drawing/2014/main" id="{AA358D40-EC65-4F47-993D-23832A19FB53}"/>
               </a:ext>
             </a:extLst>
           </p:cNvPr>
@@ -11395,7 +11395,7 @@
           <p:cNvPr id="10" name="">
             <a:extLst xmlns:a="http://schemas.openxmlformats.org/drawingml/2006/main">
               <a:ext uri="{FF2B5EF4-FFF2-40B4-BE49-F238E27FC236}">
-                <a16:creationId xmlns:a16="http://schemas.microsoft.com/office/drawing/2014/main" id="{D457F5FE-D459-4EE9-A974-2136C524E0CB}"/>
+                <a16:creationId xmlns:a16="http://schemas.microsoft.com/office/drawing/2014/main" id="{62788183-30F3-47FA-9686-9140420EAA1C}"/>
               </a:ext>
             </a:extLst>
           </p:cNvPr>
@@ -11428,7 +11428,7 @@
           <p:cNvPr id="11" name="">
             <a:extLst xmlns:a="http://schemas.openxmlformats.org/drawingml/2006/main">
               <a:ext uri="{FF2B5EF4-FFF2-40B4-BE49-F238E27FC236}">
-                <a16:creationId xmlns:a16="http://schemas.microsoft.com/office/drawing/2014/main" id="{29D1D446-CE0F-4A5A-B5B2-A84FD96EB3D2}"/>
+                <a16:creationId xmlns:a16="http://schemas.microsoft.com/office/drawing/2014/main" id="{8E734747-79C8-4872-AA88-4B314A05870C}"/>
               </a:ext>
             </a:extLst>
           </p:cNvPr>
@@ -11463,7 +11463,7 @@
           <p:cNvPr id="12" name="">
             <a:extLst xmlns:a="http://schemas.openxmlformats.org/drawingml/2006/main">
               <a:ext uri="{FF2B5EF4-FFF2-40B4-BE49-F238E27FC236}">
-                <a16:creationId xmlns:a16="http://schemas.microsoft.com/office/drawing/2014/main" id="{9587DB4B-D7A7-4C4A-AE44-D256557F631C}"/>
+                <a16:creationId xmlns:a16="http://schemas.microsoft.com/office/drawing/2014/main" id="{1BF69386-7161-42C4-9E6D-15D619ADD523}"/>
               </a:ext>
             </a:extLst>
           </p:cNvPr>
@@ -11521,7 +11521,7 @@
           <p:cNvPr id="13" name="">
             <a:extLst xmlns:a="http://schemas.openxmlformats.org/drawingml/2006/main">
               <a:ext uri="{FF2B5EF4-FFF2-40B4-BE49-F238E27FC236}">
-                <a16:creationId xmlns:a16="http://schemas.microsoft.com/office/drawing/2014/main" id="{26257895-C3E5-48C3-8510-9718232FD721}"/>
+                <a16:creationId xmlns:a16="http://schemas.microsoft.com/office/drawing/2014/main" id="{E92DF26C-99AC-4A87-83D1-E6B7E822FCBD}"/>
               </a:ext>
             </a:extLst>
           </p:cNvPr>
@@ -11703,7 +11703,7 @@
           <p:cNvPr id="14" name="">
             <a:extLst xmlns:a="http://schemas.openxmlformats.org/drawingml/2006/main">
               <a:ext uri="{FF2B5EF4-FFF2-40B4-BE49-F238E27FC236}">
-                <a16:creationId xmlns:a16="http://schemas.microsoft.com/office/drawing/2014/main" id="{232074A2-1984-45B2-B1C2-3A3E496234ED}"/>
+                <a16:creationId xmlns:a16="http://schemas.microsoft.com/office/drawing/2014/main" id="{BE308936-5F8F-4879-AD8A-B723427AB201}"/>
               </a:ext>
             </a:extLst>
           </p:cNvPr>
@@ -11736,7 +11736,7 @@
           <p:cNvPr id="15" name="">
             <a:extLst xmlns:a="http://schemas.openxmlformats.org/drawingml/2006/main">
               <a:ext uri="{FF2B5EF4-FFF2-40B4-BE49-F238E27FC236}">
-                <a16:creationId xmlns:a16="http://schemas.microsoft.com/office/drawing/2014/main" id="{1A90C881-C2F7-487E-93B6-398478151144}"/>
+                <a16:creationId xmlns:a16="http://schemas.microsoft.com/office/drawing/2014/main" id="{64CDB7D0-E7D7-46DD-91F6-9C7D91936956}"/>
               </a:ext>
             </a:extLst>
           </p:cNvPr>
@@ -11771,7 +11771,7 @@
           <p:cNvPr id="16" name="">
             <a:extLst xmlns:a="http://schemas.openxmlformats.org/drawingml/2006/main">
               <a:ext uri="{FF2B5EF4-FFF2-40B4-BE49-F238E27FC236}">
-                <a16:creationId xmlns:a16="http://schemas.microsoft.com/office/drawing/2014/main" id="{4F27620D-A0FF-4AE4-867F-19DD69C04CD9}"/>
+                <a16:creationId xmlns:a16="http://schemas.microsoft.com/office/drawing/2014/main" id="{651434CB-1D41-41C8-AE87-36088FEAA474}"/>
               </a:ext>
             </a:extLst>
           </p:cNvPr>
@@ -11829,7 +11829,7 @@
           <p:cNvPr id="17" name="">
             <a:extLst xmlns:a="http://schemas.openxmlformats.org/drawingml/2006/main">
               <a:ext uri="{FF2B5EF4-FFF2-40B4-BE49-F238E27FC236}">
-                <a16:creationId xmlns:a16="http://schemas.microsoft.com/office/drawing/2014/main" id="{F78D86C9-5B84-4AB9-9E32-12B7CBE07029}"/>
+                <a16:creationId xmlns:a16="http://schemas.microsoft.com/office/drawing/2014/main" id="{7A8321D7-FA8F-4398-B7A0-7A6952223551}"/>
               </a:ext>
             </a:extLst>
           </p:cNvPr>
@@ -12012,7 +12012,7 @@
     </p:spTree>
     <p:extLst>
       <p:ext uri="{BB962C8B-B14F-4D97-AF65-F5344CB8AC3E}">
-        <p14:creationId xmlns:p14="http://schemas.microsoft.com/office/powerpoint/2010/main" val="2031648958"/>
+        <p14:creationId xmlns:p14="http://schemas.microsoft.com/office/powerpoint/2010/main" val="1052698680"/>
       </p:ext>
     </p:extLst>
   </p:cSld>
@@ -12025,7 +12025,7 @@
     <p:bg>
       <p:bgPr>
         <a:solidFill xmlns:a="http://schemas.openxmlformats.org/drawingml/2006/main">
-          <a:srgbClr val="0E1B3E"/>
+          <a:srgbClr val="070F26"/>
         </a:solidFill>
       </p:bgPr>
     </p:bg>
@@ -12043,7 +12043,7 @@
           <p:cNvPr id="1" name="">
             <a:extLst xmlns:a="http://schemas.openxmlformats.org/drawingml/2006/main">
               <a:ext uri="{FF2B5EF4-FFF2-40B4-BE49-F238E27FC236}">
-                <a16:creationId xmlns:a16="http://schemas.microsoft.com/office/drawing/2014/main" id="{17975B80-AEB6-46B9-8637-E0D32C7D48A8}"/>
+                <a16:creationId xmlns:a16="http://schemas.microsoft.com/office/drawing/2014/main" id="{FB2CF990-ACE9-4537-90AE-760086D6165C}"/>
               </a:ext>
             </a:extLst>
           </p:cNvPr>
@@ -12061,7 +12061,7 @@
             <a:avLst/>
           </a:prstGeom>
           <a:solidFill xmlns:a="http://schemas.openxmlformats.org/drawingml/2006/main">
-            <a:srgbClr val="0E1B3E"/>
+            <a:srgbClr val="070F26"/>
           </a:solidFill>
           <a:ln xmlns:a="http://schemas.openxmlformats.org/drawingml/2006/main" w="0">
             <a:solidFill>
@@ -12082,7 +12082,7 @@
           <p:nvPr/>
         </p:nvPicPr>
         <p:blipFill>
-          <a:blip xmlns:r="http://schemas.openxmlformats.org/officeDocument/2006/relationships" xmlns:a="http://schemas.openxmlformats.org/drawingml/2006/main" r:embed="R6f298004f9e0483a"/>
+          <a:blip xmlns:r="http://schemas.openxmlformats.org/officeDocument/2006/relationships" xmlns:a="http://schemas.openxmlformats.org/drawingml/2006/main" r:embed="R319aebb7766e44d1"/>
           <a:stretch xmlns:a="http://schemas.openxmlformats.org/drawingml/2006/main"/>
         </p:blipFill>
         <p:spPr>
@@ -12100,7 +12100,7 @@
           <p:cNvPr id="3" name="">
             <a:extLst xmlns:a="http://schemas.openxmlformats.org/drawingml/2006/main">
               <a:ext uri="{FF2B5EF4-FFF2-40B4-BE49-F238E27FC236}">
-                <a16:creationId xmlns:a16="http://schemas.microsoft.com/office/drawing/2014/main" id="{47A1D6BC-009E-45FC-B43A-EF97F2671FF9}"/>
+                <a16:creationId xmlns:a16="http://schemas.microsoft.com/office/drawing/2014/main" id="{A0C507F7-28D1-4891-A2A1-2AC4C3995220}"/>
               </a:ext>
             </a:extLst>
           </p:cNvPr>
@@ -12158,7 +12158,7 @@
           <p:cNvPr id="4" name="">
             <a:extLst xmlns:a="http://schemas.openxmlformats.org/drawingml/2006/main">
               <a:ext uri="{FF2B5EF4-FFF2-40B4-BE49-F238E27FC236}">
-                <a16:creationId xmlns:a16="http://schemas.microsoft.com/office/drawing/2014/main" id="{2CE70AA0-1AB7-4A36-82B0-77ECF7003629}"/>
+                <a16:creationId xmlns:a16="http://schemas.microsoft.com/office/drawing/2014/main" id="{85657B08-BE8F-4AFB-BC82-7A0DDF91440C}"/>
               </a:ext>
             </a:extLst>
           </p:cNvPr>
@@ -12216,7 +12216,7 @@
           <p:cNvPr id="5" name="">
             <a:extLst xmlns:a="http://schemas.openxmlformats.org/drawingml/2006/main">
               <a:ext uri="{FF2B5EF4-FFF2-40B4-BE49-F238E27FC236}">
-                <a16:creationId xmlns:a16="http://schemas.microsoft.com/office/drawing/2014/main" id="{B37ED857-5138-45A4-AAE6-A448CCEABA38}"/>
+                <a16:creationId xmlns:a16="http://schemas.microsoft.com/office/drawing/2014/main" id="{42CF58EB-8CE9-40BC-9347-124A5F46CFF3}"/>
               </a:ext>
             </a:extLst>
           </p:cNvPr>
@@ -12274,7 +12274,7 @@
           <p:cNvPr id="6" name="">
             <a:extLst xmlns:a="http://schemas.openxmlformats.org/drawingml/2006/main">
               <a:ext uri="{FF2B5EF4-FFF2-40B4-BE49-F238E27FC236}">
-                <a16:creationId xmlns:a16="http://schemas.microsoft.com/office/drawing/2014/main" id="{4175859B-50D8-446B-AD9C-631D8F99C001}"/>
+                <a16:creationId xmlns:a16="http://schemas.microsoft.com/office/drawing/2014/main" id="{C250435E-B0AE-43E0-A312-2B533DC43568}"/>
               </a:ext>
             </a:extLst>
           </p:cNvPr>
@@ -12336,13 +12336,13 @@
           <p:nvPr/>
         </p:nvPicPr>
         <p:blipFill>
-          <a:blip xmlns:r="http://schemas.openxmlformats.org/officeDocument/2006/relationships" xmlns:a="http://schemas.openxmlformats.org/drawingml/2006/main" r:embed="R7b8e857e231a4df1"/>
+          <a:blip xmlns:r="http://schemas.openxmlformats.org/officeDocument/2006/relationships" xmlns:a="http://schemas.openxmlformats.org/drawingml/2006/main" r:embed="Rb18519d142264157"/>
           <a:stretch xmlns:a="http://schemas.openxmlformats.org/drawingml/2006/main"/>
         </p:blipFill>
         <p:spPr>
           <a:xfrm xmlns:a="http://schemas.openxmlformats.org/drawingml/2006/main">
-            <a:off x="476250" y="1257300"/>
-            <a:ext cx="2667000" cy="4533900"/>
+            <a:off x="0" y="1746250"/>
+            <a:ext cx="2667000" cy="3556000"/>
           </a:xfrm>
           <a:prstGeom xmlns:a="http://schemas.openxmlformats.org/drawingml/2006/main" prst="rect">
             <a:avLst/>
@@ -12354,7 +12354,7 @@
           <p:cNvPr id="8" name="">
             <a:extLst xmlns:a="http://schemas.openxmlformats.org/drawingml/2006/main">
               <a:ext uri="{FF2B5EF4-FFF2-40B4-BE49-F238E27FC236}">
-                <a16:creationId xmlns:a16="http://schemas.microsoft.com/office/drawing/2014/main" id="{8016232B-AD47-4731-88C6-5F70E3E0305F}"/>
+                <a16:creationId xmlns:a16="http://schemas.microsoft.com/office/drawing/2014/main" id="{F4A47CB2-7C94-45B8-9FA5-DF719C5BD476}"/>
               </a:ext>
             </a:extLst>
           </p:cNvPr>
@@ -12412,7 +12412,7 @@
           <p:cNvPr id="9" name="">
             <a:extLst xmlns:a="http://schemas.openxmlformats.org/drawingml/2006/main">
               <a:ext uri="{FF2B5EF4-FFF2-40B4-BE49-F238E27FC236}">
-                <a16:creationId xmlns:a16="http://schemas.microsoft.com/office/drawing/2014/main" id="{E36EA9CC-8A75-48AE-A944-C531501DBB9D}"/>
+                <a16:creationId xmlns:a16="http://schemas.microsoft.com/office/drawing/2014/main" id="{9A87263E-62B0-4EB7-A173-A49893CAE8A1}"/>
               </a:ext>
             </a:extLst>
           </p:cNvPr>
@@ -12470,7 +12470,7 @@
           <p:cNvPr id="10" name="">
             <a:extLst xmlns:a="http://schemas.openxmlformats.org/drawingml/2006/main">
               <a:ext uri="{FF2B5EF4-FFF2-40B4-BE49-F238E27FC236}">
-                <a16:creationId xmlns:a16="http://schemas.microsoft.com/office/drawing/2014/main" id="{6BD0048A-A812-4AE3-9B16-6F1D6D4E3883}"/>
+                <a16:creationId xmlns:a16="http://schemas.microsoft.com/office/drawing/2014/main" id="{E5DE1E73-4E3B-4DC1-92AB-6F2ABACB0DFB}"/>
               </a:ext>
             </a:extLst>
           </p:cNvPr>
@@ -12526,7 +12526,7 @@
     </p:spTree>
     <p:extLst>
       <p:ext uri="{BB962C8B-B14F-4D97-AF65-F5344CB8AC3E}">
-        <p14:creationId xmlns:p14="http://schemas.microsoft.com/office/powerpoint/2010/main" val="1039574553"/>
+        <p14:creationId xmlns:p14="http://schemas.microsoft.com/office/powerpoint/2010/main" val="504630621"/>
       </p:ext>
     </p:extLst>
   </p:cSld>
@@ -12557,7 +12557,7 @@
           <p:cNvPr id="1" name="">
             <a:extLst xmlns:a="http://schemas.openxmlformats.org/drawingml/2006/main">
               <a:ext uri="{FF2B5EF4-FFF2-40B4-BE49-F238E27FC236}">
-                <a16:creationId xmlns:a16="http://schemas.microsoft.com/office/drawing/2014/main" id="{3869111D-FA81-4350-8E61-4CA11D72C399}"/>
+                <a16:creationId xmlns:a16="http://schemas.microsoft.com/office/drawing/2014/main" id="{0461BE0E-F83F-4044-87AE-D978699A7543}"/>
               </a:ext>
             </a:extLst>
           </p:cNvPr>
@@ -12596,7 +12596,7 @@
           <p:nvPr/>
         </p:nvPicPr>
         <p:blipFill>
-          <a:blip xmlns:r="http://schemas.openxmlformats.org/officeDocument/2006/relationships" xmlns:a="http://schemas.openxmlformats.org/drawingml/2006/main" r:embed="R7b24733dcb004199"/>
+          <a:blip xmlns:r="http://schemas.openxmlformats.org/officeDocument/2006/relationships" xmlns:a="http://schemas.openxmlformats.org/drawingml/2006/main" r:embed="R42d75ea0b73f42fc"/>
           <a:stretch xmlns:a="http://schemas.openxmlformats.org/drawingml/2006/main"/>
         </p:blipFill>
         <p:spPr>
@@ -12614,7 +12614,7 @@
           <p:cNvPr id="3" name="">
             <a:extLst xmlns:a="http://schemas.openxmlformats.org/drawingml/2006/main">
               <a:ext uri="{FF2B5EF4-FFF2-40B4-BE49-F238E27FC236}">
-                <a16:creationId xmlns:a16="http://schemas.microsoft.com/office/drawing/2014/main" id="{47674B06-04F7-435D-9DC9-6B790AEE1BC2}"/>
+                <a16:creationId xmlns:a16="http://schemas.microsoft.com/office/drawing/2014/main" id="{362C30BF-E41C-4736-9D22-1A4CF152F5CA}"/>
               </a:ext>
             </a:extLst>
           </p:cNvPr>
@@ -12652,14 +12652,14 @@
             <a:pPr algn="r">
               <a:defRPr sz="825" b="1">
                 <a:solidFill>
-                  <a:srgbClr val="0E1B3E"/>
+                  <a:srgbClr val="070F26"/>
                 </a:solidFill>
               </a:defRPr>
             </a:pPr>
             <a:r>
               <a:rPr sz="825" b="1">
                 <a:solidFill>
-                  <a:srgbClr val="0E1B3E"/>
+                  <a:srgbClr val="070F26"/>
                 </a:solidFill>
               </a:rPr>
               <a:t>NTT DATA UNIVERSITY</a:t>
@@ -12672,7 +12672,7 @@
           <p:cNvPr id="4" name="">
             <a:extLst xmlns:a="http://schemas.openxmlformats.org/drawingml/2006/main">
               <a:ext uri="{FF2B5EF4-FFF2-40B4-BE49-F238E27FC236}">
-                <a16:creationId xmlns:a16="http://schemas.microsoft.com/office/drawing/2014/main" id="{1086E9BB-30ED-4217-934A-1DF91D645E3C}"/>
+                <a16:creationId xmlns:a16="http://schemas.microsoft.com/office/drawing/2014/main" id="{3B785036-1114-4DFE-9678-65F9F191F81A}"/>
               </a:ext>
             </a:extLst>
           </p:cNvPr>
@@ -12730,7 +12730,7 @@
           <p:cNvPr id="5" name="">
             <a:extLst xmlns:a="http://schemas.openxmlformats.org/drawingml/2006/main">
               <a:ext uri="{FF2B5EF4-FFF2-40B4-BE49-F238E27FC236}">
-                <a16:creationId xmlns:a16="http://schemas.microsoft.com/office/drawing/2014/main" id="{F3F089A6-8042-4E75-B46C-CA537A0C4472}"/>
+                <a16:creationId xmlns:a16="http://schemas.microsoft.com/office/drawing/2014/main" id="{CEAC7E8B-8CDF-42F1-847B-E69F4F933EFB}"/>
               </a:ext>
             </a:extLst>
           </p:cNvPr>
@@ -12788,7 +12788,7 @@
           <p:cNvPr id="6" name="">
             <a:extLst xmlns:a="http://schemas.openxmlformats.org/drawingml/2006/main">
               <a:ext uri="{FF2B5EF4-FFF2-40B4-BE49-F238E27FC236}">
-                <a16:creationId xmlns:a16="http://schemas.microsoft.com/office/drawing/2014/main" id="{1B5E7193-EEA3-4C8D-B7DB-E7BE1A0BD202}"/>
+                <a16:creationId xmlns:a16="http://schemas.microsoft.com/office/drawing/2014/main" id="{85E367A5-A842-44B5-AA3A-A9D4F44F8AA0}"/>
               </a:ext>
             </a:extLst>
           </p:cNvPr>
@@ -12826,14 +12826,14 @@
             <a:pPr algn="r">
               <a:defRPr sz="675" b="1">
                 <a:solidFill>
-                  <a:srgbClr val="0E1B3E"/>
+                  <a:srgbClr val="070F26"/>
                 </a:solidFill>
               </a:defRPr>
             </a:pPr>
             <a:r>
               <a:rPr sz="675" b="1">
                 <a:solidFill>
-                  <a:srgbClr val="0E1B3E"/>
+                  <a:srgbClr val="070F26"/>
                 </a:solidFill>
               </a:rPr>
               <a:t>NTT DATA UNIVERSITY</a:t>
@@ -12846,7 +12846,7 @@
           <p:cNvPr id="7" name="">
             <a:extLst xmlns:a="http://schemas.openxmlformats.org/drawingml/2006/main">
               <a:ext uri="{FF2B5EF4-FFF2-40B4-BE49-F238E27FC236}">
-                <a16:creationId xmlns:a16="http://schemas.microsoft.com/office/drawing/2014/main" id="{F2161773-9B1E-448D-89BC-5F01A8C5933D}"/>
+                <a16:creationId xmlns:a16="http://schemas.microsoft.com/office/drawing/2014/main" id="{D994BFC8-5D8F-4734-9027-2BCA4E6B3C82}"/>
               </a:ext>
             </a:extLst>
           </p:cNvPr>
@@ -12904,7 +12904,7 @@
           <p:cNvPr id="8" name="">
             <a:extLst xmlns:a="http://schemas.openxmlformats.org/drawingml/2006/main">
               <a:ext uri="{FF2B5EF4-FFF2-40B4-BE49-F238E27FC236}">
-                <a16:creationId xmlns:a16="http://schemas.microsoft.com/office/drawing/2014/main" id="{4C07E212-614E-490C-8D7D-D1D71D09B013}"/>
+                <a16:creationId xmlns:a16="http://schemas.microsoft.com/office/drawing/2014/main" id="{E0D29429-CB9B-48B4-9F24-FD054616762E}"/>
               </a:ext>
             </a:extLst>
           </p:cNvPr>
@@ -12942,14 +12942,14 @@
             <a:pPr algn="l">
               <a:defRPr sz="2400" b="0">
                 <a:solidFill>
-                  <a:srgbClr val="0E1B3E"/>
+                  <a:srgbClr val="070F26"/>
                 </a:solidFill>
               </a:defRPr>
             </a:pPr>
             <a:r>
               <a:rPr sz="2400" b="0">
                 <a:solidFill>
-                  <a:srgbClr val="0E1B3E"/>
+                  <a:srgbClr val="070F26"/>
                 </a:solidFill>
               </a:rPr>
               <a:t>Comparação de tamanhos — CSV vs JSON vs Parquet</a:t>
@@ -12962,7 +12962,7 @@
           <p:cNvPr id="9" name="">
             <a:extLst xmlns:a="http://schemas.openxmlformats.org/drawingml/2006/main">
               <a:ext uri="{FF2B5EF4-FFF2-40B4-BE49-F238E27FC236}">
-                <a16:creationId xmlns:a16="http://schemas.microsoft.com/office/drawing/2014/main" id="{A9642EA8-6AC8-40F9-9F72-0DB505B52242}"/>
+                <a16:creationId xmlns:a16="http://schemas.microsoft.com/office/drawing/2014/main" id="{1A5FA3CD-2806-433A-AEAA-BCAEBAD612A4}"/>
               </a:ext>
             </a:extLst>
           </p:cNvPr>
@@ -13020,7 +13020,7 @@
           <p:cNvPr id="10" name="">
             <a:extLst xmlns:a="http://schemas.openxmlformats.org/drawingml/2006/main">
               <a:ext uri="{FF2B5EF4-FFF2-40B4-BE49-F238E27FC236}">
-                <a16:creationId xmlns:a16="http://schemas.microsoft.com/office/drawing/2014/main" id="{CDBE531F-3DC7-4D42-9047-632E4111E0AC}"/>
+                <a16:creationId xmlns:a16="http://schemas.microsoft.com/office/drawing/2014/main" id="{AE620287-FD54-409E-92FB-C06CA61A1BC6}"/>
               </a:ext>
             </a:extLst>
           </p:cNvPr>
@@ -13053,7 +13053,7 @@
           <p:cNvPr id="11" name="">
             <a:extLst xmlns:a="http://schemas.openxmlformats.org/drawingml/2006/main">
               <a:ext uri="{FF2B5EF4-FFF2-40B4-BE49-F238E27FC236}">
-                <a16:creationId xmlns:a16="http://schemas.microsoft.com/office/drawing/2014/main" id="{54B99E1C-AB5B-46B9-A9B0-8349C9B2C066}"/>
+                <a16:creationId xmlns:a16="http://schemas.microsoft.com/office/drawing/2014/main" id="{D93855E8-2B9D-4983-B77B-2002104713DF}"/>
               </a:ext>
             </a:extLst>
           </p:cNvPr>
@@ -13088,7 +13088,7 @@
           <p:cNvPr id="12" name="">
             <a:extLst xmlns:a="http://schemas.openxmlformats.org/drawingml/2006/main">
               <a:ext uri="{FF2B5EF4-FFF2-40B4-BE49-F238E27FC236}">
-                <a16:creationId xmlns:a16="http://schemas.microsoft.com/office/drawing/2014/main" id="{7CB37849-8F97-402F-B2E0-87E2A8C6E932}"/>
+                <a16:creationId xmlns:a16="http://schemas.microsoft.com/office/drawing/2014/main" id="{AB8D34FA-F60A-4CF0-92EF-93122A195EC8}"/>
               </a:ext>
             </a:extLst>
           </p:cNvPr>
@@ -13146,7 +13146,7 @@
           <p:cNvPr id="13" name="">
             <a:extLst xmlns:a="http://schemas.openxmlformats.org/drawingml/2006/main">
               <a:ext uri="{FF2B5EF4-FFF2-40B4-BE49-F238E27FC236}">
-                <a16:creationId xmlns:a16="http://schemas.microsoft.com/office/drawing/2014/main" id="{735F46FF-1202-424C-A200-647BD31CF98A}"/>
+                <a16:creationId xmlns:a16="http://schemas.microsoft.com/office/drawing/2014/main" id="{A1F31D90-11CE-4184-BA8D-646D10B635AB}"/>
               </a:ext>
             </a:extLst>
           </p:cNvPr>
@@ -13413,7 +13413,7 @@
           <p:cNvPr id="14" name="">
             <a:extLst xmlns:a="http://schemas.openxmlformats.org/drawingml/2006/main">
               <a:ext uri="{FF2B5EF4-FFF2-40B4-BE49-F238E27FC236}">
-                <a16:creationId xmlns:a16="http://schemas.microsoft.com/office/drawing/2014/main" id="{874979F3-FBD4-4AF7-8859-6262BF4F90A4}"/>
+                <a16:creationId xmlns:a16="http://schemas.microsoft.com/office/drawing/2014/main" id="{BAC92C08-F9AA-482D-9502-BB175EDD92CA}"/>
               </a:ext>
             </a:extLst>
           </p:cNvPr>
@@ -13446,7 +13446,7 @@
           <p:cNvPr id="15" name="">
             <a:extLst xmlns:a="http://schemas.openxmlformats.org/drawingml/2006/main">
               <a:ext uri="{FF2B5EF4-FFF2-40B4-BE49-F238E27FC236}">
-                <a16:creationId xmlns:a16="http://schemas.microsoft.com/office/drawing/2014/main" id="{189F56D2-7732-42E0-8E6C-C6E60FEDFBD6}"/>
+                <a16:creationId xmlns:a16="http://schemas.microsoft.com/office/drawing/2014/main" id="{4364979E-CB83-446B-8D44-E1622DCEC8B6}"/>
               </a:ext>
             </a:extLst>
           </p:cNvPr>
@@ -13481,7 +13481,7 @@
           <p:cNvPr id="16" name="">
             <a:extLst xmlns:a="http://schemas.openxmlformats.org/drawingml/2006/main">
               <a:ext uri="{FF2B5EF4-FFF2-40B4-BE49-F238E27FC236}">
-                <a16:creationId xmlns:a16="http://schemas.microsoft.com/office/drawing/2014/main" id="{E5331391-EF82-415A-835A-DA78CB9CF013}"/>
+                <a16:creationId xmlns:a16="http://schemas.microsoft.com/office/drawing/2014/main" id="{A1CF48A9-CCC0-499E-9E9F-3E72D2C9623D}"/>
               </a:ext>
             </a:extLst>
           </p:cNvPr>
@@ -13539,7 +13539,7 @@
           <p:cNvPr id="17" name="">
             <a:extLst xmlns:a="http://schemas.openxmlformats.org/drawingml/2006/main">
               <a:ext uri="{FF2B5EF4-FFF2-40B4-BE49-F238E27FC236}">
-                <a16:creationId xmlns:a16="http://schemas.microsoft.com/office/drawing/2014/main" id="{6C765DFF-8CBE-4732-8902-7F94D203D14A}"/>
+                <a16:creationId xmlns:a16="http://schemas.microsoft.com/office/drawing/2014/main" id="{B6C2360D-3EE4-488C-B2E8-375461A0F712}"/>
               </a:ext>
             </a:extLst>
           </p:cNvPr>
@@ -13707,7 +13707,7 @@
     </p:spTree>
     <p:extLst>
       <p:ext uri="{BB962C8B-B14F-4D97-AF65-F5344CB8AC3E}">
-        <p14:creationId xmlns:p14="http://schemas.microsoft.com/office/powerpoint/2010/main" val="2017927032"/>
+        <p14:creationId xmlns:p14="http://schemas.microsoft.com/office/powerpoint/2010/main" val="1111324100"/>
       </p:ext>
     </p:extLst>
   </p:cSld>
@@ -13738,7 +13738,7 @@
           <p:cNvPr id="1" name="">
             <a:extLst xmlns:a="http://schemas.openxmlformats.org/drawingml/2006/main">
               <a:ext uri="{FF2B5EF4-FFF2-40B4-BE49-F238E27FC236}">
-                <a16:creationId xmlns:a16="http://schemas.microsoft.com/office/drawing/2014/main" id="{6C3A268F-AEF0-409C-AB90-B0DC8A699530}"/>
+                <a16:creationId xmlns:a16="http://schemas.microsoft.com/office/drawing/2014/main" id="{9530380A-52F9-4E3B-A250-226F7053E7E4}"/>
               </a:ext>
             </a:extLst>
           </p:cNvPr>
@@ -13777,7 +13777,7 @@
           <p:nvPr/>
         </p:nvPicPr>
         <p:blipFill>
-          <a:blip xmlns:r="http://schemas.openxmlformats.org/officeDocument/2006/relationships" xmlns:a="http://schemas.openxmlformats.org/drawingml/2006/main" r:embed="Rb6807f45fa734ea4"/>
+          <a:blip xmlns:r="http://schemas.openxmlformats.org/officeDocument/2006/relationships" xmlns:a="http://schemas.openxmlformats.org/drawingml/2006/main" r:embed="Ra781f5783c1d4b33"/>
           <a:stretch xmlns:a="http://schemas.openxmlformats.org/drawingml/2006/main"/>
         </p:blipFill>
         <p:spPr>
@@ -13795,7 +13795,7 @@
           <p:cNvPr id="3" name="">
             <a:extLst xmlns:a="http://schemas.openxmlformats.org/drawingml/2006/main">
               <a:ext uri="{FF2B5EF4-FFF2-40B4-BE49-F238E27FC236}">
-                <a16:creationId xmlns:a16="http://schemas.microsoft.com/office/drawing/2014/main" id="{DDE32F7B-95EF-4601-A7FA-EFC132C49A60}"/>
+                <a16:creationId xmlns:a16="http://schemas.microsoft.com/office/drawing/2014/main" id="{423C579A-668A-4428-9296-CA037995044F}"/>
               </a:ext>
             </a:extLst>
           </p:cNvPr>
@@ -13833,14 +13833,14 @@
             <a:pPr algn="r">
               <a:defRPr sz="825" b="1">
                 <a:solidFill>
-                  <a:srgbClr val="0E1B3E"/>
+                  <a:srgbClr val="070F26"/>
                 </a:solidFill>
               </a:defRPr>
             </a:pPr>
             <a:r>
               <a:rPr sz="825" b="1">
                 <a:solidFill>
-                  <a:srgbClr val="0E1B3E"/>
+                  <a:srgbClr val="070F26"/>
                 </a:solidFill>
               </a:rPr>
               <a:t>NTT DATA UNIVERSITY</a:t>
@@ -13853,7 +13853,7 @@
           <p:cNvPr id="4" name="">
             <a:extLst xmlns:a="http://schemas.openxmlformats.org/drawingml/2006/main">
               <a:ext uri="{FF2B5EF4-FFF2-40B4-BE49-F238E27FC236}">
-                <a16:creationId xmlns:a16="http://schemas.microsoft.com/office/drawing/2014/main" id="{A9D6BB18-03CA-45AB-B80F-963EEA0C1D89}"/>
+                <a16:creationId xmlns:a16="http://schemas.microsoft.com/office/drawing/2014/main" id="{A7FE79CA-6D83-4503-BFD2-F5623CFF6512}"/>
               </a:ext>
             </a:extLst>
           </p:cNvPr>
@@ -13911,7 +13911,7 @@
           <p:cNvPr id="5" name="">
             <a:extLst xmlns:a="http://schemas.openxmlformats.org/drawingml/2006/main">
               <a:ext uri="{FF2B5EF4-FFF2-40B4-BE49-F238E27FC236}">
-                <a16:creationId xmlns:a16="http://schemas.microsoft.com/office/drawing/2014/main" id="{60AB597B-CF58-4C2B-B012-2587BF1CBC73}"/>
+                <a16:creationId xmlns:a16="http://schemas.microsoft.com/office/drawing/2014/main" id="{F9246328-A027-48ED-A099-56CF8732EB1C}"/>
               </a:ext>
             </a:extLst>
           </p:cNvPr>
@@ -13969,7 +13969,7 @@
           <p:cNvPr id="6" name="">
             <a:extLst xmlns:a="http://schemas.openxmlformats.org/drawingml/2006/main">
               <a:ext uri="{FF2B5EF4-FFF2-40B4-BE49-F238E27FC236}">
-                <a16:creationId xmlns:a16="http://schemas.microsoft.com/office/drawing/2014/main" id="{70C3AA5C-82FC-4FC9-BB33-63FBD4548628}"/>
+                <a16:creationId xmlns:a16="http://schemas.microsoft.com/office/drawing/2014/main" id="{290220AD-457C-4DF4-979F-65683ACC972C}"/>
               </a:ext>
             </a:extLst>
           </p:cNvPr>
@@ -14007,14 +14007,14 @@
             <a:pPr algn="r">
               <a:defRPr sz="675" b="1">
                 <a:solidFill>
-                  <a:srgbClr val="0E1B3E"/>
+                  <a:srgbClr val="070F26"/>
                 </a:solidFill>
               </a:defRPr>
             </a:pPr>
             <a:r>
               <a:rPr sz="675" b="1">
                 <a:solidFill>
-                  <a:srgbClr val="0E1B3E"/>
+                  <a:srgbClr val="070F26"/>
                 </a:solidFill>
               </a:rPr>
               <a:t>NTT DATA UNIVERSITY</a:t>
@@ -14027,7 +14027,7 @@
           <p:cNvPr id="7" name="">
             <a:extLst xmlns:a="http://schemas.openxmlformats.org/drawingml/2006/main">
               <a:ext uri="{FF2B5EF4-FFF2-40B4-BE49-F238E27FC236}">
-                <a16:creationId xmlns:a16="http://schemas.microsoft.com/office/drawing/2014/main" id="{CB554753-AB11-41F2-A20B-57BB2F9488D2}"/>
+                <a16:creationId xmlns:a16="http://schemas.microsoft.com/office/drawing/2014/main" id="{D49DF722-4764-48ED-8F5C-BEBDAEBA0958}"/>
               </a:ext>
             </a:extLst>
           </p:cNvPr>
@@ -14085,7 +14085,7 @@
           <p:cNvPr id="8" name="">
             <a:extLst xmlns:a="http://schemas.openxmlformats.org/drawingml/2006/main">
               <a:ext uri="{FF2B5EF4-FFF2-40B4-BE49-F238E27FC236}">
-                <a16:creationId xmlns:a16="http://schemas.microsoft.com/office/drawing/2014/main" id="{A0D3DC2F-0984-414D-BF82-63486E6F4581}"/>
+                <a16:creationId xmlns:a16="http://schemas.microsoft.com/office/drawing/2014/main" id="{A705A763-DEFD-48A7-8567-559CF44D2E3E}"/>
               </a:ext>
             </a:extLst>
           </p:cNvPr>
@@ -14123,14 +14123,14 @@
             <a:pPr algn="l">
               <a:defRPr sz="2400" b="0">
                 <a:solidFill>
-                  <a:srgbClr val="0E1B3E"/>
+                  <a:srgbClr val="070F26"/>
                 </a:solidFill>
               </a:defRPr>
             </a:pPr>
             <a:r>
               <a:rPr sz="2400" b="0">
                 <a:solidFill>
-                  <a:srgbClr val="0E1B3E"/>
+                  <a:srgbClr val="070F26"/>
                 </a:solidFill>
               </a:rPr>
               <a:t>Leitura seletiva de colunas — onde o Parquet brilha</a:t>
@@ -14143,7 +14143,7 @@
           <p:cNvPr id="9" name="">
             <a:extLst xmlns:a="http://schemas.openxmlformats.org/drawingml/2006/main">
               <a:ext uri="{FF2B5EF4-FFF2-40B4-BE49-F238E27FC236}">
-                <a16:creationId xmlns:a16="http://schemas.microsoft.com/office/drawing/2014/main" id="{5325C525-3B85-44E3-947C-7FDF9B316418}"/>
+                <a16:creationId xmlns:a16="http://schemas.microsoft.com/office/drawing/2014/main" id="{DDE729E1-3F95-4FD5-AAA1-166AF6E0ACF4}"/>
               </a:ext>
             </a:extLst>
           </p:cNvPr>
@@ -14201,7 +14201,7 @@
           <p:cNvPr id="10" name="">
             <a:extLst xmlns:a="http://schemas.openxmlformats.org/drawingml/2006/main">
               <a:ext uri="{FF2B5EF4-FFF2-40B4-BE49-F238E27FC236}">
-                <a16:creationId xmlns:a16="http://schemas.microsoft.com/office/drawing/2014/main" id="{4891378E-D4AD-4E71-B2C2-327E294AE4F9}"/>
+                <a16:creationId xmlns:a16="http://schemas.microsoft.com/office/drawing/2014/main" id="{0921A377-BA5C-46E6-8DDA-4464383A73A0}"/>
               </a:ext>
             </a:extLst>
           </p:cNvPr>
@@ -14234,7 +14234,7 @@
           <p:cNvPr id="11" name="">
             <a:extLst xmlns:a="http://schemas.openxmlformats.org/drawingml/2006/main">
               <a:ext uri="{FF2B5EF4-FFF2-40B4-BE49-F238E27FC236}">
-                <a16:creationId xmlns:a16="http://schemas.microsoft.com/office/drawing/2014/main" id="{1E587110-C85F-4820-A3CE-5741D34B8488}"/>
+                <a16:creationId xmlns:a16="http://schemas.microsoft.com/office/drawing/2014/main" id="{908C23D7-D55B-4FC7-A6F8-EB1CA541AD0C}"/>
               </a:ext>
             </a:extLst>
           </p:cNvPr>
@@ -14269,7 +14269,7 @@
           <p:cNvPr id="12" name="">
             <a:extLst xmlns:a="http://schemas.openxmlformats.org/drawingml/2006/main">
               <a:ext uri="{FF2B5EF4-FFF2-40B4-BE49-F238E27FC236}">
-                <a16:creationId xmlns:a16="http://schemas.microsoft.com/office/drawing/2014/main" id="{351C9981-AAA8-4A17-9888-2FC8A7FF7927}"/>
+                <a16:creationId xmlns:a16="http://schemas.microsoft.com/office/drawing/2014/main" id="{DAE5F135-C0C3-4562-8269-7ED9118A81C7}"/>
               </a:ext>
             </a:extLst>
           </p:cNvPr>
@@ -14327,7 +14327,7 @@
           <p:cNvPr id="13" name="">
             <a:extLst xmlns:a="http://schemas.openxmlformats.org/drawingml/2006/main">
               <a:ext uri="{FF2B5EF4-FFF2-40B4-BE49-F238E27FC236}">
-                <a16:creationId xmlns:a16="http://schemas.microsoft.com/office/drawing/2014/main" id="{2F4B6026-6612-4AEC-AE19-17597F7FEADD}"/>
+                <a16:creationId xmlns:a16="http://schemas.microsoft.com/office/drawing/2014/main" id="{19E0A1EA-2815-492C-8B0E-CE8415E90026}"/>
               </a:ext>
             </a:extLst>
           </p:cNvPr>
@@ -14650,7 +14650,7 @@
           <p:cNvPr id="14" name="">
             <a:extLst xmlns:a="http://schemas.openxmlformats.org/drawingml/2006/main">
               <a:ext uri="{FF2B5EF4-FFF2-40B4-BE49-F238E27FC236}">
-                <a16:creationId xmlns:a16="http://schemas.microsoft.com/office/drawing/2014/main" id="{B892047A-6878-4DBB-A198-2A7A33F61640}"/>
+                <a16:creationId xmlns:a16="http://schemas.microsoft.com/office/drawing/2014/main" id="{1FDBF510-B0D6-4D4E-9C94-21ACFB84318B}"/>
               </a:ext>
             </a:extLst>
           </p:cNvPr>
@@ -14683,7 +14683,7 @@
           <p:cNvPr id="15" name="">
             <a:extLst xmlns:a="http://schemas.openxmlformats.org/drawingml/2006/main">
               <a:ext uri="{FF2B5EF4-FFF2-40B4-BE49-F238E27FC236}">
-                <a16:creationId xmlns:a16="http://schemas.microsoft.com/office/drawing/2014/main" id="{F0297D4E-D3C8-44BE-9954-44EA239A59B0}"/>
+                <a16:creationId xmlns:a16="http://schemas.microsoft.com/office/drawing/2014/main" id="{87D6FBB3-56A7-4D16-A9C7-C9EB50E648FC}"/>
               </a:ext>
             </a:extLst>
           </p:cNvPr>
@@ -14718,7 +14718,7 @@
           <p:cNvPr id="16" name="">
             <a:extLst xmlns:a="http://schemas.openxmlformats.org/drawingml/2006/main">
               <a:ext uri="{FF2B5EF4-FFF2-40B4-BE49-F238E27FC236}">
-                <a16:creationId xmlns:a16="http://schemas.microsoft.com/office/drawing/2014/main" id="{0120ACF6-F54A-476D-866E-A2B69DA93C53}"/>
+                <a16:creationId xmlns:a16="http://schemas.microsoft.com/office/drawing/2014/main" id="{0E603AD7-8F60-45C7-B4CF-B1E692A13A73}"/>
               </a:ext>
             </a:extLst>
           </p:cNvPr>
@@ -14776,7 +14776,7 @@
           <p:cNvPr id="17" name="">
             <a:extLst xmlns:a="http://schemas.openxmlformats.org/drawingml/2006/main">
               <a:ext uri="{FF2B5EF4-FFF2-40B4-BE49-F238E27FC236}">
-                <a16:creationId xmlns:a16="http://schemas.microsoft.com/office/drawing/2014/main" id="{6A851C45-0194-456B-A8D6-76AF873F366F}"/>
+                <a16:creationId xmlns:a16="http://schemas.microsoft.com/office/drawing/2014/main" id="{0EECD659-81BB-4BF9-94CA-ABC626E6C317}"/>
               </a:ext>
             </a:extLst>
           </p:cNvPr>
@@ -15017,7 +15017,7 @@
     </p:spTree>
     <p:extLst>
       <p:ext uri="{BB962C8B-B14F-4D97-AF65-F5344CB8AC3E}">
-        <p14:creationId xmlns:p14="http://schemas.microsoft.com/office/powerpoint/2010/main" val="244362902"/>
+        <p14:creationId xmlns:p14="http://schemas.microsoft.com/office/powerpoint/2010/main" val="1441274130"/>
       </p:ext>
     </p:extLst>
   </p:cSld>
@@ -15030,7 +15030,7 @@
     <p:bg>
       <p:bgPr>
         <a:solidFill xmlns:a="http://schemas.openxmlformats.org/drawingml/2006/main">
-          <a:srgbClr val="0E1B3E"/>
+          <a:srgbClr val="070F26"/>
         </a:solidFill>
       </p:bgPr>
     </p:bg>
@@ -15048,7 +15048,7 @@
           <p:cNvPr id="1" name="">
             <a:extLst xmlns:a="http://schemas.openxmlformats.org/drawingml/2006/main">
               <a:ext uri="{FF2B5EF4-FFF2-40B4-BE49-F238E27FC236}">
-                <a16:creationId xmlns:a16="http://schemas.microsoft.com/office/drawing/2014/main" id="{57829661-2F90-496F-AC80-A990E48C28C1}"/>
+                <a16:creationId xmlns:a16="http://schemas.microsoft.com/office/drawing/2014/main" id="{597A0A5E-F4A4-46DD-AE7B-A77D17DD53EE}"/>
               </a:ext>
             </a:extLst>
           </p:cNvPr>
@@ -15066,7 +15066,7 @@
             <a:avLst/>
           </a:prstGeom>
           <a:solidFill xmlns:a="http://schemas.openxmlformats.org/drawingml/2006/main">
-            <a:srgbClr val="0E1B3E"/>
+            <a:srgbClr val="070F26"/>
           </a:solidFill>
           <a:ln xmlns:a="http://schemas.openxmlformats.org/drawingml/2006/main" w="0">
             <a:solidFill>
@@ -15087,7 +15087,7 @@
           <p:nvPr/>
         </p:nvPicPr>
         <p:blipFill>
-          <a:blip xmlns:r="http://schemas.openxmlformats.org/officeDocument/2006/relationships" xmlns:a="http://schemas.openxmlformats.org/drawingml/2006/main" r:embed="Raeabfb003fb44daf"/>
+          <a:blip xmlns:r="http://schemas.openxmlformats.org/officeDocument/2006/relationships" xmlns:a="http://schemas.openxmlformats.org/drawingml/2006/main" r:embed="Rd6cfcf4efc714db0"/>
           <a:stretch xmlns:a="http://schemas.openxmlformats.org/drawingml/2006/main"/>
         </p:blipFill>
         <p:spPr>
@@ -15105,7 +15105,7 @@
           <p:cNvPr id="3" name="">
             <a:extLst xmlns:a="http://schemas.openxmlformats.org/drawingml/2006/main">
               <a:ext uri="{FF2B5EF4-FFF2-40B4-BE49-F238E27FC236}">
-                <a16:creationId xmlns:a16="http://schemas.microsoft.com/office/drawing/2014/main" id="{03A4D54E-68D2-460E-AAF6-8BF2AC2EAAF0}"/>
+                <a16:creationId xmlns:a16="http://schemas.microsoft.com/office/drawing/2014/main" id="{BCAA01D4-A658-43BC-B869-DAF57E7B78B9}"/>
               </a:ext>
             </a:extLst>
           </p:cNvPr>
@@ -15163,7 +15163,7 @@
           <p:cNvPr id="4" name="">
             <a:extLst xmlns:a="http://schemas.openxmlformats.org/drawingml/2006/main">
               <a:ext uri="{FF2B5EF4-FFF2-40B4-BE49-F238E27FC236}">
-                <a16:creationId xmlns:a16="http://schemas.microsoft.com/office/drawing/2014/main" id="{ACB60569-5BCB-4789-8F19-8360E56AC195}"/>
+                <a16:creationId xmlns:a16="http://schemas.microsoft.com/office/drawing/2014/main" id="{D24FFF50-C088-4E67-818B-FC152BBC847A}"/>
               </a:ext>
             </a:extLst>
           </p:cNvPr>
@@ -15221,7 +15221,7 @@
           <p:cNvPr id="5" name="">
             <a:extLst xmlns:a="http://schemas.openxmlformats.org/drawingml/2006/main">
               <a:ext uri="{FF2B5EF4-FFF2-40B4-BE49-F238E27FC236}">
-                <a16:creationId xmlns:a16="http://schemas.microsoft.com/office/drawing/2014/main" id="{A86CF87E-3BE8-4674-9EEB-E2FB9F775663}"/>
+                <a16:creationId xmlns:a16="http://schemas.microsoft.com/office/drawing/2014/main" id="{9459E232-5565-42E8-84F2-D81019FDE1F2}"/>
               </a:ext>
             </a:extLst>
           </p:cNvPr>
@@ -15279,7 +15279,7 @@
           <p:cNvPr id="6" name="">
             <a:extLst xmlns:a="http://schemas.openxmlformats.org/drawingml/2006/main">
               <a:ext uri="{FF2B5EF4-FFF2-40B4-BE49-F238E27FC236}">
-                <a16:creationId xmlns:a16="http://schemas.microsoft.com/office/drawing/2014/main" id="{87714D49-A34E-48C2-9E8C-88AC4817848E}"/>
+                <a16:creationId xmlns:a16="http://schemas.microsoft.com/office/drawing/2014/main" id="{76DA6619-11F3-430B-94C7-A7C3302DCDA6}"/>
               </a:ext>
             </a:extLst>
           </p:cNvPr>
@@ -15341,13 +15341,13 @@
           <p:nvPr/>
         </p:nvPicPr>
         <p:blipFill>
-          <a:blip xmlns:r="http://schemas.openxmlformats.org/officeDocument/2006/relationships" xmlns:a="http://schemas.openxmlformats.org/drawingml/2006/main" r:embed="R26a6a2ae364a4e39"/>
+          <a:blip xmlns:r="http://schemas.openxmlformats.org/officeDocument/2006/relationships" xmlns:a="http://schemas.openxmlformats.org/drawingml/2006/main" r:embed="R7f13cac40f544065"/>
           <a:stretch xmlns:a="http://schemas.openxmlformats.org/drawingml/2006/main"/>
         </p:blipFill>
         <p:spPr>
           <a:xfrm xmlns:a="http://schemas.openxmlformats.org/drawingml/2006/main">
-            <a:off x="476250" y="1257300"/>
-            <a:ext cx="2667000" cy="4533900"/>
+            <a:off x="0" y="1746250"/>
+            <a:ext cx="2667000" cy="3556000"/>
           </a:xfrm>
           <a:prstGeom xmlns:a="http://schemas.openxmlformats.org/drawingml/2006/main" prst="rect">
             <a:avLst/>
@@ -15359,7 +15359,7 @@
           <p:cNvPr id="8" name="">
             <a:extLst xmlns:a="http://schemas.openxmlformats.org/drawingml/2006/main">
               <a:ext uri="{FF2B5EF4-FFF2-40B4-BE49-F238E27FC236}">
-                <a16:creationId xmlns:a16="http://schemas.microsoft.com/office/drawing/2014/main" id="{34F60F48-235C-4AED-BB84-64F69A7C42EE}"/>
+                <a16:creationId xmlns:a16="http://schemas.microsoft.com/office/drawing/2014/main" id="{A5044090-40A8-4C38-9B78-56B21689BFCE}"/>
               </a:ext>
             </a:extLst>
           </p:cNvPr>
@@ -15417,7 +15417,7 @@
           <p:cNvPr id="9" name="">
             <a:extLst xmlns:a="http://schemas.openxmlformats.org/drawingml/2006/main">
               <a:ext uri="{FF2B5EF4-FFF2-40B4-BE49-F238E27FC236}">
-                <a16:creationId xmlns:a16="http://schemas.microsoft.com/office/drawing/2014/main" id="{E09EB41C-EC0E-4A2B-922E-060CE3245FDF}"/>
+                <a16:creationId xmlns:a16="http://schemas.microsoft.com/office/drawing/2014/main" id="{BE6660C5-ECC2-4695-995D-C1122107B9D9}"/>
               </a:ext>
             </a:extLst>
           </p:cNvPr>
@@ -15475,7 +15475,7 @@
           <p:cNvPr id="10" name="">
             <a:extLst xmlns:a="http://schemas.openxmlformats.org/drawingml/2006/main">
               <a:ext uri="{FF2B5EF4-FFF2-40B4-BE49-F238E27FC236}">
-                <a16:creationId xmlns:a16="http://schemas.microsoft.com/office/drawing/2014/main" id="{679E1418-2C36-42E9-9898-B0CB05250B9C}"/>
+                <a16:creationId xmlns:a16="http://schemas.microsoft.com/office/drawing/2014/main" id="{F1D3A788-668F-482A-9073-40129A41DF9A}"/>
               </a:ext>
             </a:extLst>
           </p:cNvPr>
@@ -15531,7 +15531,7 @@
     </p:spTree>
     <p:extLst>
       <p:ext uri="{BB962C8B-B14F-4D97-AF65-F5344CB8AC3E}">
-        <p14:creationId xmlns:p14="http://schemas.microsoft.com/office/powerpoint/2010/main" val="2045923357"/>
+        <p14:creationId xmlns:p14="http://schemas.microsoft.com/office/powerpoint/2010/main" val="13222190"/>
       </p:ext>
     </p:extLst>
   </p:cSld>
@@ -15562,7 +15562,7 @@
           <p:cNvPr id="1" name="">
             <a:extLst xmlns:a="http://schemas.openxmlformats.org/drawingml/2006/main">
               <a:ext uri="{FF2B5EF4-FFF2-40B4-BE49-F238E27FC236}">
-                <a16:creationId xmlns:a16="http://schemas.microsoft.com/office/drawing/2014/main" id="{7839D799-5464-4BC8-89F1-CF78FA322011}"/>
+                <a16:creationId xmlns:a16="http://schemas.microsoft.com/office/drawing/2014/main" id="{BDDDD6FF-A083-4E45-85FB-F758A2A5F522}"/>
               </a:ext>
             </a:extLst>
           </p:cNvPr>
@@ -15601,7 +15601,7 @@
           <p:nvPr/>
         </p:nvPicPr>
         <p:blipFill>
-          <a:blip xmlns:r="http://schemas.openxmlformats.org/officeDocument/2006/relationships" xmlns:a="http://schemas.openxmlformats.org/drawingml/2006/main" r:embed="R51aa9d9c08e040fd"/>
+          <a:blip xmlns:r="http://schemas.openxmlformats.org/officeDocument/2006/relationships" xmlns:a="http://schemas.openxmlformats.org/drawingml/2006/main" r:embed="R4bdb89172c2648c0"/>
           <a:stretch xmlns:a="http://schemas.openxmlformats.org/drawingml/2006/main"/>
         </p:blipFill>
         <p:spPr>
@@ -15619,7 +15619,7 @@
           <p:cNvPr id="3" name="">
             <a:extLst xmlns:a="http://schemas.openxmlformats.org/drawingml/2006/main">
               <a:ext uri="{FF2B5EF4-FFF2-40B4-BE49-F238E27FC236}">
-                <a16:creationId xmlns:a16="http://schemas.microsoft.com/office/drawing/2014/main" id="{D1B43C36-F8E9-454F-B5B4-8D9527753A44}"/>
+                <a16:creationId xmlns:a16="http://schemas.microsoft.com/office/drawing/2014/main" id="{A3EEDB40-F3FD-44A6-8F11-98ACED48A488}"/>
               </a:ext>
             </a:extLst>
           </p:cNvPr>
@@ -15657,14 +15657,14 @@
             <a:pPr algn="r">
               <a:defRPr sz="825" b="1">
                 <a:solidFill>
-                  <a:srgbClr val="0E1B3E"/>
+                  <a:srgbClr val="070F26"/>
                 </a:solidFill>
               </a:defRPr>
             </a:pPr>
             <a:r>
               <a:rPr sz="825" b="1">
                 <a:solidFill>
-                  <a:srgbClr val="0E1B3E"/>
+                  <a:srgbClr val="070F26"/>
                 </a:solidFill>
               </a:rPr>
               <a:t>NTT DATA UNIVERSITY</a:t>
@@ -15677,7 +15677,7 @@
           <p:cNvPr id="4" name="">
             <a:extLst xmlns:a="http://schemas.openxmlformats.org/drawingml/2006/main">
               <a:ext uri="{FF2B5EF4-FFF2-40B4-BE49-F238E27FC236}">
-                <a16:creationId xmlns:a16="http://schemas.microsoft.com/office/drawing/2014/main" id="{11741C38-FED3-4FA7-8957-62384296BAE7}"/>
+                <a16:creationId xmlns:a16="http://schemas.microsoft.com/office/drawing/2014/main" id="{CF3215FF-583D-4153-A774-2B930EA3512E}"/>
               </a:ext>
             </a:extLst>
           </p:cNvPr>
@@ -15735,7 +15735,7 @@
           <p:cNvPr id="5" name="">
             <a:extLst xmlns:a="http://schemas.openxmlformats.org/drawingml/2006/main">
               <a:ext uri="{FF2B5EF4-FFF2-40B4-BE49-F238E27FC236}">
-                <a16:creationId xmlns:a16="http://schemas.microsoft.com/office/drawing/2014/main" id="{E98BF8C8-BD03-4B33-BCAA-0059B2A81F34}"/>
+                <a16:creationId xmlns:a16="http://schemas.microsoft.com/office/drawing/2014/main" id="{54726D5D-33DE-406C-A48C-36A249EBBE95}"/>
               </a:ext>
             </a:extLst>
           </p:cNvPr>
@@ -15793,7 +15793,7 @@
           <p:cNvPr id="6" name="">
             <a:extLst xmlns:a="http://schemas.openxmlformats.org/drawingml/2006/main">
               <a:ext uri="{FF2B5EF4-FFF2-40B4-BE49-F238E27FC236}">
-                <a16:creationId xmlns:a16="http://schemas.microsoft.com/office/drawing/2014/main" id="{E344926E-811D-4777-9136-E670095B7CCC}"/>
+                <a16:creationId xmlns:a16="http://schemas.microsoft.com/office/drawing/2014/main" id="{B5EBE71C-7F74-4229-93AA-41F8E232C58C}"/>
               </a:ext>
             </a:extLst>
           </p:cNvPr>
@@ -15831,14 +15831,14 @@
             <a:pPr algn="r">
               <a:defRPr sz="675" b="1">
                 <a:solidFill>
-                  <a:srgbClr val="0E1B3E"/>
+                  <a:srgbClr val="070F26"/>
                 </a:solidFill>
               </a:defRPr>
             </a:pPr>
             <a:r>
               <a:rPr sz="675" b="1">
                 <a:solidFill>
-                  <a:srgbClr val="0E1B3E"/>
+                  <a:srgbClr val="070F26"/>
                 </a:solidFill>
               </a:rPr>
               <a:t>NTT DATA UNIVERSITY</a:t>
@@ -15851,7 +15851,7 @@
           <p:cNvPr id="7" name="">
             <a:extLst xmlns:a="http://schemas.openxmlformats.org/drawingml/2006/main">
               <a:ext uri="{FF2B5EF4-FFF2-40B4-BE49-F238E27FC236}">
-                <a16:creationId xmlns:a16="http://schemas.microsoft.com/office/drawing/2014/main" id="{65FFC9B1-F2E5-42CD-87F8-26F7C0BBCC2E}"/>
+                <a16:creationId xmlns:a16="http://schemas.microsoft.com/office/drawing/2014/main" id="{ADDA780C-239B-423D-979F-95CF51B19E3A}"/>
               </a:ext>
             </a:extLst>
           </p:cNvPr>
@@ -15909,7 +15909,7 @@
           <p:cNvPr id="8" name="">
             <a:extLst xmlns:a="http://schemas.openxmlformats.org/drawingml/2006/main">
               <a:ext uri="{FF2B5EF4-FFF2-40B4-BE49-F238E27FC236}">
-                <a16:creationId xmlns:a16="http://schemas.microsoft.com/office/drawing/2014/main" id="{D7BCAE0C-11FB-4171-BB68-B892F563D170}"/>
+                <a16:creationId xmlns:a16="http://schemas.microsoft.com/office/drawing/2014/main" id="{761492D2-504C-47CD-A227-9F024A79A60A}"/>
               </a:ext>
             </a:extLst>
           </p:cNvPr>
@@ -15947,14 +15947,14 @@
             <a:pPr algn="l">
               <a:defRPr sz="2400" b="0">
                 <a:solidFill>
-                  <a:srgbClr val="0E1B3E"/>
+                  <a:srgbClr val="070F26"/>
                 </a:solidFill>
               </a:defRPr>
             </a:pPr>
             <a:r>
               <a:rPr sz="2400" b="0">
                 <a:solidFill>
-                  <a:srgbClr val="0E1B3E"/>
+                  <a:srgbClr val="070F26"/>
                 </a:solidFill>
               </a:rPr>
               <a:t>Quatro etapas — do silêncio ao consenso</a:t>
@@ -15967,7 +15967,7 @@
           <p:cNvPr id="9" name="">
             <a:extLst xmlns:a="http://schemas.openxmlformats.org/drawingml/2006/main">
               <a:ext uri="{FF2B5EF4-FFF2-40B4-BE49-F238E27FC236}">
-                <a16:creationId xmlns:a16="http://schemas.microsoft.com/office/drawing/2014/main" id="{ACF3535E-A40A-4DD9-A4F5-CC760729B034}"/>
+                <a16:creationId xmlns:a16="http://schemas.microsoft.com/office/drawing/2014/main" id="{81683498-5058-44F5-88EA-FEFDA13981C5}"/>
               </a:ext>
             </a:extLst>
           </p:cNvPr>
@@ -16025,7 +16025,7 @@
           <p:cNvPr id="10" name="">
             <a:extLst xmlns:a="http://schemas.openxmlformats.org/drawingml/2006/main">
               <a:ext uri="{FF2B5EF4-FFF2-40B4-BE49-F238E27FC236}">
-                <a16:creationId xmlns:a16="http://schemas.microsoft.com/office/drawing/2014/main" id="{DEB9462F-9551-4C6C-BA44-65C65DAE7C9A}"/>
+                <a16:creationId xmlns:a16="http://schemas.microsoft.com/office/drawing/2014/main" id="{9EA6E673-84EC-4F1C-802B-4DBECC948D79}"/>
               </a:ext>
             </a:extLst>
           </p:cNvPr>
@@ -16058,7 +16058,7 @@
           <p:cNvPr id="11" name="">
             <a:extLst xmlns:a="http://schemas.openxmlformats.org/drawingml/2006/main">
               <a:ext uri="{FF2B5EF4-FFF2-40B4-BE49-F238E27FC236}">
-                <a16:creationId xmlns:a16="http://schemas.microsoft.com/office/drawing/2014/main" id="{015C3225-1C0C-4B35-AED5-A400617B9A52}"/>
+                <a16:creationId xmlns:a16="http://schemas.microsoft.com/office/drawing/2014/main" id="{9020D76B-8CDA-4046-B72C-438BE9611E6A}"/>
               </a:ext>
             </a:extLst>
           </p:cNvPr>
@@ -16093,7 +16093,7 @@
           <p:cNvPr id="12" name="">
             <a:extLst xmlns:a="http://schemas.openxmlformats.org/drawingml/2006/main">
               <a:ext uri="{FF2B5EF4-FFF2-40B4-BE49-F238E27FC236}">
-                <a16:creationId xmlns:a16="http://schemas.microsoft.com/office/drawing/2014/main" id="{38B23F59-805D-4813-8F09-AB26A3F90B9F}"/>
+                <a16:creationId xmlns:a16="http://schemas.microsoft.com/office/drawing/2014/main" id="{F3A4433A-456E-4C13-83F7-4E5B88319A38}"/>
               </a:ext>
             </a:extLst>
           </p:cNvPr>
@@ -16151,7 +16151,7 @@
           <p:cNvPr id="13" name="">
             <a:extLst xmlns:a="http://schemas.openxmlformats.org/drawingml/2006/main">
               <a:ext uri="{FF2B5EF4-FFF2-40B4-BE49-F238E27FC236}">
-                <a16:creationId xmlns:a16="http://schemas.microsoft.com/office/drawing/2014/main" id="{9F435D25-461E-4EF0-8B18-A0C5509F4EFE}"/>
+                <a16:creationId xmlns:a16="http://schemas.microsoft.com/office/drawing/2014/main" id="{5A4757BF-A667-4508-9E19-0D4F9358D447}"/>
               </a:ext>
             </a:extLst>
           </p:cNvPr>
@@ -16189,14 +16189,14 @@
             <a:pPr algn="l">
               <a:defRPr sz="1050" b="1">
                 <a:solidFill>
-                  <a:srgbClr val="0E1B3E"/>
+                  <a:srgbClr val="070F26"/>
                 </a:solidFill>
               </a:defRPr>
             </a:pPr>
             <a:r>
               <a:rPr sz="1050" b="1">
                 <a:solidFill>
-                  <a:srgbClr val="0E1B3E"/>
+                  <a:srgbClr val="070F26"/>
                 </a:solidFill>
               </a:rPr>
               <a:t>Individual — 15 min</a:t>
@@ -16209,7 +16209,7 @@
           <p:cNvPr id="14" name="">
             <a:extLst xmlns:a="http://schemas.openxmlformats.org/drawingml/2006/main">
               <a:ext uri="{FF2B5EF4-FFF2-40B4-BE49-F238E27FC236}">
-                <a16:creationId xmlns:a16="http://schemas.microsoft.com/office/drawing/2014/main" id="{E8EDD8D1-8CC2-45B4-8317-B55B3C794DAE}"/>
+                <a16:creationId xmlns:a16="http://schemas.microsoft.com/office/drawing/2014/main" id="{554C20D9-592C-4074-83D2-6C9ECB259F4C}"/>
               </a:ext>
             </a:extLst>
           </p:cNvPr>
@@ -16301,7 +16301,7 @@
           <p:cNvPr id="15" name="">
             <a:extLst xmlns:a="http://schemas.openxmlformats.org/drawingml/2006/main">
               <a:ext uri="{FF2B5EF4-FFF2-40B4-BE49-F238E27FC236}">
-                <a16:creationId xmlns:a16="http://schemas.microsoft.com/office/drawing/2014/main" id="{4E6F0F6A-4596-40C1-87A7-24E86073B196}"/>
+                <a16:creationId xmlns:a16="http://schemas.microsoft.com/office/drawing/2014/main" id="{6BEEC926-485F-4DC5-9473-0618F5D24191}"/>
               </a:ext>
             </a:extLst>
           </p:cNvPr>
@@ -16334,7 +16334,7 @@
           <p:cNvPr id="16" name="">
             <a:extLst xmlns:a="http://schemas.openxmlformats.org/drawingml/2006/main">
               <a:ext uri="{FF2B5EF4-FFF2-40B4-BE49-F238E27FC236}">
-                <a16:creationId xmlns:a16="http://schemas.microsoft.com/office/drawing/2014/main" id="{A2376872-D3F9-4852-A85C-0A5FD7F90862}"/>
+                <a16:creationId xmlns:a16="http://schemas.microsoft.com/office/drawing/2014/main" id="{421820D6-C70E-4F53-98CB-10D4EE2776C1}"/>
               </a:ext>
             </a:extLst>
           </p:cNvPr>
@@ -16369,7 +16369,7 @@
           <p:cNvPr id="17" name="">
             <a:extLst xmlns:a="http://schemas.openxmlformats.org/drawingml/2006/main">
               <a:ext uri="{FF2B5EF4-FFF2-40B4-BE49-F238E27FC236}">
-                <a16:creationId xmlns:a16="http://schemas.microsoft.com/office/drawing/2014/main" id="{D7BD9D65-770B-4AF0-B998-98A7ADDDED3C}"/>
+                <a16:creationId xmlns:a16="http://schemas.microsoft.com/office/drawing/2014/main" id="{9F5E72AA-3F8F-4737-95D2-F34E7A3262AD}"/>
               </a:ext>
             </a:extLst>
           </p:cNvPr>
@@ -16427,7 +16427,7 @@
           <p:cNvPr id="18" name="">
             <a:extLst xmlns:a="http://schemas.openxmlformats.org/drawingml/2006/main">
               <a:ext uri="{FF2B5EF4-FFF2-40B4-BE49-F238E27FC236}">
-                <a16:creationId xmlns:a16="http://schemas.microsoft.com/office/drawing/2014/main" id="{3C01E13B-9C4A-4FA7-BC39-DAA9BD584A31}"/>
+                <a16:creationId xmlns:a16="http://schemas.microsoft.com/office/drawing/2014/main" id="{67A67029-E409-47F4-8206-11DB7A9E701B}"/>
               </a:ext>
             </a:extLst>
           </p:cNvPr>
@@ -16465,14 +16465,14 @@
             <a:pPr algn="l">
               <a:defRPr sz="1050" b="1">
                 <a:solidFill>
-                  <a:srgbClr val="0E1B3E"/>
+                  <a:srgbClr val="070F26"/>
                 </a:solidFill>
               </a:defRPr>
             </a:pPr>
             <a:r>
               <a:rPr sz="1050" b="1">
                 <a:solidFill>
-                  <a:srgbClr val="0E1B3E"/>
+                  <a:srgbClr val="070F26"/>
                 </a:solidFill>
               </a:rPr>
               <a:t>Coleta — 10 min</a:t>
@@ -16485,7 +16485,7 @@
           <p:cNvPr id="19" name="">
             <a:extLst xmlns:a="http://schemas.openxmlformats.org/drawingml/2006/main">
               <a:ext uri="{FF2B5EF4-FFF2-40B4-BE49-F238E27FC236}">
-                <a16:creationId xmlns:a16="http://schemas.microsoft.com/office/drawing/2014/main" id="{3A0689EE-16AA-4FC2-8C74-E0302B266206}"/>
+                <a16:creationId xmlns:a16="http://schemas.microsoft.com/office/drawing/2014/main" id="{A9B43C8C-CE79-4007-90AB-DE1F9B2C24B9}"/>
               </a:ext>
             </a:extLst>
           </p:cNvPr>
@@ -16577,7 +16577,7 @@
           <p:cNvPr id="20" name="">
             <a:extLst xmlns:a="http://schemas.openxmlformats.org/drawingml/2006/main">
               <a:ext uri="{FF2B5EF4-FFF2-40B4-BE49-F238E27FC236}">
-                <a16:creationId xmlns:a16="http://schemas.microsoft.com/office/drawing/2014/main" id="{0019DEAB-CC8A-4AC3-AC28-C47D6238F775}"/>
+                <a16:creationId xmlns:a16="http://schemas.microsoft.com/office/drawing/2014/main" id="{10C567AC-2577-4B37-9673-1D50D94A0D59}"/>
               </a:ext>
             </a:extLst>
           </p:cNvPr>
@@ -16610,7 +16610,7 @@
           <p:cNvPr id="21" name="">
             <a:extLst xmlns:a="http://schemas.openxmlformats.org/drawingml/2006/main">
               <a:ext uri="{FF2B5EF4-FFF2-40B4-BE49-F238E27FC236}">
-                <a16:creationId xmlns:a16="http://schemas.microsoft.com/office/drawing/2014/main" id="{229FFF78-5B34-4A8A-9D81-DAA84BE1954D}"/>
+                <a16:creationId xmlns:a16="http://schemas.microsoft.com/office/drawing/2014/main" id="{61F447BE-703F-4924-A01E-97EE34151DE9}"/>
               </a:ext>
             </a:extLst>
           </p:cNvPr>
@@ -16645,7 +16645,7 @@
           <p:cNvPr id="22" name="">
             <a:extLst xmlns:a="http://schemas.openxmlformats.org/drawingml/2006/main">
               <a:ext uri="{FF2B5EF4-FFF2-40B4-BE49-F238E27FC236}">
-                <a16:creationId xmlns:a16="http://schemas.microsoft.com/office/drawing/2014/main" id="{0146180A-9E02-4E84-BB27-1D8CE80F0592}"/>
+                <a16:creationId xmlns:a16="http://schemas.microsoft.com/office/drawing/2014/main" id="{A9E877AF-1D4C-4FD3-BD33-B17B7E2CE608}"/>
               </a:ext>
             </a:extLst>
           </p:cNvPr>
@@ -16703,7 +16703,7 @@
           <p:cNvPr id="23" name="">
             <a:extLst xmlns:a="http://schemas.openxmlformats.org/drawingml/2006/main">
               <a:ext uri="{FF2B5EF4-FFF2-40B4-BE49-F238E27FC236}">
-                <a16:creationId xmlns:a16="http://schemas.microsoft.com/office/drawing/2014/main" id="{2C8EA817-6E70-4CB8-BF7D-23AC1C30BA81}"/>
+                <a16:creationId xmlns:a16="http://schemas.microsoft.com/office/drawing/2014/main" id="{BE20DA25-7BA4-4716-9EE1-E359008A9B0C}"/>
               </a:ext>
             </a:extLst>
           </p:cNvPr>
@@ -16741,14 +16741,14 @@
             <a:pPr algn="l">
               <a:defRPr sz="1050" b="1">
                 <a:solidFill>
-                  <a:srgbClr val="0E1B3E"/>
+                  <a:srgbClr val="070F26"/>
                 </a:solidFill>
               </a:defRPr>
             </a:pPr>
             <a:r>
               <a:rPr sz="1050" b="1">
                 <a:solidFill>
-                  <a:srgbClr val="0E1B3E"/>
+                  <a:srgbClr val="070F26"/>
                 </a:solidFill>
               </a:rPr>
               <a:t>Discussão — 30 min</a:t>
@@ -16761,7 +16761,7 @@
           <p:cNvPr id="24" name="">
             <a:extLst xmlns:a="http://schemas.openxmlformats.org/drawingml/2006/main">
               <a:ext uri="{FF2B5EF4-FFF2-40B4-BE49-F238E27FC236}">
-                <a16:creationId xmlns:a16="http://schemas.microsoft.com/office/drawing/2014/main" id="{9CECA6AA-EBE2-4B9F-A0AF-B7F71CAD20D3}"/>
+                <a16:creationId xmlns:a16="http://schemas.microsoft.com/office/drawing/2014/main" id="{492B9854-B48B-4CD9-B46B-14CFC49E1F1A}"/>
               </a:ext>
             </a:extLst>
           </p:cNvPr>
@@ -16853,7 +16853,7 @@
           <p:cNvPr id="25" name="">
             <a:extLst xmlns:a="http://schemas.openxmlformats.org/drawingml/2006/main">
               <a:ext uri="{FF2B5EF4-FFF2-40B4-BE49-F238E27FC236}">
-                <a16:creationId xmlns:a16="http://schemas.microsoft.com/office/drawing/2014/main" id="{B0C15E5A-E10F-4C2F-9B7D-6547377C5DFB}"/>
+                <a16:creationId xmlns:a16="http://schemas.microsoft.com/office/drawing/2014/main" id="{487A8EBA-920B-4EAD-8F65-B63E93BC331F}"/>
               </a:ext>
             </a:extLst>
           </p:cNvPr>
@@ -16886,7 +16886,7 @@
           <p:cNvPr id="26" name="">
             <a:extLst xmlns:a="http://schemas.openxmlformats.org/drawingml/2006/main">
               <a:ext uri="{FF2B5EF4-FFF2-40B4-BE49-F238E27FC236}">
-                <a16:creationId xmlns:a16="http://schemas.microsoft.com/office/drawing/2014/main" id="{046B1716-9006-4915-9B85-4A5D7FB07937}"/>
+                <a16:creationId xmlns:a16="http://schemas.microsoft.com/office/drawing/2014/main" id="{2CF4AF13-4C2D-4C5D-97DB-4D953400995C}"/>
               </a:ext>
             </a:extLst>
           </p:cNvPr>
@@ -16921,7 +16921,7 @@
           <p:cNvPr id="27" name="">
             <a:extLst xmlns:a="http://schemas.openxmlformats.org/drawingml/2006/main">
               <a:ext uri="{FF2B5EF4-FFF2-40B4-BE49-F238E27FC236}">
-                <a16:creationId xmlns:a16="http://schemas.microsoft.com/office/drawing/2014/main" id="{4928445E-796B-447A-B8AF-428297D370F9}"/>
+                <a16:creationId xmlns:a16="http://schemas.microsoft.com/office/drawing/2014/main" id="{B384B37F-6390-4407-8CFB-8F8E34943BC8}"/>
               </a:ext>
             </a:extLst>
           </p:cNvPr>
@@ -16979,7 +16979,7 @@
           <p:cNvPr id="28" name="">
             <a:extLst xmlns:a="http://schemas.openxmlformats.org/drawingml/2006/main">
               <a:ext uri="{FF2B5EF4-FFF2-40B4-BE49-F238E27FC236}">
-                <a16:creationId xmlns:a16="http://schemas.microsoft.com/office/drawing/2014/main" id="{0BCBCFFB-305E-4C1A-8734-050C8C73EA54}"/>
+                <a16:creationId xmlns:a16="http://schemas.microsoft.com/office/drawing/2014/main" id="{3F1F24E8-F909-45C7-B3CA-0362BFD176F7}"/>
               </a:ext>
             </a:extLst>
           </p:cNvPr>
@@ -17017,14 +17017,14 @@
             <a:pPr algn="l">
               <a:defRPr sz="1050" b="1">
                 <a:solidFill>
-                  <a:srgbClr val="0E1B3E"/>
+                  <a:srgbClr val="070F26"/>
                 </a:solidFill>
               </a:defRPr>
             </a:pPr>
             <a:r>
               <a:rPr sz="1050" b="1">
                 <a:solidFill>
-                  <a:srgbClr val="0E1B3E"/>
+                  <a:srgbClr val="070F26"/>
                 </a:solidFill>
               </a:rPr>
               <a:t>Fechamento — 15 min</a:t>
@@ -17037,7 +17037,7 @@
           <p:cNvPr id="29" name="">
             <a:extLst xmlns:a="http://schemas.openxmlformats.org/drawingml/2006/main">
               <a:ext uri="{FF2B5EF4-FFF2-40B4-BE49-F238E27FC236}">
-                <a16:creationId xmlns:a16="http://schemas.microsoft.com/office/drawing/2014/main" id="{0FBE5E6A-4275-469C-86EC-292901FB263D}"/>
+                <a16:creationId xmlns:a16="http://schemas.microsoft.com/office/drawing/2014/main" id="{E0A6C6A4-148D-4A07-A103-EE1973CB32FF}"/>
               </a:ext>
             </a:extLst>
           </p:cNvPr>
@@ -17127,7 +17127,7 @@
     </p:spTree>
     <p:extLst>
       <p:ext uri="{BB962C8B-B14F-4D97-AF65-F5344CB8AC3E}">
-        <p14:creationId xmlns:p14="http://schemas.microsoft.com/office/powerpoint/2010/main" val="1400506695"/>
+        <p14:creationId xmlns:p14="http://schemas.microsoft.com/office/powerpoint/2010/main" val="2071906395"/>
       </p:ext>
     </p:extLst>
   </p:cSld>
